--- a/day2-deck/decks/Fixed Gross per Employee 5 Pct - Review.pptx
+++ b/day2-deck/decks/Fixed Gross per Employee 5 Pct - Review.pptx
@@ -1015,7 +1015,7 @@
         <p:spPr>
           <a:xfrm>
             <a:off x="457200" y="1207008"/>
-            <a:ext cx="11274552" cy="4645152"/>
+            <a:ext cx="11274552" cy="4782312"/>
           </a:xfrm>
           <a:prstGeom prst="rect">
             <a:avLst/>
@@ -1269,7 +1269,7 @@
         <p:spPr>
           <a:xfrm>
             <a:off x="658368" y="1700784"/>
-            <a:ext cx="1938528" cy="236668"/>
+            <a:ext cx="1938528" cy="248502"/>
           </a:xfrm>
           <a:prstGeom prst="rect">
             <a:avLst/>
@@ -1307,8 +1307,8 @@
         </p:nvSpPr>
         <p:spPr>
           <a:xfrm>
-            <a:off x="2670048" y="1754034"/>
-            <a:ext cx="694944" cy="130168"/>
+            <a:off x="2670048" y="1756697"/>
+            <a:ext cx="694944" cy="136676"/>
           </a:xfrm>
           <a:prstGeom prst="rect">
             <a:avLst/>
@@ -1328,7 +1328,7 @@
         <p:spPr>
           <a:xfrm>
             <a:off x="3419856" y="1700784"/>
-            <a:ext cx="950976" cy="236668"/>
+            <a:ext cx="950976" cy="248502"/>
           </a:xfrm>
           <a:prstGeom prst="rect">
             <a:avLst/>
@@ -1367,7 +1367,7 @@
         <p:spPr>
           <a:xfrm>
             <a:off x="4370832" y="1700784"/>
-            <a:ext cx="749808" cy="236668"/>
+            <a:ext cx="749808" cy="248502"/>
           </a:xfrm>
           <a:prstGeom prst="rect">
             <a:avLst/>
@@ -1406,7 +1406,7 @@
         <p:spPr>
           <a:xfrm>
             <a:off x="5120640" y="1700784"/>
-            <a:ext cx="749808" cy="236668"/>
+            <a:ext cx="749808" cy="248502"/>
           </a:xfrm>
           <a:prstGeom prst="rect">
             <a:avLst/>
@@ -1444,8 +1444,8 @@
         </p:nvSpPr>
         <p:spPr>
           <a:xfrm>
-            <a:off x="658368" y="1937452"/>
-            <a:ext cx="1938528" cy="236668"/>
+            <a:off x="658368" y="1949286"/>
+            <a:ext cx="1938528" cy="248502"/>
           </a:xfrm>
           <a:prstGeom prst="rect">
             <a:avLst/>
@@ -1483,8 +1483,8 @@
         </p:nvSpPr>
         <p:spPr>
           <a:xfrm>
-            <a:off x="2670048" y="1990703"/>
-            <a:ext cx="508906" cy="130168"/>
+            <a:off x="2670048" y="2005199"/>
+            <a:ext cx="508906" cy="136676"/>
           </a:xfrm>
           <a:prstGeom prst="rect">
             <a:avLst/>
@@ -1503,8 +1503,8 @@
         </p:nvSpPr>
         <p:spPr>
           <a:xfrm>
-            <a:off x="3419856" y="1937452"/>
-            <a:ext cx="950976" cy="236668"/>
+            <a:off x="3419856" y="1949286"/>
+            <a:ext cx="950976" cy="248502"/>
           </a:xfrm>
           <a:prstGeom prst="rect">
             <a:avLst/>
@@ -1542,8 +1542,8 @@
         </p:nvSpPr>
         <p:spPr>
           <a:xfrm>
-            <a:off x="4370832" y="1937452"/>
-            <a:ext cx="749808" cy="236668"/>
+            <a:off x="4370832" y="1949286"/>
+            <a:ext cx="749808" cy="248502"/>
           </a:xfrm>
           <a:prstGeom prst="rect">
             <a:avLst/>
@@ -1581,8 +1581,8 @@
         </p:nvSpPr>
         <p:spPr>
           <a:xfrm>
-            <a:off x="5120640" y="1937452"/>
-            <a:ext cx="749808" cy="236668"/>
+            <a:off x="5120640" y="1949286"/>
+            <a:ext cx="749808" cy="248502"/>
           </a:xfrm>
           <a:prstGeom prst="rect">
             <a:avLst/>
@@ -1620,8 +1620,8 @@
         </p:nvSpPr>
         <p:spPr>
           <a:xfrm>
-            <a:off x="658368" y="2174120"/>
-            <a:ext cx="1938528" cy="236668"/>
+            <a:off x="658368" y="2197787"/>
+            <a:ext cx="1938528" cy="248502"/>
           </a:xfrm>
           <a:prstGeom prst="rect">
             <a:avLst/>
@@ -1659,8 +1659,8 @@
         </p:nvSpPr>
         <p:spPr>
           <a:xfrm>
-            <a:off x="2670048" y="2227371"/>
-            <a:ext cx="443634" cy="130168"/>
+            <a:off x="2670048" y="2253700"/>
+            <a:ext cx="443634" cy="136676"/>
           </a:xfrm>
           <a:prstGeom prst="rect">
             <a:avLst/>
@@ -1679,8 +1679,8 @@
         </p:nvSpPr>
         <p:spPr>
           <a:xfrm>
-            <a:off x="3419856" y="2174120"/>
-            <a:ext cx="950976" cy="236668"/>
+            <a:off x="3419856" y="2197787"/>
+            <a:ext cx="950976" cy="248502"/>
           </a:xfrm>
           <a:prstGeom prst="rect">
             <a:avLst/>
@@ -1718,8 +1718,8 @@
         </p:nvSpPr>
         <p:spPr>
           <a:xfrm>
-            <a:off x="4370832" y="2174120"/>
-            <a:ext cx="749808" cy="236668"/>
+            <a:off x="4370832" y="2197787"/>
+            <a:ext cx="749808" cy="248502"/>
           </a:xfrm>
           <a:prstGeom prst="rect">
             <a:avLst/>
@@ -1757,8 +1757,8 @@
         </p:nvSpPr>
         <p:spPr>
           <a:xfrm>
-            <a:off x="5120640" y="2174120"/>
-            <a:ext cx="749808" cy="236668"/>
+            <a:off x="5120640" y="2197787"/>
+            <a:ext cx="749808" cy="248502"/>
           </a:xfrm>
           <a:prstGeom prst="rect">
             <a:avLst/>
@@ -1796,8 +1796,8 @@
         </p:nvSpPr>
         <p:spPr>
           <a:xfrm>
-            <a:off x="658368" y="2410789"/>
-            <a:ext cx="1938528" cy="236668"/>
+            <a:off x="658368" y="2446289"/>
+            <a:ext cx="1938528" cy="248502"/>
           </a:xfrm>
           <a:prstGeom prst="rect">
             <a:avLst/>
@@ -1835,8 +1835,8 @@
         </p:nvSpPr>
         <p:spPr>
           <a:xfrm>
-            <a:off x="2670048" y="2464039"/>
-            <a:ext cx="379571" cy="130168"/>
+            <a:off x="2670048" y="2502202"/>
+            <a:ext cx="379571" cy="136676"/>
           </a:xfrm>
           <a:prstGeom prst="rect">
             <a:avLst/>
@@ -1855,8 +1855,8 @@
         </p:nvSpPr>
         <p:spPr>
           <a:xfrm>
-            <a:off x="3419856" y="2410789"/>
-            <a:ext cx="950976" cy="236668"/>
+            <a:off x="3419856" y="2446289"/>
+            <a:ext cx="950976" cy="248502"/>
           </a:xfrm>
           <a:prstGeom prst="rect">
             <a:avLst/>
@@ -1894,8 +1894,8 @@
         </p:nvSpPr>
         <p:spPr>
           <a:xfrm>
-            <a:off x="4370832" y="2410789"/>
-            <a:ext cx="749808" cy="236668"/>
+            <a:off x="4370832" y="2446289"/>
+            <a:ext cx="749808" cy="248502"/>
           </a:xfrm>
           <a:prstGeom prst="rect">
             <a:avLst/>
@@ -1933,8 +1933,8 @@
         </p:nvSpPr>
         <p:spPr>
           <a:xfrm>
-            <a:off x="5120640" y="2410789"/>
-            <a:ext cx="749808" cy="236668"/>
+            <a:off x="5120640" y="2446289"/>
+            <a:ext cx="749808" cy="248502"/>
           </a:xfrm>
           <a:prstGeom prst="rect">
             <a:avLst/>
@@ -1972,8 +1972,8 @@
         </p:nvSpPr>
         <p:spPr>
           <a:xfrm>
-            <a:off x="658368" y="2647457"/>
-            <a:ext cx="1938528" cy="236668"/>
+            <a:off x="658368" y="2694791"/>
+            <a:ext cx="1938528" cy="248502"/>
           </a:xfrm>
           <a:prstGeom prst="rect">
             <a:avLst/>
@@ -2011,8 +2011,8 @@
         </p:nvSpPr>
         <p:spPr>
           <a:xfrm>
-            <a:off x="2670048" y="2700707"/>
-            <a:ext cx="310060" cy="130168"/>
+            <a:off x="2670048" y="2750703"/>
+            <a:ext cx="310060" cy="136676"/>
           </a:xfrm>
           <a:prstGeom prst="rect">
             <a:avLst/>
@@ -2031,8 +2031,8 @@
         </p:nvSpPr>
         <p:spPr>
           <a:xfrm>
-            <a:off x="3419856" y="2647457"/>
-            <a:ext cx="950976" cy="236668"/>
+            <a:off x="3419856" y="2694791"/>
+            <a:ext cx="950976" cy="248502"/>
           </a:xfrm>
           <a:prstGeom prst="rect">
             <a:avLst/>
@@ -2070,8 +2070,8 @@
         </p:nvSpPr>
         <p:spPr>
           <a:xfrm>
-            <a:off x="4370832" y="2647457"/>
-            <a:ext cx="749808" cy="236668"/>
+            <a:off x="4370832" y="2694791"/>
+            <a:ext cx="749808" cy="248502"/>
           </a:xfrm>
           <a:prstGeom prst="rect">
             <a:avLst/>
@@ -2109,8 +2109,8 @@
         </p:nvSpPr>
         <p:spPr>
           <a:xfrm>
-            <a:off x="5120640" y="2647457"/>
-            <a:ext cx="749808" cy="236668"/>
+            <a:off x="5120640" y="2694791"/>
+            <a:ext cx="749808" cy="248502"/>
           </a:xfrm>
           <a:prstGeom prst="rect">
             <a:avLst/>
@@ -2148,8 +2148,8 @@
         </p:nvSpPr>
         <p:spPr>
           <a:xfrm>
-            <a:off x="658368" y="2884125"/>
-            <a:ext cx="1938528" cy="236668"/>
+            <a:off x="658368" y="2943292"/>
+            <a:ext cx="1938528" cy="248502"/>
           </a:xfrm>
           <a:prstGeom prst="rect">
             <a:avLst/>
@@ -2187,8 +2187,8 @@
         </p:nvSpPr>
         <p:spPr>
           <a:xfrm>
-            <a:off x="2670048" y="2937376"/>
-            <a:ext cx="295191" cy="130168"/>
+            <a:off x="2670048" y="2999205"/>
+            <a:ext cx="295191" cy="136676"/>
           </a:xfrm>
           <a:prstGeom prst="rect">
             <a:avLst/>
@@ -2207,8 +2207,8 @@
         </p:nvSpPr>
         <p:spPr>
           <a:xfrm>
-            <a:off x="3419856" y="2884125"/>
-            <a:ext cx="950976" cy="236668"/>
+            <a:off x="3419856" y="2943292"/>
+            <a:ext cx="950976" cy="248502"/>
           </a:xfrm>
           <a:prstGeom prst="rect">
             <a:avLst/>
@@ -2246,8 +2246,8 @@
         </p:nvSpPr>
         <p:spPr>
           <a:xfrm>
-            <a:off x="4370832" y="2884125"/>
-            <a:ext cx="749808" cy="236668"/>
+            <a:off x="4370832" y="2943292"/>
+            <a:ext cx="749808" cy="248502"/>
           </a:xfrm>
           <a:prstGeom prst="rect">
             <a:avLst/>
@@ -2285,8 +2285,8 @@
         </p:nvSpPr>
         <p:spPr>
           <a:xfrm>
-            <a:off x="5120640" y="2884125"/>
-            <a:ext cx="749808" cy="236668"/>
+            <a:off x="5120640" y="2943292"/>
+            <a:ext cx="749808" cy="248502"/>
           </a:xfrm>
           <a:prstGeom prst="rect">
             <a:avLst/>
@@ -2324,8 +2324,8 @@
         </p:nvSpPr>
         <p:spPr>
           <a:xfrm>
-            <a:off x="658368" y="3120793"/>
-            <a:ext cx="1938528" cy="236668"/>
+            <a:off x="658368" y="3191794"/>
+            <a:ext cx="1938528" cy="248502"/>
           </a:xfrm>
           <a:prstGeom prst="rect">
             <a:avLst/>
@@ -2363,8 +2363,8 @@
         </p:nvSpPr>
         <p:spPr>
           <a:xfrm>
-            <a:off x="2670048" y="3174044"/>
-            <a:ext cx="265029" cy="130168"/>
+            <a:off x="2670048" y="3247707"/>
+            <a:ext cx="265029" cy="136676"/>
           </a:xfrm>
           <a:prstGeom prst="rect">
             <a:avLst/>
@@ -2383,8 +2383,8 @@
         </p:nvSpPr>
         <p:spPr>
           <a:xfrm>
-            <a:off x="3419856" y="3120793"/>
-            <a:ext cx="950976" cy="236668"/>
+            <a:off x="3419856" y="3191794"/>
+            <a:ext cx="950976" cy="248502"/>
           </a:xfrm>
           <a:prstGeom prst="rect">
             <a:avLst/>
@@ -2422,8 +2422,8 @@
         </p:nvSpPr>
         <p:spPr>
           <a:xfrm>
-            <a:off x="4370832" y="3120793"/>
-            <a:ext cx="749808" cy="236668"/>
+            <a:off x="4370832" y="3191794"/>
+            <a:ext cx="749808" cy="248502"/>
           </a:xfrm>
           <a:prstGeom prst="rect">
             <a:avLst/>
@@ -2461,8 +2461,8 @@
         </p:nvSpPr>
         <p:spPr>
           <a:xfrm>
-            <a:off x="5120640" y="3120793"/>
-            <a:ext cx="749808" cy="236668"/>
+            <a:off x="5120640" y="3191794"/>
+            <a:ext cx="749808" cy="248502"/>
           </a:xfrm>
           <a:prstGeom prst="rect">
             <a:avLst/>
@@ -2500,8 +2500,8 @@
         </p:nvSpPr>
         <p:spPr>
           <a:xfrm>
-            <a:off x="658368" y="3357462"/>
-            <a:ext cx="1938528" cy="236668"/>
+            <a:off x="658368" y="3440296"/>
+            <a:ext cx="1938528" cy="248502"/>
           </a:xfrm>
           <a:prstGeom prst="rect">
             <a:avLst/>
@@ -2539,8 +2539,8 @@
         </p:nvSpPr>
         <p:spPr>
           <a:xfrm>
-            <a:off x="2670048" y="3410712"/>
-            <a:ext cx="203194" cy="130168"/>
+            <a:off x="2670048" y="3496208"/>
+            <a:ext cx="203194" cy="136676"/>
           </a:xfrm>
           <a:prstGeom prst="rect">
             <a:avLst/>
@@ -2559,8 +2559,8 @@
         </p:nvSpPr>
         <p:spPr>
           <a:xfrm>
-            <a:off x="3419856" y="3357462"/>
-            <a:ext cx="950976" cy="236668"/>
+            <a:off x="3419856" y="3440296"/>
+            <a:ext cx="950976" cy="248502"/>
           </a:xfrm>
           <a:prstGeom prst="rect">
             <a:avLst/>
@@ -2598,8 +2598,8 @@
         </p:nvSpPr>
         <p:spPr>
           <a:xfrm>
-            <a:off x="4370832" y="3357462"/>
-            <a:ext cx="749808" cy="236668"/>
+            <a:off x="4370832" y="3440296"/>
+            <a:ext cx="749808" cy="248502"/>
           </a:xfrm>
           <a:prstGeom prst="rect">
             <a:avLst/>
@@ -2637,8 +2637,8 @@
         </p:nvSpPr>
         <p:spPr>
           <a:xfrm>
-            <a:off x="5120640" y="3357462"/>
-            <a:ext cx="749808" cy="236668"/>
+            <a:off x="5120640" y="3440296"/>
+            <a:ext cx="749808" cy="248502"/>
           </a:xfrm>
           <a:prstGeom prst="rect">
             <a:avLst/>
@@ -2676,8 +2676,8 @@
         </p:nvSpPr>
         <p:spPr>
           <a:xfrm>
-            <a:off x="658368" y="3594130"/>
-            <a:ext cx="1938528" cy="236668"/>
+            <a:off x="658368" y="3688797"/>
+            <a:ext cx="1938528" cy="248502"/>
           </a:xfrm>
           <a:prstGeom prst="rect">
             <a:avLst/>
@@ -2715,8 +2715,8 @@
         </p:nvSpPr>
         <p:spPr>
           <a:xfrm>
-            <a:off x="2670048" y="3647380"/>
-            <a:ext cx="189258" cy="130168"/>
+            <a:off x="2670048" y="3744710"/>
+            <a:ext cx="189258" cy="136676"/>
           </a:xfrm>
           <a:prstGeom prst="rect">
             <a:avLst/>
@@ -2735,8 +2735,8 @@
         </p:nvSpPr>
         <p:spPr>
           <a:xfrm>
-            <a:off x="3419856" y="3594130"/>
-            <a:ext cx="950976" cy="236668"/>
+            <a:off x="3419856" y="3688797"/>
+            <a:ext cx="950976" cy="248502"/>
           </a:xfrm>
           <a:prstGeom prst="rect">
             <a:avLst/>
@@ -2774,8 +2774,8 @@
         </p:nvSpPr>
         <p:spPr>
           <a:xfrm>
-            <a:off x="4370832" y="3594130"/>
-            <a:ext cx="749808" cy="236668"/>
+            <a:off x="4370832" y="3688797"/>
+            <a:ext cx="749808" cy="248502"/>
           </a:xfrm>
           <a:prstGeom prst="rect">
             <a:avLst/>
@@ -2813,8 +2813,8 @@
         </p:nvSpPr>
         <p:spPr>
           <a:xfrm>
-            <a:off x="5120640" y="3594130"/>
-            <a:ext cx="749808" cy="236668"/>
+            <a:off x="5120640" y="3688797"/>
+            <a:ext cx="749808" cy="248502"/>
           </a:xfrm>
           <a:prstGeom prst="rect">
             <a:avLst/>
@@ -2852,8 +2852,8 @@
         </p:nvSpPr>
         <p:spPr>
           <a:xfrm>
-            <a:off x="658368" y="3830798"/>
-            <a:ext cx="1938528" cy="236668"/>
+            <a:off x="658368" y="3937299"/>
+            <a:ext cx="1938528" cy="248502"/>
           </a:xfrm>
           <a:prstGeom prst="rect">
             <a:avLst/>
@@ -2891,8 +2891,8 @@
         </p:nvSpPr>
         <p:spPr>
           <a:xfrm>
-            <a:off x="2670048" y="3884048"/>
-            <a:ext cx="182441" cy="130168"/>
+            <a:off x="2670048" y="3993212"/>
+            <a:ext cx="182441" cy="136676"/>
           </a:xfrm>
           <a:prstGeom prst="rect">
             <a:avLst/>
@@ -2911,8 +2911,8 @@
         </p:nvSpPr>
         <p:spPr>
           <a:xfrm>
-            <a:off x="3419856" y="3830798"/>
-            <a:ext cx="950976" cy="236668"/>
+            <a:off x="3419856" y="3937299"/>
+            <a:ext cx="950976" cy="248502"/>
           </a:xfrm>
           <a:prstGeom prst="rect">
             <a:avLst/>
@@ -2950,8 +2950,8 @@
         </p:nvSpPr>
         <p:spPr>
           <a:xfrm>
-            <a:off x="4370832" y="3830798"/>
-            <a:ext cx="749808" cy="236668"/>
+            <a:off x="4370832" y="3937299"/>
+            <a:ext cx="749808" cy="248502"/>
           </a:xfrm>
           <a:prstGeom prst="rect">
             <a:avLst/>
@@ -2989,8 +2989,8 @@
         </p:nvSpPr>
         <p:spPr>
           <a:xfrm>
-            <a:off x="5120640" y="3830798"/>
-            <a:ext cx="749808" cy="236668"/>
+            <a:off x="5120640" y="3937299"/>
+            <a:ext cx="749808" cy="248502"/>
           </a:xfrm>
           <a:prstGeom prst="rect">
             <a:avLst/>
@@ -3028,8 +3028,8 @@
         </p:nvSpPr>
         <p:spPr>
           <a:xfrm>
-            <a:off x="658368" y="4067466"/>
-            <a:ext cx="1938528" cy="236668"/>
+            <a:off x="658368" y="4185800"/>
+            <a:ext cx="1938528" cy="248502"/>
           </a:xfrm>
           <a:prstGeom prst="rect">
             <a:avLst/>
@@ -3067,8 +3067,8 @@
         </p:nvSpPr>
         <p:spPr>
           <a:xfrm>
-            <a:off x="2670048" y="4120717"/>
-            <a:ext cx="156263" cy="130168"/>
+            <a:off x="2670048" y="4241713"/>
+            <a:ext cx="156263" cy="136676"/>
           </a:xfrm>
           <a:prstGeom prst="rect">
             <a:avLst/>
@@ -3087,8 +3087,8 @@
         </p:nvSpPr>
         <p:spPr>
           <a:xfrm>
-            <a:off x="3419856" y="4067466"/>
-            <a:ext cx="950976" cy="236668"/>
+            <a:off x="3419856" y="4185800"/>
+            <a:ext cx="950976" cy="248502"/>
           </a:xfrm>
           <a:prstGeom prst="rect">
             <a:avLst/>
@@ -3126,8 +3126,8 @@
         </p:nvSpPr>
         <p:spPr>
           <a:xfrm>
-            <a:off x="4370832" y="4067466"/>
-            <a:ext cx="749808" cy="236668"/>
+            <a:off x="4370832" y="4185800"/>
+            <a:ext cx="749808" cy="248502"/>
           </a:xfrm>
           <a:prstGeom prst="rect">
             <a:avLst/>
@@ -3165,8 +3165,8 @@
         </p:nvSpPr>
         <p:spPr>
           <a:xfrm>
-            <a:off x="5120640" y="4067466"/>
-            <a:ext cx="749808" cy="236668"/>
+            <a:off x="5120640" y="4185800"/>
+            <a:ext cx="749808" cy="248502"/>
           </a:xfrm>
           <a:prstGeom prst="rect">
             <a:avLst/>
@@ -3204,8 +3204,8 @@
         </p:nvSpPr>
         <p:spPr>
           <a:xfrm>
-            <a:off x="658368" y="4304135"/>
-            <a:ext cx="1938528" cy="236668"/>
+            <a:off x="658368" y="4434302"/>
+            <a:ext cx="1938528" cy="248502"/>
           </a:xfrm>
           <a:prstGeom prst="rect">
             <a:avLst/>
@@ -3243,8 +3243,8 @@
         </p:nvSpPr>
         <p:spPr>
           <a:xfrm>
-            <a:off x="2670048" y="4357385"/>
-            <a:ext cx="147344" cy="130168"/>
+            <a:off x="2670048" y="4490215"/>
+            <a:ext cx="147344" cy="136676"/>
           </a:xfrm>
           <a:prstGeom prst="rect">
             <a:avLst/>
@@ -3263,8 +3263,8 @@
         </p:nvSpPr>
         <p:spPr>
           <a:xfrm>
-            <a:off x="3419856" y="4304135"/>
-            <a:ext cx="950976" cy="236668"/>
+            <a:off x="3419856" y="4434302"/>
+            <a:ext cx="950976" cy="248502"/>
           </a:xfrm>
           <a:prstGeom prst="rect">
             <a:avLst/>
@@ -3302,8 +3302,8 @@
         </p:nvSpPr>
         <p:spPr>
           <a:xfrm>
-            <a:off x="4370832" y="4304135"/>
-            <a:ext cx="749808" cy="236668"/>
+            <a:off x="4370832" y="4434302"/>
+            <a:ext cx="749808" cy="248502"/>
           </a:xfrm>
           <a:prstGeom prst="rect">
             <a:avLst/>
@@ -3341,8 +3341,8 @@
         </p:nvSpPr>
         <p:spPr>
           <a:xfrm>
-            <a:off x="5120640" y="4304135"/>
-            <a:ext cx="749808" cy="236668"/>
+            <a:off x="5120640" y="4434302"/>
+            <a:ext cx="749808" cy="248502"/>
           </a:xfrm>
           <a:prstGeom prst="rect">
             <a:avLst/>
@@ -3380,8 +3380,8 @@
         </p:nvSpPr>
         <p:spPr>
           <a:xfrm>
-            <a:off x="658368" y="4540803"/>
-            <a:ext cx="1938528" cy="236668"/>
+            <a:off x="658368" y="4682804"/>
+            <a:ext cx="1938528" cy="248502"/>
           </a:xfrm>
           <a:prstGeom prst="rect">
             <a:avLst/>
@@ -3419,8 +3419,8 @@
         </p:nvSpPr>
         <p:spPr>
           <a:xfrm>
-            <a:off x="2670048" y="4594053"/>
-            <a:ext cx="147118" cy="130168"/>
+            <a:off x="2670048" y="4738717"/>
+            <a:ext cx="147118" cy="136676"/>
           </a:xfrm>
           <a:prstGeom prst="rect">
             <a:avLst/>
@@ -3439,8 +3439,8 @@
         </p:nvSpPr>
         <p:spPr>
           <a:xfrm>
-            <a:off x="3419856" y="4540803"/>
-            <a:ext cx="950976" cy="236668"/>
+            <a:off x="3419856" y="4682804"/>
+            <a:ext cx="950976" cy="248502"/>
           </a:xfrm>
           <a:prstGeom prst="rect">
             <a:avLst/>
@@ -3478,8 +3478,8 @@
         </p:nvSpPr>
         <p:spPr>
           <a:xfrm>
-            <a:off x="4370832" y="4540803"/>
-            <a:ext cx="749808" cy="236668"/>
+            <a:off x="4370832" y="4682804"/>
+            <a:ext cx="749808" cy="248502"/>
           </a:xfrm>
           <a:prstGeom prst="rect">
             <a:avLst/>
@@ -3517,8 +3517,8 @@
         </p:nvSpPr>
         <p:spPr>
           <a:xfrm>
-            <a:off x="5120640" y="4540803"/>
-            <a:ext cx="749808" cy="236668"/>
+            <a:off x="5120640" y="4682804"/>
+            <a:ext cx="749808" cy="248502"/>
           </a:xfrm>
           <a:prstGeom prst="rect">
             <a:avLst/>
@@ -3556,8 +3556,8 @@
         </p:nvSpPr>
         <p:spPr>
           <a:xfrm>
-            <a:off x="658368" y="4777471"/>
-            <a:ext cx="1938528" cy="236668"/>
+            <a:off x="658368" y="4931305"/>
+            <a:ext cx="1938528" cy="248502"/>
           </a:xfrm>
           <a:prstGeom prst="rect">
             <a:avLst/>
@@ -3595,8 +3595,8 @@
         </p:nvSpPr>
         <p:spPr>
           <a:xfrm>
-            <a:off x="2670048" y="4830721"/>
-            <a:ext cx="139353" cy="130168"/>
+            <a:off x="2670048" y="4987218"/>
+            <a:ext cx="139353" cy="136676"/>
           </a:xfrm>
           <a:prstGeom prst="rect">
             <a:avLst/>
@@ -3615,8 +3615,8 @@
         </p:nvSpPr>
         <p:spPr>
           <a:xfrm>
-            <a:off x="3419856" y="4777471"/>
-            <a:ext cx="950976" cy="236668"/>
+            <a:off x="3419856" y="4931305"/>
+            <a:ext cx="950976" cy="248502"/>
           </a:xfrm>
           <a:prstGeom prst="rect">
             <a:avLst/>
@@ -3654,8 +3654,8 @@
         </p:nvSpPr>
         <p:spPr>
           <a:xfrm>
-            <a:off x="4370832" y="4777471"/>
-            <a:ext cx="749808" cy="236668"/>
+            <a:off x="4370832" y="4931305"/>
+            <a:ext cx="749808" cy="248502"/>
           </a:xfrm>
           <a:prstGeom prst="rect">
             <a:avLst/>
@@ -3693,8 +3693,8 @@
         </p:nvSpPr>
         <p:spPr>
           <a:xfrm>
-            <a:off x="5120640" y="4777471"/>
-            <a:ext cx="749808" cy="236668"/>
+            <a:off x="5120640" y="4931305"/>
+            <a:ext cx="749808" cy="248502"/>
           </a:xfrm>
           <a:prstGeom prst="rect">
             <a:avLst/>
@@ -3732,8 +3732,8 @@
         </p:nvSpPr>
         <p:spPr>
           <a:xfrm>
-            <a:off x="658368" y="5014139"/>
-            <a:ext cx="1938528" cy="236668"/>
+            <a:off x="658368" y="5179807"/>
+            <a:ext cx="1938528" cy="248502"/>
           </a:xfrm>
           <a:prstGeom prst="rect">
             <a:avLst/>
@@ -3771,8 +3771,8 @@
         </p:nvSpPr>
         <p:spPr>
           <a:xfrm>
-            <a:off x="2670048" y="5067390"/>
-            <a:ext cx="137448" cy="130168"/>
+            <a:off x="2670048" y="5235720"/>
+            <a:ext cx="137448" cy="136676"/>
           </a:xfrm>
           <a:prstGeom prst="rect">
             <a:avLst/>
@@ -3791,8 +3791,8 @@
         </p:nvSpPr>
         <p:spPr>
           <a:xfrm>
-            <a:off x="3419856" y="5014139"/>
-            <a:ext cx="950976" cy="236668"/>
+            <a:off x="3419856" y="5179807"/>
+            <a:ext cx="950976" cy="248502"/>
           </a:xfrm>
           <a:prstGeom prst="rect">
             <a:avLst/>
@@ -3830,8 +3830,8 @@
         </p:nvSpPr>
         <p:spPr>
           <a:xfrm>
-            <a:off x="4370832" y="5014139"/>
-            <a:ext cx="749808" cy="236668"/>
+            <a:off x="4370832" y="5179807"/>
+            <a:ext cx="749808" cy="248502"/>
           </a:xfrm>
           <a:prstGeom prst="rect">
             <a:avLst/>
@@ -3869,8 +3869,8 @@
         </p:nvSpPr>
         <p:spPr>
           <a:xfrm>
-            <a:off x="5120640" y="5014139"/>
-            <a:ext cx="749808" cy="236668"/>
+            <a:off x="5120640" y="5179807"/>
+            <a:ext cx="749808" cy="248502"/>
           </a:xfrm>
           <a:prstGeom prst="rect">
             <a:avLst/>
@@ -3908,8 +3908,8 @@
         </p:nvSpPr>
         <p:spPr>
           <a:xfrm>
-            <a:off x="658368" y="5250808"/>
-            <a:ext cx="1938528" cy="236668"/>
+            <a:off x="658368" y="5428309"/>
+            <a:ext cx="1938528" cy="248502"/>
           </a:xfrm>
           <a:prstGeom prst="rect">
             <a:avLst/>
@@ -3947,8 +3947,8 @@
         </p:nvSpPr>
         <p:spPr>
           <a:xfrm>
-            <a:off x="2670048" y="5304058"/>
-            <a:ext cx="137179" cy="130168"/>
+            <a:off x="2670048" y="5484222"/>
+            <a:ext cx="137179" cy="136676"/>
           </a:xfrm>
           <a:prstGeom prst="rect">
             <a:avLst/>
@@ -3967,8 +3967,8 @@
         </p:nvSpPr>
         <p:spPr>
           <a:xfrm>
-            <a:off x="3419856" y="5250808"/>
-            <a:ext cx="950976" cy="236668"/>
+            <a:off x="3419856" y="5428309"/>
+            <a:ext cx="950976" cy="248502"/>
           </a:xfrm>
           <a:prstGeom prst="rect">
             <a:avLst/>
@@ -4006,8 +4006,8 @@
         </p:nvSpPr>
         <p:spPr>
           <a:xfrm>
-            <a:off x="4370832" y="5250808"/>
-            <a:ext cx="749808" cy="236668"/>
+            <a:off x="4370832" y="5428309"/>
+            <a:ext cx="749808" cy="248502"/>
           </a:xfrm>
           <a:prstGeom prst="rect">
             <a:avLst/>
@@ -4045,8 +4045,8 @@
         </p:nvSpPr>
         <p:spPr>
           <a:xfrm>
-            <a:off x="5120640" y="5250808"/>
-            <a:ext cx="749808" cy="236668"/>
+            <a:off x="5120640" y="5428309"/>
+            <a:ext cx="749808" cy="248502"/>
           </a:xfrm>
           <a:prstGeom prst="rect">
             <a:avLst/>
@@ -4084,8 +4084,8 @@
         </p:nvSpPr>
         <p:spPr>
           <a:xfrm>
-            <a:off x="658368" y="5487476"/>
-            <a:ext cx="1938528" cy="236668"/>
+            <a:off x="658368" y="5676810"/>
+            <a:ext cx="1938528" cy="248502"/>
           </a:xfrm>
           <a:prstGeom prst="rect">
             <a:avLst/>
@@ -4123,8 +4123,8 @@
         </p:nvSpPr>
         <p:spPr>
           <a:xfrm>
-            <a:off x="2670048" y="5540726"/>
-            <a:ext cx="128662" cy="130168"/>
+            <a:off x="2670048" y="5732723"/>
+            <a:ext cx="128662" cy="136676"/>
           </a:xfrm>
           <a:prstGeom prst="rect">
             <a:avLst/>
@@ -4143,8 +4143,8 @@
         </p:nvSpPr>
         <p:spPr>
           <a:xfrm>
-            <a:off x="3419856" y="5487476"/>
-            <a:ext cx="950976" cy="236668"/>
+            <a:off x="3419856" y="5676810"/>
+            <a:ext cx="950976" cy="248502"/>
           </a:xfrm>
           <a:prstGeom prst="rect">
             <a:avLst/>
@@ -4182,8 +4182,8 @@
         </p:nvSpPr>
         <p:spPr>
           <a:xfrm>
-            <a:off x="4370832" y="5487476"/>
-            <a:ext cx="749808" cy="236668"/>
+            <a:off x="4370832" y="5676810"/>
+            <a:ext cx="749808" cy="248502"/>
           </a:xfrm>
           <a:prstGeom prst="rect">
             <a:avLst/>
@@ -4221,8 +4221,8 @@
         </p:nvSpPr>
         <p:spPr>
           <a:xfrm>
-            <a:off x="5120640" y="5487476"/>
-            <a:ext cx="749808" cy="236668"/>
+            <a:off x="5120640" y="5676810"/>
+            <a:ext cx="749808" cy="248502"/>
           </a:xfrm>
           <a:prstGeom prst="rect">
             <a:avLst/>
@@ -4261,7 +4261,7 @@
         <p:spPr>
           <a:xfrm>
             <a:off x="6208776" y="1700784"/>
-            <a:ext cx="1938528" cy="236668"/>
+            <a:ext cx="1938528" cy="248502"/>
           </a:xfrm>
           <a:prstGeom prst="rect">
             <a:avLst/>
@@ -4299,8 +4299,8 @@
         </p:nvSpPr>
         <p:spPr>
           <a:xfrm>
-            <a:off x="8220456" y="1754034"/>
-            <a:ext cx="127501" cy="130168"/>
+            <a:off x="8220456" y="1756697"/>
+            <a:ext cx="127501" cy="136676"/>
           </a:xfrm>
           <a:prstGeom prst="rect">
             <a:avLst/>
@@ -4320,7 +4320,7 @@
         <p:spPr>
           <a:xfrm>
             <a:off x="8970264" y="1700784"/>
-            <a:ext cx="950976" cy="236668"/>
+            <a:ext cx="950976" cy="248502"/>
           </a:xfrm>
           <a:prstGeom prst="rect">
             <a:avLst/>
@@ -4359,7 +4359,7 @@
         <p:spPr>
           <a:xfrm>
             <a:off x="9921240" y="1700784"/>
-            <a:ext cx="749808" cy="236668"/>
+            <a:ext cx="749808" cy="248502"/>
           </a:xfrm>
           <a:prstGeom prst="rect">
             <a:avLst/>
@@ -4398,7 +4398,7 @@
         <p:spPr>
           <a:xfrm>
             <a:off x="10671048" y="1700784"/>
-            <a:ext cx="749808" cy="236668"/>
+            <a:ext cx="749808" cy="248502"/>
           </a:xfrm>
           <a:prstGeom prst="rect">
             <a:avLst/>
@@ -4436,8 +4436,8 @@
         </p:nvSpPr>
         <p:spPr>
           <a:xfrm>
-            <a:off x="6208776" y="1937452"/>
-            <a:ext cx="1938528" cy="236668"/>
+            <a:off x="6208776" y="1949286"/>
+            <a:ext cx="1938528" cy="248502"/>
           </a:xfrm>
           <a:prstGeom prst="rect">
             <a:avLst/>
@@ -4475,8 +4475,8 @@
         </p:nvSpPr>
         <p:spPr>
           <a:xfrm>
-            <a:off x="8220456" y="1990703"/>
-            <a:ext cx="120382" cy="130168"/>
+            <a:off x="8220456" y="2005199"/>
+            <a:ext cx="120382" cy="136676"/>
           </a:xfrm>
           <a:prstGeom prst="rect">
             <a:avLst/>
@@ -4495,8 +4495,8 @@
         </p:nvSpPr>
         <p:spPr>
           <a:xfrm>
-            <a:off x="8970264" y="1937452"/>
-            <a:ext cx="950976" cy="236668"/>
+            <a:off x="8970264" y="1949286"/>
+            <a:ext cx="950976" cy="248502"/>
           </a:xfrm>
           <a:prstGeom prst="rect">
             <a:avLst/>
@@ -4534,8 +4534,8 @@
         </p:nvSpPr>
         <p:spPr>
           <a:xfrm>
-            <a:off x="9921240" y="1937452"/>
-            <a:ext cx="749808" cy="236668"/>
+            <a:off x="9921240" y="1949286"/>
+            <a:ext cx="749808" cy="248502"/>
           </a:xfrm>
           <a:prstGeom prst="rect">
             <a:avLst/>
@@ -4573,8 +4573,8 @@
         </p:nvSpPr>
         <p:spPr>
           <a:xfrm>
-            <a:off x="10671048" y="1937452"/>
-            <a:ext cx="749808" cy="236668"/>
+            <a:off x="10671048" y="1949286"/>
+            <a:ext cx="749808" cy="248502"/>
           </a:xfrm>
           <a:prstGeom prst="rect">
             <a:avLst/>
@@ -4612,8 +4612,8 @@
         </p:nvSpPr>
         <p:spPr>
           <a:xfrm>
-            <a:off x="6208776" y="2174120"/>
-            <a:ext cx="1938528" cy="236668"/>
+            <a:off x="6208776" y="2197787"/>
+            <a:ext cx="1938528" cy="248502"/>
           </a:xfrm>
           <a:prstGeom prst="rect">
             <a:avLst/>
@@ -4651,8 +4651,8 @@
         </p:nvSpPr>
         <p:spPr>
           <a:xfrm>
-            <a:off x="8220456" y="2227371"/>
-            <a:ext cx="109290" cy="130168"/>
+            <a:off x="8220456" y="2253700"/>
+            <a:ext cx="109290" cy="136676"/>
           </a:xfrm>
           <a:prstGeom prst="rect">
             <a:avLst/>
@@ -4671,8 +4671,8 @@
         </p:nvSpPr>
         <p:spPr>
           <a:xfrm>
-            <a:off x="8970264" y="2174120"/>
-            <a:ext cx="950976" cy="236668"/>
+            <a:off x="8970264" y="2197787"/>
+            <a:ext cx="950976" cy="248502"/>
           </a:xfrm>
           <a:prstGeom prst="rect">
             <a:avLst/>
@@ -4710,8 +4710,8 @@
         </p:nvSpPr>
         <p:spPr>
           <a:xfrm>
-            <a:off x="9921240" y="2174120"/>
-            <a:ext cx="749808" cy="236668"/>
+            <a:off x="9921240" y="2197787"/>
+            <a:ext cx="749808" cy="248502"/>
           </a:xfrm>
           <a:prstGeom prst="rect">
             <a:avLst/>
@@ -4749,8 +4749,8 @@
         </p:nvSpPr>
         <p:spPr>
           <a:xfrm>
-            <a:off x="10671048" y="2174120"/>
-            <a:ext cx="749808" cy="236668"/>
+            <a:off x="10671048" y="2197787"/>
+            <a:ext cx="749808" cy="248502"/>
           </a:xfrm>
           <a:prstGeom prst="rect">
             <a:avLst/>
@@ -4788,8 +4788,8 @@
         </p:nvSpPr>
         <p:spPr>
           <a:xfrm>
-            <a:off x="6208776" y="2410789"/>
-            <a:ext cx="1938528" cy="236668"/>
+            <a:off x="6208776" y="2446289"/>
+            <a:ext cx="1938528" cy="248502"/>
           </a:xfrm>
           <a:prstGeom prst="rect">
             <a:avLst/>
@@ -4827,8 +4827,8 @@
         </p:nvSpPr>
         <p:spPr>
           <a:xfrm>
-            <a:off x="8220456" y="2464039"/>
-            <a:ext cx="108135" cy="130168"/>
+            <a:off x="8220456" y="2502202"/>
+            <a:ext cx="108135" cy="136676"/>
           </a:xfrm>
           <a:prstGeom prst="rect">
             <a:avLst/>
@@ -4847,8 +4847,8 @@
         </p:nvSpPr>
         <p:spPr>
           <a:xfrm>
-            <a:off x="8970264" y="2410789"/>
-            <a:ext cx="950976" cy="236668"/>
+            <a:off x="8970264" y="2446289"/>
+            <a:ext cx="950976" cy="248502"/>
           </a:xfrm>
           <a:prstGeom prst="rect">
             <a:avLst/>
@@ -4886,8 +4886,8 @@
         </p:nvSpPr>
         <p:spPr>
           <a:xfrm>
-            <a:off x="9921240" y="2410789"/>
-            <a:ext cx="749808" cy="236668"/>
+            <a:off x="9921240" y="2446289"/>
+            <a:ext cx="749808" cy="248502"/>
           </a:xfrm>
           <a:prstGeom prst="rect">
             <a:avLst/>
@@ -4925,8 +4925,8 @@
         </p:nvSpPr>
         <p:spPr>
           <a:xfrm>
-            <a:off x="10671048" y="2410789"/>
-            <a:ext cx="749808" cy="236668"/>
+            <a:off x="10671048" y="2446289"/>
+            <a:ext cx="749808" cy="248502"/>
           </a:xfrm>
           <a:prstGeom prst="rect">
             <a:avLst/>
@@ -4964,8 +4964,8 @@
         </p:nvSpPr>
         <p:spPr>
           <a:xfrm>
-            <a:off x="6208776" y="2647457"/>
-            <a:ext cx="1938528" cy="236668"/>
+            <a:off x="6208776" y="2694791"/>
+            <a:ext cx="1938528" cy="248502"/>
           </a:xfrm>
           <a:prstGeom prst="rect">
             <a:avLst/>
@@ -5003,8 +5003,8 @@
         </p:nvSpPr>
         <p:spPr>
           <a:xfrm>
-            <a:off x="8220456" y="2700707"/>
-            <a:ext cx="105077" cy="130168"/>
+            <a:off x="8220456" y="2750703"/>
+            <a:ext cx="105077" cy="136676"/>
           </a:xfrm>
           <a:prstGeom prst="rect">
             <a:avLst/>
@@ -5023,8 +5023,8 @@
         </p:nvSpPr>
         <p:spPr>
           <a:xfrm>
-            <a:off x="8970264" y="2647457"/>
-            <a:ext cx="950976" cy="236668"/>
+            <a:off x="8970264" y="2694791"/>
+            <a:ext cx="950976" cy="248502"/>
           </a:xfrm>
           <a:prstGeom prst="rect">
             <a:avLst/>
@@ -5062,8 +5062,8 @@
         </p:nvSpPr>
         <p:spPr>
           <a:xfrm>
-            <a:off x="9921240" y="2647457"/>
-            <a:ext cx="749808" cy="236668"/>
+            <a:off x="9921240" y="2694791"/>
+            <a:ext cx="749808" cy="248502"/>
           </a:xfrm>
           <a:prstGeom prst="rect">
             <a:avLst/>
@@ -5101,8 +5101,8 @@
         </p:nvSpPr>
         <p:spPr>
           <a:xfrm>
-            <a:off x="10671048" y="2647457"/>
-            <a:ext cx="749808" cy="236668"/>
+            <a:off x="10671048" y="2694791"/>
+            <a:ext cx="749808" cy="248502"/>
           </a:xfrm>
           <a:prstGeom prst="rect">
             <a:avLst/>
@@ -5140,8 +5140,8 @@
         </p:nvSpPr>
         <p:spPr>
           <a:xfrm>
-            <a:off x="6208776" y="2884125"/>
-            <a:ext cx="1938528" cy="236668"/>
+            <a:off x="6208776" y="2943292"/>
+            <a:ext cx="1938528" cy="248502"/>
           </a:xfrm>
           <a:prstGeom prst="rect">
             <a:avLst/>
@@ -5179,8 +5179,8 @@
         </p:nvSpPr>
         <p:spPr>
           <a:xfrm>
-            <a:off x="8220456" y="2937376"/>
-            <a:ext cx="101658" cy="130168"/>
+            <a:off x="8220456" y="2999205"/>
+            <a:ext cx="101658" cy="136676"/>
           </a:xfrm>
           <a:prstGeom prst="rect">
             <a:avLst/>
@@ -5199,8 +5199,8 @@
         </p:nvSpPr>
         <p:spPr>
           <a:xfrm>
-            <a:off x="8970264" y="2884125"/>
-            <a:ext cx="950976" cy="236668"/>
+            <a:off x="8970264" y="2943292"/>
+            <a:ext cx="950976" cy="248502"/>
           </a:xfrm>
           <a:prstGeom prst="rect">
             <a:avLst/>
@@ -5238,8 +5238,8 @@
         </p:nvSpPr>
         <p:spPr>
           <a:xfrm>
-            <a:off x="9921240" y="2884125"/>
-            <a:ext cx="749808" cy="236668"/>
+            <a:off x="9921240" y="2943292"/>
+            <a:ext cx="749808" cy="248502"/>
           </a:xfrm>
           <a:prstGeom prst="rect">
             <a:avLst/>
@@ -5277,8 +5277,8 @@
         </p:nvSpPr>
         <p:spPr>
           <a:xfrm>
-            <a:off x="10671048" y="2884125"/>
-            <a:ext cx="749808" cy="236668"/>
+            <a:off x="10671048" y="2943292"/>
+            <a:ext cx="749808" cy="248502"/>
           </a:xfrm>
           <a:prstGeom prst="rect">
             <a:avLst/>
@@ -5316,8 +5316,8 @@
         </p:nvSpPr>
         <p:spPr>
           <a:xfrm>
-            <a:off x="6208776" y="3120793"/>
-            <a:ext cx="1938528" cy="236668"/>
+            <a:off x="6208776" y="3191794"/>
+            <a:ext cx="1938528" cy="248502"/>
           </a:xfrm>
           <a:prstGeom prst="rect">
             <a:avLst/>
@@ -5355,8 +5355,8 @@
         </p:nvSpPr>
         <p:spPr>
           <a:xfrm>
-            <a:off x="8220456" y="3174044"/>
-            <a:ext cx="91723" cy="130168"/>
+            <a:off x="8220456" y="3247707"/>
+            <a:ext cx="91723" cy="136676"/>
           </a:xfrm>
           <a:prstGeom prst="rect">
             <a:avLst/>
@@ -5375,8 +5375,8 @@
         </p:nvSpPr>
         <p:spPr>
           <a:xfrm>
-            <a:off x="8970264" y="3120793"/>
-            <a:ext cx="950976" cy="236668"/>
+            <a:off x="8970264" y="3191794"/>
+            <a:ext cx="950976" cy="248502"/>
           </a:xfrm>
           <a:prstGeom prst="rect">
             <a:avLst/>
@@ -5414,8 +5414,8 @@
         </p:nvSpPr>
         <p:spPr>
           <a:xfrm>
-            <a:off x="9921240" y="3120793"/>
-            <a:ext cx="749808" cy="236668"/>
+            <a:off x="9921240" y="3191794"/>
+            <a:ext cx="749808" cy="248502"/>
           </a:xfrm>
           <a:prstGeom prst="rect">
             <a:avLst/>
@@ -5453,8 +5453,8 @@
         </p:nvSpPr>
         <p:spPr>
           <a:xfrm>
-            <a:off x="10671048" y="3120793"/>
-            <a:ext cx="749808" cy="236668"/>
+            <a:off x="10671048" y="3191794"/>
+            <a:ext cx="749808" cy="248502"/>
           </a:xfrm>
           <a:prstGeom prst="rect">
             <a:avLst/>
@@ -5492,8 +5492,8 @@
         </p:nvSpPr>
         <p:spPr>
           <a:xfrm>
-            <a:off x="6208776" y="3357462"/>
-            <a:ext cx="1938528" cy="236668"/>
+            <a:off x="6208776" y="3440296"/>
+            <a:ext cx="1938528" cy="248502"/>
           </a:xfrm>
           <a:prstGeom prst="rect">
             <a:avLst/>
@@ -5531,8 +5531,8 @@
         </p:nvSpPr>
         <p:spPr>
           <a:xfrm>
-            <a:off x="8220456" y="3410712"/>
-            <a:ext cx="88990" cy="130168"/>
+            <a:off x="8220456" y="3496208"/>
+            <a:ext cx="88990" cy="136676"/>
           </a:xfrm>
           <a:prstGeom prst="rect">
             <a:avLst/>
@@ -5551,8 +5551,8 @@
         </p:nvSpPr>
         <p:spPr>
           <a:xfrm>
-            <a:off x="8970264" y="3357462"/>
-            <a:ext cx="950976" cy="236668"/>
+            <a:off x="8970264" y="3440296"/>
+            <a:ext cx="950976" cy="248502"/>
           </a:xfrm>
           <a:prstGeom prst="rect">
             <a:avLst/>
@@ -5590,8 +5590,8 @@
         </p:nvSpPr>
         <p:spPr>
           <a:xfrm>
-            <a:off x="9921240" y="3357462"/>
-            <a:ext cx="749808" cy="236668"/>
+            <a:off x="9921240" y="3440296"/>
+            <a:ext cx="749808" cy="248502"/>
           </a:xfrm>
           <a:prstGeom prst="rect">
             <a:avLst/>
@@ -5629,8 +5629,8 @@
         </p:nvSpPr>
         <p:spPr>
           <a:xfrm>
-            <a:off x="10671048" y="3357462"/>
-            <a:ext cx="749808" cy="236668"/>
+            <a:off x="10671048" y="3440296"/>
+            <a:ext cx="749808" cy="248502"/>
           </a:xfrm>
           <a:prstGeom prst="rect">
             <a:avLst/>
@@ -5668,8 +5668,8 @@
         </p:nvSpPr>
         <p:spPr>
           <a:xfrm>
-            <a:off x="6208776" y="3594130"/>
-            <a:ext cx="1938528" cy="236668"/>
+            <a:off x="6208776" y="3688797"/>
+            <a:ext cx="1938528" cy="248502"/>
           </a:xfrm>
           <a:prstGeom prst="rect">
             <a:avLst/>
@@ -5707,8 +5707,8 @@
         </p:nvSpPr>
         <p:spPr>
           <a:xfrm>
-            <a:off x="8220456" y="3647380"/>
-            <a:ext cx="83056" cy="130168"/>
+            <a:off x="8220456" y="3744710"/>
+            <a:ext cx="83056" cy="136676"/>
           </a:xfrm>
           <a:prstGeom prst="rect">
             <a:avLst/>
@@ -5727,8 +5727,8 @@
         </p:nvSpPr>
         <p:spPr>
           <a:xfrm>
-            <a:off x="8970264" y="3594130"/>
-            <a:ext cx="950976" cy="236668"/>
+            <a:off x="8970264" y="3688797"/>
+            <a:ext cx="950976" cy="248502"/>
           </a:xfrm>
           <a:prstGeom prst="rect">
             <a:avLst/>
@@ -5766,8 +5766,8 @@
         </p:nvSpPr>
         <p:spPr>
           <a:xfrm>
-            <a:off x="9921240" y="3594130"/>
-            <a:ext cx="749808" cy="236668"/>
+            <a:off x="9921240" y="3688797"/>
+            <a:ext cx="749808" cy="248502"/>
           </a:xfrm>
           <a:prstGeom prst="rect">
             <a:avLst/>
@@ -5805,8 +5805,8 @@
         </p:nvSpPr>
         <p:spPr>
           <a:xfrm>
-            <a:off x="10671048" y="3594130"/>
-            <a:ext cx="749808" cy="236668"/>
+            <a:off x="10671048" y="3688797"/>
+            <a:ext cx="749808" cy="248502"/>
           </a:xfrm>
           <a:prstGeom prst="rect">
             <a:avLst/>
@@ -5844,8 +5844,8 @@
         </p:nvSpPr>
         <p:spPr>
           <a:xfrm>
-            <a:off x="6208776" y="3830798"/>
-            <a:ext cx="1938528" cy="236668"/>
+            <a:off x="6208776" y="3937299"/>
+            <a:ext cx="1938528" cy="248502"/>
           </a:xfrm>
           <a:prstGeom prst="rect">
             <a:avLst/>
@@ -5883,8 +5883,8 @@
         </p:nvSpPr>
         <p:spPr>
           <a:xfrm>
-            <a:off x="8220456" y="3884048"/>
-            <a:ext cx="71851" cy="130168"/>
+            <a:off x="8220456" y="3993212"/>
+            <a:ext cx="71851" cy="136676"/>
           </a:xfrm>
           <a:prstGeom prst="rect">
             <a:avLst/>
@@ -5903,8 +5903,8 @@
         </p:nvSpPr>
         <p:spPr>
           <a:xfrm>
-            <a:off x="8970264" y="3830798"/>
-            <a:ext cx="950976" cy="236668"/>
+            <a:off x="8970264" y="3937299"/>
+            <a:ext cx="950976" cy="248502"/>
           </a:xfrm>
           <a:prstGeom prst="rect">
             <a:avLst/>
@@ -5942,8 +5942,8 @@
         </p:nvSpPr>
         <p:spPr>
           <a:xfrm>
-            <a:off x="9921240" y="3830798"/>
-            <a:ext cx="749808" cy="236668"/>
+            <a:off x="9921240" y="3937299"/>
+            <a:ext cx="749808" cy="248502"/>
           </a:xfrm>
           <a:prstGeom prst="rect">
             <a:avLst/>
@@ -5981,8 +5981,8 @@
         </p:nvSpPr>
         <p:spPr>
           <a:xfrm>
-            <a:off x="10671048" y="3830798"/>
-            <a:ext cx="749808" cy="236668"/>
+            <a:off x="10671048" y="3937299"/>
+            <a:ext cx="749808" cy="248502"/>
           </a:xfrm>
           <a:prstGeom prst="rect">
             <a:avLst/>
@@ -6020,8 +6020,8 @@
         </p:nvSpPr>
         <p:spPr>
           <a:xfrm>
-            <a:off x="6208776" y="4067466"/>
-            <a:ext cx="1938528" cy="236668"/>
+            <a:off x="6208776" y="4185800"/>
+            <a:ext cx="1938528" cy="248502"/>
           </a:xfrm>
           <a:prstGeom prst="rect">
             <a:avLst/>
@@ -6059,8 +6059,8 @@
         </p:nvSpPr>
         <p:spPr>
           <a:xfrm>
-            <a:off x="8220456" y="4120717"/>
-            <a:ext cx="70289" cy="130168"/>
+            <a:off x="8220456" y="4241713"/>
+            <a:ext cx="70289" cy="136676"/>
           </a:xfrm>
           <a:prstGeom prst="rect">
             <a:avLst/>
@@ -6079,8 +6079,8 @@
         </p:nvSpPr>
         <p:spPr>
           <a:xfrm>
-            <a:off x="8970264" y="4067466"/>
-            <a:ext cx="950976" cy="236668"/>
+            <a:off x="8970264" y="4185800"/>
+            <a:ext cx="950976" cy="248502"/>
           </a:xfrm>
           <a:prstGeom prst="rect">
             <a:avLst/>
@@ -6118,8 +6118,8 @@
         </p:nvSpPr>
         <p:spPr>
           <a:xfrm>
-            <a:off x="9921240" y="4067466"/>
-            <a:ext cx="749808" cy="236668"/>
+            <a:off x="9921240" y="4185800"/>
+            <a:ext cx="749808" cy="248502"/>
           </a:xfrm>
           <a:prstGeom prst="rect">
             <a:avLst/>
@@ -6157,8 +6157,8 @@
         </p:nvSpPr>
         <p:spPr>
           <a:xfrm>
-            <a:off x="10671048" y="4067466"/>
-            <a:ext cx="749808" cy="236668"/>
+            <a:off x="10671048" y="4185800"/>
+            <a:ext cx="749808" cy="248502"/>
           </a:xfrm>
           <a:prstGeom prst="rect">
             <a:avLst/>
@@ -6196,8 +6196,8 @@
         </p:nvSpPr>
         <p:spPr>
           <a:xfrm>
-            <a:off x="6208776" y="4304135"/>
-            <a:ext cx="1938528" cy="236668"/>
+            <a:off x="6208776" y="4434302"/>
+            <a:ext cx="1938528" cy="248502"/>
           </a:xfrm>
           <a:prstGeom prst="rect">
             <a:avLst/>
@@ -6235,8 +6235,8 @@
         </p:nvSpPr>
         <p:spPr>
           <a:xfrm>
-            <a:off x="8220456" y="4357385"/>
-            <a:ext cx="69822" cy="130168"/>
+            <a:off x="8220456" y="4490215"/>
+            <a:ext cx="69822" cy="136676"/>
           </a:xfrm>
           <a:prstGeom prst="rect">
             <a:avLst/>
@@ -6255,8 +6255,8 @@
         </p:nvSpPr>
         <p:spPr>
           <a:xfrm>
-            <a:off x="8970264" y="4304135"/>
-            <a:ext cx="950976" cy="236668"/>
+            <a:off x="8970264" y="4434302"/>
+            <a:ext cx="950976" cy="248502"/>
           </a:xfrm>
           <a:prstGeom prst="rect">
             <a:avLst/>
@@ -6294,8 +6294,8 @@
         </p:nvSpPr>
         <p:spPr>
           <a:xfrm>
-            <a:off x="9921240" y="4304135"/>
-            <a:ext cx="749808" cy="236668"/>
+            <a:off x="9921240" y="4434302"/>
+            <a:ext cx="749808" cy="248502"/>
           </a:xfrm>
           <a:prstGeom prst="rect">
             <a:avLst/>
@@ -6333,8 +6333,8 @@
         </p:nvSpPr>
         <p:spPr>
           <a:xfrm>
-            <a:off x="10671048" y="4304135"/>
-            <a:ext cx="749808" cy="236668"/>
+            <a:off x="10671048" y="4434302"/>
+            <a:ext cx="749808" cy="248502"/>
           </a:xfrm>
           <a:prstGeom prst="rect">
             <a:avLst/>
@@ -6372,8 +6372,8 @@
         </p:nvSpPr>
         <p:spPr>
           <a:xfrm>
-            <a:off x="6208776" y="4540803"/>
-            <a:ext cx="1938528" cy="236668"/>
+            <a:off x="6208776" y="4682804"/>
+            <a:ext cx="1938528" cy="248502"/>
           </a:xfrm>
           <a:prstGeom prst="rect">
             <a:avLst/>
@@ -6411,8 +6411,8 @@
         </p:nvSpPr>
         <p:spPr>
           <a:xfrm>
-            <a:off x="8220456" y="4594053"/>
-            <a:ext cx="67909" cy="130168"/>
+            <a:off x="8220456" y="4738717"/>
+            <a:ext cx="67909" cy="136676"/>
           </a:xfrm>
           <a:prstGeom prst="rect">
             <a:avLst/>
@@ -6431,8 +6431,8 @@
         </p:nvSpPr>
         <p:spPr>
           <a:xfrm>
-            <a:off x="8970264" y="4540803"/>
-            <a:ext cx="950976" cy="236668"/>
+            <a:off x="8970264" y="4682804"/>
+            <a:ext cx="950976" cy="248502"/>
           </a:xfrm>
           <a:prstGeom prst="rect">
             <a:avLst/>
@@ -6470,8 +6470,8 @@
         </p:nvSpPr>
         <p:spPr>
           <a:xfrm>
-            <a:off x="9921240" y="4540803"/>
-            <a:ext cx="749808" cy="236668"/>
+            <a:off x="9921240" y="4682804"/>
+            <a:ext cx="749808" cy="248502"/>
           </a:xfrm>
           <a:prstGeom prst="rect">
             <a:avLst/>
@@ -6509,8 +6509,8 @@
         </p:nvSpPr>
         <p:spPr>
           <a:xfrm>
-            <a:off x="10671048" y="4540803"/>
-            <a:ext cx="749808" cy="236668"/>
+            <a:off x="10671048" y="4682804"/>
+            <a:ext cx="749808" cy="248502"/>
           </a:xfrm>
           <a:prstGeom prst="rect">
             <a:avLst/>
@@ -6548,8 +6548,8 @@
         </p:nvSpPr>
         <p:spPr>
           <a:xfrm>
-            <a:off x="6208776" y="4777471"/>
-            <a:ext cx="1938528" cy="236668"/>
+            <a:off x="6208776" y="4931305"/>
+            <a:ext cx="1938528" cy="248502"/>
           </a:xfrm>
           <a:prstGeom prst="rect">
             <a:avLst/>
@@ -6587,8 +6587,8 @@
         </p:nvSpPr>
         <p:spPr>
           <a:xfrm>
-            <a:off x="8220456" y="4830721"/>
-            <a:ext cx="48967" cy="130168"/>
+            <a:off x="8220456" y="4987218"/>
+            <a:ext cx="48967" cy="136676"/>
           </a:xfrm>
           <a:prstGeom prst="rect">
             <a:avLst/>
@@ -6607,8 +6607,8 @@
         </p:nvSpPr>
         <p:spPr>
           <a:xfrm>
-            <a:off x="8970264" y="4777471"/>
-            <a:ext cx="950976" cy="236668"/>
+            <a:off x="8970264" y="4931305"/>
+            <a:ext cx="950976" cy="248502"/>
           </a:xfrm>
           <a:prstGeom prst="rect">
             <a:avLst/>
@@ -6646,8 +6646,8 @@
         </p:nvSpPr>
         <p:spPr>
           <a:xfrm>
-            <a:off x="9921240" y="4777471"/>
-            <a:ext cx="749808" cy="236668"/>
+            <a:off x="9921240" y="4931305"/>
+            <a:ext cx="749808" cy="248502"/>
           </a:xfrm>
           <a:prstGeom prst="rect">
             <a:avLst/>
@@ -6685,8 +6685,8 @@
         </p:nvSpPr>
         <p:spPr>
           <a:xfrm>
-            <a:off x="10671048" y="4777471"/>
-            <a:ext cx="749808" cy="236668"/>
+            <a:off x="10671048" y="4931305"/>
+            <a:ext cx="749808" cy="248502"/>
           </a:xfrm>
           <a:prstGeom prst="rect">
             <a:avLst/>
@@ -6724,8 +6724,8 @@
         </p:nvSpPr>
         <p:spPr>
           <a:xfrm>
-            <a:off x="6208776" y="5014139"/>
-            <a:ext cx="1938528" cy="236668"/>
+            <a:off x="6208776" y="5179807"/>
+            <a:ext cx="1938528" cy="248502"/>
           </a:xfrm>
           <a:prstGeom prst="rect">
             <a:avLst/>
@@ -6763,8 +6763,8 @@
         </p:nvSpPr>
         <p:spPr>
           <a:xfrm>
-            <a:off x="8220456" y="5067390"/>
-            <a:ext cx="47223" cy="130168"/>
+            <a:off x="8220456" y="5235720"/>
+            <a:ext cx="47223" cy="136676"/>
           </a:xfrm>
           <a:prstGeom prst="rect">
             <a:avLst/>
@@ -6783,8 +6783,8 @@
         </p:nvSpPr>
         <p:spPr>
           <a:xfrm>
-            <a:off x="8970264" y="5014139"/>
-            <a:ext cx="950976" cy="236668"/>
+            <a:off x="8970264" y="5179807"/>
+            <a:ext cx="950976" cy="248502"/>
           </a:xfrm>
           <a:prstGeom prst="rect">
             <a:avLst/>
@@ -6822,8 +6822,8 @@
         </p:nvSpPr>
         <p:spPr>
           <a:xfrm>
-            <a:off x="9921240" y="5014139"/>
-            <a:ext cx="749808" cy="236668"/>
+            <a:off x="9921240" y="5179807"/>
+            <a:ext cx="749808" cy="248502"/>
           </a:xfrm>
           <a:prstGeom prst="rect">
             <a:avLst/>
@@ -6861,8 +6861,8 @@
         </p:nvSpPr>
         <p:spPr>
           <a:xfrm>
-            <a:off x="10671048" y="5014139"/>
-            <a:ext cx="749808" cy="236668"/>
+            <a:off x="10671048" y="5179807"/>
+            <a:ext cx="749808" cy="248502"/>
           </a:xfrm>
           <a:prstGeom prst="rect">
             <a:avLst/>
@@ -6900,8 +6900,8 @@
         </p:nvSpPr>
         <p:spPr>
           <a:xfrm>
-            <a:off x="6208776" y="5250808"/>
-            <a:ext cx="1938528" cy="236668"/>
+            <a:off x="6208776" y="5428309"/>
+            <a:ext cx="1938528" cy="248502"/>
           </a:xfrm>
           <a:prstGeom prst="rect">
             <a:avLst/>
@@ -6939,8 +6939,8 @@
         </p:nvSpPr>
         <p:spPr>
           <a:xfrm>
-            <a:off x="8220456" y="5304058"/>
-            <a:ext cx="29775" cy="130168"/>
+            <a:off x="8220456" y="5484222"/>
+            <a:ext cx="29775" cy="136676"/>
           </a:xfrm>
           <a:prstGeom prst="rect">
             <a:avLst/>
@@ -6959,8 +6959,8 @@
         </p:nvSpPr>
         <p:spPr>
           <a:xfrm>
-            <a:off x="8970264" y="5250808"/>
-            <a:ext cx="950976" cy="236668"/>
+            <a:off x="8970264" y="5428309"/>
+            <a:ext cx="950976" cy="248502"/>
           </a:xfrm>
           <a:prstGeom prst="rect">
             <a:avLst/>
@@ -6998,8 +6998,8 @@
         </p:nvSpPr>
         <p:spPr>
           <a:xfrm>
-            <a:off x="9921240" y="5250808"/>
-            <a:ext cx="749808" cy="236668"/>
+            <a:off x="9921240" y="5428309"/>
+            <a:ext cx="749808" cy="248502"/>
           </a:xfrm>
           <a:prstGeom prst="rect">
             <a:avLst/>
@@ -7037,8 +7037,8 @@
         </p:nvSpPr>
         <p:spPr>
           <a:xfrm>
-            <a:off x="10671048" y="5250808"/>
-            <a:ext cx="749808" cy="236668"/>
+            <a:off x="10671048" y="5428309"/>
+            <a:ext cx="749808" cy="248502"/>
           </a:xfrm>
           <a:prstGeom prst="rect">
             <a:avLst/>
@@ -7076,8 +7076,8 @@
         </p:nvSpPr>
         <p:spPr>
           <a:xfrm>
-            <a:off x="457200" y="5961888"/>
-            <a:ext cx="11274552" cy="548640"/>
+            <a:off x="457200" y="6126480"/>
+            <a:ext cx="11274552" cy="615696"/>
           </a:xfrm>
           <a:prstGeom prst="rect">
             <a:avLst/>
@@ -7096,8 +7096,8 @@
         </p:nvSpPr>
         <p:spPr>
           <a:xfrm>
-            <a:off x="658368" y="5980176"/>
-            <a:ext cx="10927080" cy="512064"/>
+            <a:off x="658368" y="6144768"/>
+            <a:ext cx="10927080" cy="579120"/>
           </a:xfrm>
           <a:prstGeom prst="rect">
             <a:avLst/>

--- a/day2-deck/decks/Fixed Gross per Employee 5 Pct - Review.pptx
+++ b/day2-deck/decks/Fixed Gross per Employee 5 Pct - Review.pptx
@@ -1034,8 +1034,8 @@
         </p:nvSpPr>
         <p:spPr>
           <a:xfrm>
-            <a:off x="3419856" y="1316736"/>
-            <a:ext cx="950976" cy="329184"/>
+            <a:off x="3456432" y="1316736"/>
+            <a:ext cx="914400" cy="329184"/>
           </a:xfrm>
           <a:prstGeom prst="rect">
             <a:avLst/>
@@ -1151,8 +1151,8 @@
         </p:nvSpPr>
         <p:spPr>
           <a:xfrm>
-            <a:off x="8970264" y="1316736"/>
-            <a:ext cx="950976" cy="329184"/>
+            <a:off x="9006840" y="1316736"/>
+            <a:ext cx="914400" cy="329184"/>
           </a:xfrm>
           <a:prstGeom prst="rect">
             <a:avLst/>
@@ -1308,7 +1308,7 @@
         <p:spPr>
           <a:xfrm>
             <a:off x="2670048" y="1756697"/>
-            <a:ext cx="694944" cy="136676"/>
+            <a:ext cx="731520" cy="136676"/>
           </a:xfrm>
           <a:prstGeom prst="rect">
             <a:avLst/>
@@ -1327,8 +1327,8 @@
         </p:nvSpPr>
         <p:spPr>
           <a:xfrm>
-            <a:off x="3419856" y="1700784"/>
-            <a:ext cx="950976" cy="248502"/>
+            <a:off x="3456432" y="1700784"/>
+            <a:ext cx="914400" cy="248502"/>
           </a:xfrm>
           <a:prstGeom prst="rect">
             <a:avLst/>
@@ -1352,7 +1352,7 @@
                 <a:ea typeface="Inter" pitchFamily="34" charset="-122"/>
                 <a:cs typeface="Inter" pitchFamily="34" charset="-120"/>
               </a:rPr>
-              <a:t>$1,506,225</a:t>
+              <a:t>$1.51M</a:t>
             </a:r>
             <a:endParaRPr lang="en-US" sz="1300" dirty="0"/>
           </a:p>
@@ -1391,7 +1391,7 @@
                 <a:ea typeface="Inter" pitchFamily="34" charset="-122"/>
                 <a:cs typeface="Inter" pitchFamily="34" charset="-120"/>
               </a:rPr>
-              <a:t>$14,174</a:t>
+              <a:t>$14.2K</a:t>
             </a:r>
             <a:endParaRPr lang="en-US" sz="1300" dirty="0"/>
           </a:p>
@@ -1430,7 +1430,7 @@
                 <a:ea typeface="Inter" pitchFamily="34" charset="-122"/>
                 <a:cs typeface="Inter" pitchFamily="34" charset="-120"/>
               </a:rPr>
-              <a:t>$14,883</a:t>
+              <a:t>$14.9K</a:t>
             </a:r>
             <a:endParaRPr lang="en-US" sz="1300" dirty="0"/>
           </a:p>
@@ -1484,7 +1484,7 @@
         <p:spPr>
           <a:xfrm>
             <a:off x="2670048" y="2005199"/>
-            <a:ext cx="508906" cy="136676"/>
+            <a:ext cx="535690" cy="136676"/>
           </a:xfrm>
           <a:prstGeom prst="rect">
             <a:avLst/>
@@ -1503,8 +1503,8 @@
         </p:nvSpPr>
         <p:spPr>
           <a:xfrm>
-            <a:off x="3419856" y="1949286"/>
-            <a:ext cx="950976" cy="248502"/>
+            <a:off x="3456432" y="1949286"/>
+            <a:ext cx="914400" cy="248502"/>
           </a:xfrm>
           <a:prstGeom prst="rect">
             <a:avLst/>
@@ -1528,7 +1528,7 @@
                 <a:ea typeface="Inter" pitchFamily="34" charset="-122"/>
                 <a:cs typeface="Inter" pitchFamily="34" charset="-120"/>
               </a:rPr>
-              <a:t>$1,103,005</a:t>
+              <a:t>$1.10M</a:t>
             </a:r>
             <a:endParaRPr lang="en-US" sz="1300" dirty="0"/>
           </a:p>
@@ -1567,7 +1567,7 @@
                 <a:ea typeface="Inter" pitchFamily="34" charset="-122"/>
                 <a:cs typeface="Inter" pitchFamily="34" charset="-120"/>
               </a:rPr>
-              <a:t>$12,042</a:t>
+              <a:t>$12.0K</a:t>
             </a:r>
             <a:endParaRPr lang="en-US" sz="1300" dirty="0"/>
           </a:p>
@@ -1606,7 +1606,7 @@
                 <a:ea typeface="Inter" pitchFamily="34" charset="-122"/>
                 <a:cs typeface="Inter" pitchFamily="34" charset="-120"/>
               </a:rPr>
-              <a:t>$12,644</a:t>
+              <a:t>$12.6K</a:t>
             </a:r>
             <a:endParaRPr lang="en-US" sz="1300" dirty="0"/>
           </a:p>
@@ -1660,7 +1660,7 @@
         <p:spPr>
           <a:xfrm>
             <a:off x="2670048" y="2253700"/>
-            <a:ext cx="443634" cy="136676"/>
+            <a:ext cx="466983" cy="136676"/>
           </a:xfrm>
           <a:prstGeom prst="rect">
             <a:avLst/>
@@ -1679,8 +1679,8 @@
         </p:nvSpPr>
         <p:spPr>
           <a:xfrm>
-            <a:off x="3419856" y="2197787"/>
-            <a:ext cx="950976" cy="248502"/>
+            <a:off x="3456432" y="2197787"/>
+            <a:ext cx="914400" cy="248502"/>
           </a:xfrm>
           <a:prstGeom prst="rect">
             <a:avLst/>
@@ -1704,7 +1704,7 @@
                 <a:ea typeface="Inter" pitchFamily="34" charset="-122"/>
                 <a:cs typeface="Inter" pitchFamily="34" charset="-120"/>
               </a:rPr>
-              <a:t>$961,535</a:t>
+              <a:t>$962K</a:t>
             </a:r>
             <a:endParaRPr lang="en-US" sz="1300" dirty="0"/>
           </a:p>
@@ -1743,7 +1743,7 @@
                 <a:ea typeface="Inter" pitchFamily="34" charset="-122"/>
                 <a:cs typeface="Inter" pitchFamily="34" charset="-120"/>
               </a:rPr>
-              <a:t>$16,061</a:t>
+              <a:t>$16.1K</a:t>
             </a:r>
             <a:endParaRPr lang="en-US" sz="1300" dirty="0"/>
           </a:p>
@@ -1782,7 +1782,7 @@
                 <a:ea typeface="Inter" pitchFamily="34" charset="-122"/>
                 <a:cs typeface="Inter" pitchFamily="34" charset="-120"/>
               </a:rPr>
-              <a:t>$16,864</a:t>
+              <a:t>$16.9K</a:t>
             </a:r>
             <a:endParaRPr lang="en-US" sz="1300" dirty="0"/>
           </a:p>
@@ -1836,7 +1836,7 @@
         <p:spPr>
           <a:xfrm>
             <a:off x="2670048" y="2502202"/>
-            <a:ext cx="379571" cy="136676"/>
+            <a:ext cx="399548" cy="136676"/>
           </a:xfrm>
           <a:prstGeom prst="rect">
             <a:avLst/>
@@ -1855,8 +1855,8 @@
         </p:nvSpPr>
         <p:spPr>
           <a:xfrm>
-            <a:off x="3419856" y="2446289"/>
-            <a:ext cx="950976" cy="248502"/>
+            <a:off x="3456432" y="2446289"/>
+            <a:ext cx="914400" cy="248502"/>
           </a:xfrm>
           <a:prstGeom prst="rect">
             <a:avLst/>
@@ -1880,7 +1880,7 @@
                 <a:ea typeface="Inter" pitchFamily="34" charset="-122"/>
                 <a:cs typeface="Inter" pitchFamily="34" charset="-120"/>
               </a:rPr>
-              <a:t>$822,684</a:t>
+              <a:t>$823K</a:t>
             </a:r>
             <a:endParaRPr lang="en-US" sz="1300" dirty="0"/>
           </a:p>
@@ -1919,7 +1919,7 @@
                 <a:ea typeface="Inter" pitchFamily="34" charset="-122"/>
                 <a:cs typeface="Inter" pitchFamily="34" charset="-120"/>
               </a:rPr>
-              <a:t>$23,461</a:t>
+              <a:t>$23.5K</a:t>
             </a:r>
             <a:endParaRPr lang="en-US" sz="1300" dirty="0"/>
           </a:p>
@@ -1958,7 +1958,7 @@
                 <a:ea typeface="Inter" pitchFamily="34" charset="-122"/>
                 <a:cs typeface="Inter" pitchFamily="34" charset="-120"/>
               </a:rPr>
-              <a:t>$24,634</a:t>
+              <a:t>$24.6K</a:t>
             </a:r>
             <a:endParaRPr lang="en-US" sz="1300" dirty="0"/>
           </a:p>
@@ -2012,7 +2012,7 @@
         <p:spPr>
           <a:xfrm>
             <a:off x="2670048" y="2750703"/>
-            <a:ext cx="310060" cy="136676"/>
+            <a:ext cx="326379" cy="136676"/>
           </a:xfrm>
           <a:prstGeom prst="rect">
             <a:avLst/>
@@ -2031,8 +2031,8 @@
         </p:nvSpPr>
         <p:spPr>
           <a:xfrm>
-            <a:off x="3419856" y="2694791"/>
-            <a:ext cx="950976" cy="248502"/>
+            <a:off x="3456432" y="2694791"/>
+            <a:ext cx="914400" cy="248502"/>
           </a:xfrm>
           <a:prstGeom prst="rect">
             <a:avLst/>
@@ -2056,7 +2056,7 @@
                 <a:ea typeface="Inter" pitchFamily="34" charset="-122"/>
                 <a:cs typeface="Inter" pitchFamily="34" charset="-120"/>
               </a:rPr>
-              <a:t>$672,026</a:t>
+              <a:t>$672K</a:t>
             </a:r>
             <a:endParaRPr lang="en-US" sz="1300" dirty="0"/>
           </a:p>
@@ -2095,7 +2095,7 @@
                 <a:ea typeface="Inter" pitchFamily="34" charset="-122"/>
                 <a:cs typeface="Inter" pitchFamily="34" charset="-120"/>
               </a:rPr>
-              <a:t>$12,874</a:t>
+              <a:t>$12.9K</a:t>
             </a:r>
             <a:endParaRPr lang="en-US" sz="1300" dirty="0"/>
           </a:p>
@@ -2134,7 +2134,7 @@
                 <a:ea typeface="Inter" pitchFamily="34" charset="-122"/>
                 <a:cs typeface="Inter" pitchFamily="34" charset="-120"/>
               </a:rPr>
-              <a:t>$13,518</a:t>
+              <a:t>$13.5K</a:t>
             </a:r>
             <a:endParaRPr lang="en-US" sz="1300" dirty="0"/>
           </a:p>
@@ -2188,7 +2188,7 @@
         <p:spPr>
           <a:xfrm>
             <a:off x="2670048" y="2999205"/>
-            <a:ext cx="295191" cy="136676"/>
+            <a:ext cx="310728" cy="136676"/>
           </a:xfrm>
           <a:prstGeom prst="rect">
             <a:avLst/>
@@ -2207,8 +2207,8 @@
         </p:nvSpPr>
         <p:spPr>
           <a:xfrm>
-            <a:off x="3419856" y="2943292"/>
-            <a:ext cx="950976" cy="248502"/>
+            <a:off x="3456432" y="2943292"/>
+            <a:ext cx="914400" cy="248502"/>
           </a:xfrm>
           <a:prstGeom prst="rect">
             <a:avLst/>
@@ -2232,7 +2232,7 @@
                 <a:ea typeface="Inter" pitchFamily="34" charset="-122"/>
                 <a:cs typeface="Inter" pitchFamily="34" charset="-120"/>
               </a:rPr>
-              <a:t>$639,799</a:t>
+              <a:t>$640K</a:t>
             </a:r>
             <a:endParaRPr lang="en-US" sz="1300" dirty="0"/>
           </a:p>
@@ -2271,7 +2271,7 @@
                 <a:ea typeface="Inter" pitchFamily="34" charset="-122"/>
                 <a:cs typeface="Inter" pitchFamily="34" charset="-120"/>
               </a:rPr>
-              <a:t>$14,260</a:t>
+              <a:t>$14.3K</a:t>
             </a:r>
             <a:endParaRPr lang="en-US" sz="1300" dirty="0"/>
           </a:p>
@@ -2310,7 +2310,7 @@
                 <a:ea typeface="Inter" pitchFamily="34" charset="-122"/>
                 <a:cs typeface="Inter" pitchFamily="34" charset="-120"/>
               </a:rPr>
-              <a:t>$14,973</a:t>
+              <a:t>$15.0K</a:t>
             </a:r>
             <a:endParaRPr lang="en-US" sz="1300" dirty="0"/>
           </a:p>
@@ -2364,7 +2364,7 @@
         <p:spPr>
           <a:xfrm>
             <a:off x="2670048" y="3247707"/>
-            <a:ext cx="265029" cy="136676"/>
+            <a:ext cx="278978" cy="136676"/>
           </a:xfrm>
           <a:prstGeom prst="rect">
             <a:avLst/>
@@ -2383,8 +2383,8 @@
         </p:nvSpPr>
         <p:spPr>
           <a:xfrm>
-            <a:off x="3419856" y="3191794"/>
-            <a:ext cx="950976" cy="248502"/>
+            <a:off x="3456432" y="3191794"/>
+            <a:ext cx="914400" cy="248502"/>
           </a:xfrm>
           <a:prstGeom prst="rect">
             <a:avLst/>
@@ -2408,7 +2408,7 @@
                 <a:ea typeface="Inter" pitchFamily="34" charset="-122"/>
                 <a:cs typeface="Inter" pitchFamily="34" charset="-120"/>
               </a:rPr>
-              <a:t>$574,425</a:t>
+              <a:t>$574K</a:t>
             </a:r>
             <a:endParaRPr lang="en-US" sz="1300" dirty="0"/>
           </a:p>
@@ -2447,7 +2447,7 @@
                 <a:ea typeface="Inter" pitchFamily="34" charset="-122"/>
                 <a:cs typeface="Inter" pitchFamily="34" charset="-120"/>
               </a:rPr>
-              <a:t>$14,604</a:t>
+              <a:t>$14.6K</a:t>
             </a:r>
             <a:endParaRPr lang="en-US" sz="1300" dirty="0"/>
           </a:p>
@@ -2486,7 +2486,7 @@
                 <a:ea typeface="Inter" pitchFamily="34" charset="-122"/>
                 <a:cs typeface="Inter" pitchFamily="34" charset="-120"/>
               </a:rPr>
-              <a:t>$15,334</a:t>
+              <a:t>$15.3K</a:t>
             </a:r>
             <a:endParaRPr lang="en-US" sz="1300" dirty="0"/>
           </a:p>
@@ -2540,7 +2540,7 @@
         <p:spPr>
           <a:xfrm>
             <a:off x="2670048" y="3496208"/>
-            <a:ext cx="203194" cy="136676"/>
+            <a:ext cx="213888" cy="136676"/>
           </a:xfrm>
           <a:prstGeom prst="rect">
             <a:avLst/>
@@ -2559,8 +2559,8 @@
         </p:nvSpPr>
         <p:spPr>
           <a:xfrm>
-            <a:off x="3419856" y="3440296"/>
-            <a:ext cx="950976" cy="248502"/>
+            <a:off x="3456432" y="3440296"/>
+            <a:ext cx="914400" cy="248502"/>
           </a:xfrm>
           <a:prstGeom prst="rect">
             <a:avLst/>
@@ -2584,7 +2584,7 @@
                 <a:ea typeface="Inter" pitchFamily="34" charset="-122"/>
                 <a:cs typeface="Inter" pitchFamily="34" charset="-120"/>
               </a:rPr>
-              <a:t>$440,403</a:t>
+              <a:t>$440K</a:t>
             </a:r>
             <a:endParaRPr lang="en-US" sz="1300" dirty="0"/>
           </a:p>
@@ -2623,7 +2623,7 @@
                 <a:ea typeface="Inter" pitchFamily="34" charset="-122"/>
                 <a:cs typeface="Inter" pitchFamily="34" charset="-120"/>
               </a:rPr>
-              <a:t>$18,148</a:t>
+              <a:t>$18.1K</a:t>
             </a:r>
             <a:endParaRPr lang="en-US" sz="1300" dirty="0"/>
           </a:p>
@@ -2662,7 +2662,7 @@
                 <a:ea typeface="Inter" pitchFamily="34" charset="-122"/>
                 <a:cs typeface="Inter" pitchFamily="34" charset="-120"/>
               </a:rPr>
-              <a:t>$19,056</a:t>
+              <a:t>$19.1K</a:t>
             </a:r>
             <a:endParaRPr lang="en-US" sz="1300" dirty="0"/>
           </a:p>
@@ -2716,7 +2716,7 @@
         <p:spPr>
           <a:xfrm>
             <a:off x="2670048" y="3744710"/>
-            <a:ext cx="189258" cy="136676"/>
+            <a:ext cx="199219" cy="136676"/>
           </a:xfrm>
           <a:prstGeom prst="rect">
             <a:avLst/>
@@ -2735,8 +2735,8 @@
         </p:nvSpPr>
         <p:spPr>
           <a:xfrm>
-            <a:off x="3419856" y="3688797"/>
-            <a:ext cx="950976" cy="248502"/>
+            <a:off x="3456432" y="3688797"/>
+            <a:ext cx="914400" cy="248502"/>
           </a:xfrm>
           <a:prstGeom prst="rect">
             <a:avLst/>
@@ -2760,7 +2760,7 @@
                 <a:ea typeface="Inter" pitchFamily="34" charset="-122"/>
                 <a:cs typeface="Inter" pitchFamily="34" charset="-120"/>
               </a:rPr>
-              <a:t>$410,199</a:t>
+              <a:t>$410K</a:t>
             </a:r>
             <a:endParaRPr lang="en-US" sz="1300" dirty="0"/>
           </a:p>
@@ -2799,7 +2799,7 @@
                 <a:ea typeface="Inter" pitchFamily="34" charset="-122"/>
                 <a:cs typeface="Inter" pitchFamily="34" charset="-120"/>
               </a:rPr>
-              <a:t>$13,289</a:t>
+              <a:t>$13.3K</a:t>
             </a:r>
             <a:endParaRPr lang="en-US" sz="1300" dirty="0"/>
           </a:p>
@@ -2838,7 +2838,7 @@
                 <a:ea typeface="Inter" pitchFamily="34" charset="-122"/>
                 <a:cs typeface="Inter" pitchFamily="34" charset="-120"/>
               </a:rPr>
-              <a:t>$13,954</a:t>
+              <a:t>$14.0K</a:t>
             </a:r>
             <a:endParaRPr lang="en-US" sz="1300" dirty="0"/>
           </a:p>
@@ -2892,7 +2892,7 @@
         <p:spPr>
           <a:xfrm>
             <a:off x="2670048" y="3993212"/>
-            <a:ext cx="182441" cy="136676"/>
+            <a:ext cx="192043" cy="136676"/>
           </a:xfrm>
           <a:prstGeom prst="rect">
             <a:avLst/>
@@ -2911,8 +2911,8 @@
         </p:nvSpPr>
         <p:spPr>
           <a:xfrm>
-            <a:off x="3419856" y="3937299"/>
-            <a:ext cx="950976" cy="248502"/>
+            <a:off x="3456432" y="3937299"/>
+            <a:ext cx="914400" cy="248502"/>
           </a:xfrm>
           <a:prstGeom prst="rect">
             <a:avLst/>
@@ -2936,7 +2936,7 @@
                 <a:ea typeface="Inter" pitchFamily="34" charset="-122"/>
                 <a:cs typeface="Inter" pitchFamily="34" charset="-120"/>
               </a:rPr>
-              <a:t>$395,423</a:t>
+              <a:t>$395K</a:t>
             </a:r>
             <a:endParaRPr lang="en-US" sz="1300" dirty="0"/>
           </a:p>
@@ -2975,7 +2975,7 @@
                 <a:ea typeface="Inter" pitchFamily="34" charset="-122"/>
                 <a:cs typeface="Inter" pitchFamily="34" charset="-120"/>
               </a:rPr>
-              <a:t>$11,128</a:t>
+              <a:t>$11.1K</a:t>
             </a:r>
             <a:endParaRPr lang="en-US" sz="1300" dirty="0"/>
           </a:p>
@@ -3014,7 +3014,7 @@
                 <a:ea typeface="Inter" pitchFamily="34" charset="-122"/>
                 <a:cs typeface="Inter" pitchFamily="34" charset="-120"/>
               </a:rPr>
-              <a:t>$11,685</a:t>
+              <a:t>$11.7K</a:t>
             </a:r>
             <a:endParaRPr lang="en-US" sz="1300" dirty="0"/>
           </a:p>
@@ -3068,7 +3068,7 @@
         <p:spPr>
           <a:xfrm>
             <a:off x="2670048" y="4241713"/>
-            <a:ext cx="156263" cy="136676"/>
+            <a:ext cx="164487" cy="136676"/>
           </a:xfrm>
           <a:prstGeom prst="rect">
             <a:avLst/>
@@ -3087,8 +3087,8 @@
         </p:nvSpPr>
         <p:spPr>
           <a:xfrm>
-            <a:off x="3419856" y="4185800"/>
-            <a:ext cx="950976" cy="248502"/>
+            <a:off x="3456432" y="4185800"/>
+            <a:ext cx="914400" cy="248502"/>
           </a:xfrm>
           <a:prstGeom prst="rect">
             <a:avLst/>
@@ -3112,7 +3112,7 @@
                 <a:ea typeface="Inter" pitchFamily="34" charset="-122"/>
                 <a:cs typeface="Inter" pitchFamily="34" charset="-120"/>
               </a:rPr>
-              <a:t>$338,685</a:t>
+              <a:t>$339K</a:t>
             </a:r>
             <a:endParaRPr lang="en-US" sz="1300" dirty="0"/>
           </a:p>
@@ -3151,7 +3151,7 @@
                 <a:ea typeface="Inter" pitchFamily="34" charset="-122"/>
                 <a:cs typeface="Inter" pitchFamily="34" charset="-120"/>
               </a:rPr>
-              <a:t>$11,044</a:t>
+              <a:t>$11.0K</a:t>
             </a:r>
             <a:endParaRPr lang="en-US" sz="1300" dirty="0"/>
           </a:p>
@@ -3190,7 +3190,7 @@
                 <a:ea typeface="Inter" pitchFamily="34" charset="-122"/>
                 <a:cs typeface="Inter" pitchFamily="34" charset="-120"/>
               </a:rPr>
-              <a:t>$11,596</a:t>
+              <a:t>$11.6K</a:t>
             </a:r>
             <a:endParaRPr lang="en-US" sz="1300" dirty="0"/>
           </a:p>
@@ -3244,7 +3244,7 @@
         <p:spPr>
           <a:xfrm>
             <a:off x="2670048" y="4490215"/>
-            <a:ext cx="147344" cy="136676"/>
+            <a:ext cx="155099" cy="136676"/>
           </a:xfrm>
           <a:prstGeom prst="rect">
             <a:avLst/>
@@ -3263,8 +3263,8 @@
         </p:nvSpPr>
         <p:spPr>
           <a:xfrm>
-            <a:off x="3419856" y="4434302"/>
-            <a:ext cx="950976" cy="248502"/>
+            <a:off x="3456432" y="4434302"/>
+            <a:ext cx="914400" cy="248502"/>
           </a:xfrm>
           <a:prstGeom prst="rect">
             <a:avLst/>
@@ -3288,7 +3288,7 @@
                 <a:ea typeface="Inter" pitchFamily="34" charset="-122"/>
                 <a:cs typeface="Inter" pitchFamily="34" charset="-120"/>
               </a:rPr>
-              <a:t>$319,353</a:t>
+              <a:t>$319K</a:t>
             </a:r>
             <a:endParaRPr lang="en-US" sz="1300" dirty="0"/>
           </a:p>
@@ -3327,7 +3327,7 @@
                 <a:ea typeface="Inter" pitchFamily="34" charset="-122"/>
                 <a:cs typeface="Inter" pitchFamily="34" charset="-120"/>
               </a:rPr>
-              <a:t>$12,006</a:t>
+              <a:t>$12.0K</a:t>
             </a:r>
             <a:endParaRPr lang="en-US" sz="1300" dirty="0"/>
           </a:p>
@@ -3366,7 +3366,7 @@
                 <a:ea typeface="Inter" pitchFamily="34" charset="-122"/>
                 <a:cs typeface="Inter" pitchFamily="34" charset="-120"/>
               </a:rPr>
-              <a:t>$12,606</a:t>
+              <a:t>$12.6K</a:t>
             </a:r>
             <a:endParaRPr lang="en-US" sz="1300" dirty="0"/>
           </a:p>
@@ -3420,7 +3420,7 @@
         <p:spPr>
           <a:xfrm>
             <a:off x="2670048" y="4738717"/>
-            <a:ext cx="147118" cy="136676"/>
+            <a:ext cx="154861" cy="136676"/>
           </a:xfrm>
           <a:prstGeom prst="rect">
             <a:avLst/>
@@ -3439,8 +3439,8 @@
         </p:nvSpPr>
         <p:spPr>
           <a:xfrm>
-            <a:off x="3419856" y="4682804"/>
-            <a:ext cx="950976" cy="248502"/>
+            <a:off x="3456432" y="4682804"/>
+            <a:ext cx="914400" cy="248502"/>
           </a:xfrm>
           <a:prstGeom prst="rect">
             <a:avLst/>
@@ -3464,7 +3464,7 @@
                 <a:ea typeface="Inter" pitchFamily="34" charset="-122"/>
                 <a:cs typeface="Inter" pitchFamily="34" charset="-120"/>
               </a:rPr>
-              <a:t>$318,864</a:t>
+              <a:t>$319K</a:t>
             </a:r>
             <a:endParaRPr lang="en-US" sz="1300" dirty="0"/>
           </a:p>
@@ -3503,7 +3503,7 @@
                 <a:ea typeface="Inter" pitchFamily="34" charset="-122"/>
                 <a:cs typeface="Inter" pitchFamily="34" charset="-120"/>
               </a:rPr>
-              <a:t>$11,957</a:t>
+              <a:t>$12.0K</a:t>
             </a:r>
             <a:endParaRPr lang="en-US" sz="1300" dirty="0"/>
           </a:p>
@@ -3542,7 +3542,7 @@
                 <a:ea typeface="Inter" pitchFamily="34" charset="-122"/>
                 <a:cs typeface="Inter" pitchFamily="34" charset="-120"/>
               </a:rPr>
-              <a:t>$12,555</a:t>
+              <a:t>$12.6K</a:t>
             </a:r>
             <a:endParaRPr lang="en-US" sz="1300" dirty="0"/>
           </a:p>
@@ -3596,7 +3596,7 @@
         <p:spPr>
           <a:xfrm>
             <a:off x="2670048" y="4987218"/>
-            <a:ext cx="139353" cy="136676"/>
+            <a:ext cx="146688" cy="136676"/>
           </a:xfrm>
           <a:prstGeom prst="rect">
             <a:avLst/>
@@ -3615,8 +3615,8 @@
         </p:nvSpPr>
         <p:spPr>
           <a:xfrm>
-            <a:off x="3419856" y="4931305"/>
-            <a:ext cx="950976" cy="248502"/>
+            <a:off x="3456432" y="4931305"/>
+            <a:ext cx="914400" cy="248502"/>
           </a:xfrm>
           <a:prstGeom prst="rect">
             <a:avLst/>
@@ -3640,7 +3640,7 @@
                 <a:ea typeface="Inter" pitchFamily="34" charset="-122"/>
                 <a:cs typeface="Inter" pitchFamily="34" charset="-120"/>
               </a:rPr>
-              <a:t>$302,035</a:t>
+              <a:t>$302K</a:t>
             </a:r>
             <a:endParaRPr lang="en-US" sz="1300" dirty="0"/>
           </a:p>
@@ -3679,7 +3679,7 @@
                 <a:ea typeface="Inter" pitchFamily="34" charset="-122"/>
                 <a:cs typeface="Inter" pitchFamily="34" charset="-120"/>
               </a:rPr>
-              <a:t>$10,391</a:t>
+              <a:t>$10.4K</a:t>
             </a:r>
             <a:endParaRPr lang="en-US" sz="1300" dirty="0"/>
           </a:p>
@@ -3718,7 +3718,7 @@
                 <a:ea typeface="Inter" pitchFamily="34" charset="-122"/>
                 <a:cs typeface="Inter" pitchFamily="34" charset="-120"/>
               </a:rPr>
-              <a:t>$10,911</a:t>
+              <a:t>$10.9K</a:t>
             </a:r>
             <a:endParaRPr lang="en-US" sz="1300" dirty="0"/>
           </a:p>
@@ -3772,7 +3772,7 @@
         <p:spPr>
           <a:xfrm>
             <a:off x="2670048" y="5235720"/>
-            <a:ext cx="137448" cy="136676"/>
+            <a:ext cx="144683" cy="136676"/>
           </a:xfrm>
           <a:prstGeom prst="rect">
             <a:avLst/>
@@ -3791,8 +3791,8 @@
         </p:nvSpPr>
         <p:spPr>
           <a:xfrm>
-            <a:off x="3419856" y="5179807"/>
-            <a:ext cx="950976" cy="248502"/>
+            <a:off x="3456432" y="5179807"/>
+            <a:ext cx="914400" cy="248502"/>
           </a:xfrm>
           <a:prstGeom prst="rect">
             <a:avLst/>
@@ -3816,7 +3816,7 @@
                 <a:ea typeface="Inter" pitchFamily="34" charset="-122"/>
                 <a:cs typeface="Inter" pitchFamily="34" charset="-120"/>
               </a:rPr>
-              <a:t>$297,906</a:t>
+              <a:t>$298K</a:t>
             </a:r>
             <a:endParaRPr lang="en-US" sz="1300" dirty="0"/>
           </a:p>
@@ -3855,7 +3855,7 @@
                 <a:ea typeface="Inter" pitchFamily="34" charset="-122"/>
                 <a:cs typeface="Inter" pitchFamily="34" charset="-120"/>
               </a:rPr>
-              <a:t>$10,794</a:t>
+              <a:t>$10.8K</a:t>
             </a:r>
             <a:endParaRPr lang="en-US" sz="1300" dirty="0"/>
           </a:p>
@@ -3894,7 +3894,7 @@
                 <a:ea typeface="Inter" pitchFamily="34" charset="-122"/>
                 <a:cs typeface="Inter" pitchFamily="34" charset="-120"/>
               </a:rPr>
-              <a:t>$11,333</a:t>
+              <a:t>$11.3K</a:t>
             </a:r>
             <a:endParaRPr lang="en-US" sz="1300" dirty="0"/>
           </a:p>
@@ -3948,7 +3948,7 @@
         <p:spPr>
           <a:xfrm>
             <a:off x="2670048" y="5484222"/>
-            <a:ext cx="137179" cy="136676"/>
+            <a:ext cx="144399" cy="136676"/>
           </a:xfrm>
           <a:prstGeom prst="rect">
             <a:avLst/>
@@ -3967,8 +3967,8 @@
         </p:nvSpPr>
         <p:spPr>
           <a:xfrm>
-            <a:off x="3419856" y="5428309"/>
-            <a:ext cx="950976" cy="248502"/>
+            <a:off x="3456432" y="5428309"/>
+            <a:ext cx="914400" cy="248502"/>
           </a:xfrm>
           <a:prstGeom prst="rect">
             <a:avLst/>
@@ -3992,7 +3992,7 @@
                 <a:ea typeface="Inter" pitchFamily="34" charset="-122"/>
                 <a:cs typeface="Inter" pitchFamily="34" charset="-120"/>
               </a:rPr>
-              <a:t>$297,322</a:t>
+              <a:t>$297K</a:t>
             </a:r>
             <a:endParaRPr lang="en-US" sz="1300" dirty="0"/>
           </a:p>
@@ -4031,7 +4031,7 @@
                 <a:ea typeface="Inter" pitchFamily="34" charset="-122"/>
                 <a:cs typeface="Inter" pitchFamily="34" charset="-120"/>
               </a:rPr>
-              <a:t>$14,916</a:t>
+              <a:t>$14.9K</a:t>
             </a:r>
             <a:endParaRPr lang="en-US" sz="1300" dirty="0"/>
           </a:p>
@@ -4070,7 +4070,7 @@
                 <a:ea typeface="Inter" pitchFamily="34" charset="-122"/>
                 <a:cs typeface="Inter" pitchFamily="34" charset="-120"/>
               </a:rPr>
-              <a:t>$15,662</a:t>
+              <a:t>$15.7K</a:t>
             </a:r>
             <a:endParaRPr lang="en-US" sz="1300" dirty="0"/>
           </a:p>
@@ -4124,7 +4124,7 @@
         <p:spPr>
           <a:xfrm>
             <a:off x="2670048" y="5732723"/>
-            <a:ext cx="128662" cy="136676"/>
+            <a:ext cx="135434" cy="136676"/>
           </a:xfrm>
           <a:prstGeom prst="rect">
             <a:avLst/>
@@ -4143,8 +4143,8 @@
         </p:nvSpPr>
         <p:spPr>
           <a:xfrm>
-            <a:off x="3419856" y="5676810"/>
-            <a:ext cx="950976" cy="248502"/>
+            <a:off x="3456432" y="5676810"/>
+            <a:ext cx="914400" cy="248502"/>
           </a:xfrm>
           <a:prstGeom prst="rect">
             <a:avLst/>
@@ -4168,7 +4168,7 @@
                 <a:ea typeface="Inter" pitchFamily="34" charset="-122"/>
                 <a:cs typeface="Inter" pitchFamily="34" charset="-120"/>
               </a:rPr>
-              <a:t>$278,863</a:t>
+              <a:t>$279K</a:t>
             </a:r>
             <a:endParaRPr lang="en-US" sz="1300" dirty="0"/>
           </a:p>
@@ -4207,7 +4207,7 @@
                 <a:ea typeface="Inter" pitchFamily="34" charset="-122"/>
                 <a:cs typeface="Inter" pitchFamily="34" charset="-120"/>
               </a:rPr>
-              <a:t>$12,871</a:t>
+              <a:t>$12.9K</a:t>
             </a:r>
             <a:endParaRPr lang="en-US" sz="1300" dirty="0"/>
           </a:p>
@@ -4246,7 +4246,7 @@
                 <a:ea typeface="Inter" pitchFamily="34" charset="-122"/>
                 <a:cs typeface="Inter" pitchFamily="34" charset="-120"/>
               </a:rPr>
-              <a:t>$13,514</a:t>
+              <a:t>$13.5K</a:t>
             </a:r>
             <a:endParaRPr lang="en-US" sz="1300" dirty="0"/>
           </a:p>
@@ -4300,7 +4300,7 @@
         <p:spPr>
           <a:xfrm>
             <a:off x="8220456" y="1756697"/>
-            <a:ext cx="127501" cy="136676"/>
+            <a:ext cx="134212" cy="136676"/>
           </a:xfrm>
           <a:prstGeom prst="rect">
             <a:avLst/>
@@ -4319,8 +4319,8 @@
         </p:nvSpPr>
         <p:spPr>
           <a:xfrm>
-            <a:off x="8970264" y="1700784"/>
-            <a:ext cx="950976" cy="248502"/>
+            <a:off x="9006840" y="1700784"/>
+            <a:ext cx="914400" cy="248502"/>
           </a:xfrm>
           <a:prstGeom prst="rect">
             <a:avLst/>
@@ -4344,7 +4344,7 @@
                 <a:ea typeface="Inter" pitchFamily="34" charset="-122"/>
                 <a:cs typeface="Inter" pitchFamily="34" charset="-120"/>
               </a:rPr>
-              <a:t>$276,346</a:t>
+              <a:t>$276K</a:t>
             </a:r>
             <a:endParaRPr lang="en-US" sz="1300" dirty="0"/>
           </a:p>
@@ -4383,7 +4383,7 @@
                 <a:ea typeface="Inter" pitchFamily="34" charset="-122"/>
                 <a:cs typeface="Inter" pitchFamily="34" charset="-120"/>
               </a:rPr>
-              <a:t>$16,919</a:t>
+              <a:t>$16.9K</a:t>
             </a:r>
             <a:endParaRPr lang="en-US" sz="1300" dirty="0"/>
           </a:p>
@@ -4422,7 +4422,7 @@
                 <a:ea typeface="Inter" pitchFamily="34" charset="-122"/>
                 <a:cs typeface="Inter" pitchFamily="34" charset="-120"/>
               </a:rPr>
-              <a:t>$17,765</a:t>
+              <a:t>$17.8K</a:t>
             </a:r>
             <a:endParaRPr lang="en-US" sz="1300" dirty="0"/>
           </a:p>
@@ -4476,7 +4476,7 @@
         <p:spPr>
           <a:xfrm>
             <a:off x="8220456" y="2005199"/>
-            <a:ext cx="120382" cy="136676"/>
+            <a:ext cx="126718" cy="136676"/>
           </a:xfrm>
           <a:prstGeom prst="rect">
             <a:avLst/>
@@ -4495,8 +4495,8 @@
         </p:nvSpPr>
         <p:spPr>
           <a:xfrm>
-            <a:off x="8970264" y="1949286"/>
-            <a:ext cx="950976" cy="248502"/>
+            <a:off x="9006840" y="1949286"/>
+            <a:ext cx="914400" cy="248502"/>
           </a:xfrm>
           <a:prstGeom prst="rect">
             <a:avLst/>
@@ -4520,7 +4520,7 @@
                 <a:ea typeface="Inter" pitchFamily="34" charset="-122"/>
                 <a:cs typeface="Inter" pitchFamily="34" charset="-120"/>
               </a:rPr>
-              <a:t>$260,917</a:t>
+              <a:t>$261K</a:t>
             </a:r>
             <a:endParaRPr lang="en-US" sz="1300" dirty="0"/>
           </a:p>
@@ -4559,7 +4559,7 @@
                 <a:ea typeface="Inter" pitchFamily="34" charset="-122"/>
                 <a:cs typeface="Inter" pitchFamily="34" charset="-120"/>
               </a:rPr>
-              <a:t>$18,549</a:t>
+              <a:t>$18.5K</a:t>
             </a:r>
             <a:endParaRPr lang="en-US" sz="1300" dirty="0"/>
           </a:p>
@@ -4598,7 +4598,7 @@
                 <a:ea typeface="Inter" pitchFamily="34" charset="-122"/>
                 <a:cs typeface="Inter" pitchFamily="34" charset="-120"/>
               </a:rPr>
-              <a:t>$19,476</a:t>
+              <a:t>$19.5K</a:t>
             </a:r>
             <a:endParaRPr lang="en-US" sz="1300" dirty="0"/>
           </a:p>
@@ -4652,7 +4652,7 @@
         <p:spPr>
           <a:xfrm>
             <a:off x="8220456" y="2253700"/>
-            <a:ext cx="109290" cy="136676"/>
+            <a:ext cx="115043" cy="136676"/>
           </a:xfrm>
           <a:prstGeom prst="rect">
             <a:avLst/>
@@ -4671,8 +4671,8 @@
         </p:nvSpPr>
         <p:spPr>
           <a:xfrm>
-            <a:off x="8970264" y="2197787"/>
-            <a:ext cx="950976" cy="248502"/>
+            <a:off x="9006840" y="2197787"/>
+            <a:ext cx="914400" cy="248502"/>
           </a:xfrm>
           <a:prstGeom prst="rect">
             <a:avLst/>
@@ -4696,7 +4696,7 @@
                 <a:ea typeface="Inter" pitchFamily="34" charset="-122"/>
                 <a:cs typeface="Inter" pitchFamily="34" charset="-120"/>
               </a:rPr>
-              <a:t>$236,877</a:t>
+              <a:t>$237K</a:t>
             </a:r>
             <a:endParaRPr lang="en-US" sz="1300" dirty="0"/>
           </a:p>
@@ -4735,7 +4735,7 @@
                 <a:ea typeface="Inter" pitchFamily="34" charset="-122"/>
                 <a:cs typeface="Inter" pitchFamily="34" charset="-120"/>
               </a:rPr>
-              <a:t>$9,953</a:t>
+              <a:t>$10.0K</a:t>
             </a:r>
             <a:endParaRPr lang="en-US" sz="1300" dirty="0"/>
           </a:p>
@@ -4774,7 +4774,7 @@
                 <a:ea typeface="Inter" pitchFamily="34" charset="-122"/>
                 <a:cs typeface="Inter" pitchFamily="34" charset="-120"/>
               </a:rPr>
-              <a:t>$10,450</a:t>
+              <a:t>$10.5K</a:t>
             </a:r>
             <a:endParaRPr lang="en-US" sz="1300" dirty="0"/>
           </a:p>
@@ -4828,7 +4828,7 @@
         <p:spPr>
           <a:xfrm>
             <a:off x="8220456" y="2502202"/>
-            <a:ext cx="108135" cy="136676"/>
+            <a:ext cx="113826" cy="136676"/>
           </a:xfrm>
           <a:prstGeom prst="rect">
             <a:avLst/>
@@ -4847,8 +4847,8 @@
         </p:nvSpPr>
         <p:spPr>
           <a:xfrm>
-            <a:off x="8970264" y="2446289"/>
-            <a:ext cx="950976" cy="248502"/>
+            <a:off x="9006840" y="2446289"/>
+            <a:ext cx="914400" cy="248502"/>
           </a:xfrm>
           <a:prstGeom prst="rect">
             <a:avLst/>
@@ -4872,7 +4872,7 @@
                 <a:ea typeface="Inter" pitchFamily="34" charset="-122"/>
                 <a:cs typeface="Inter" pitchFamily="34" charset="-120"/>
               </a:rPr>
-              <a:t>$234,372</a:t>
+              <a:t>$234K</a:t>
             </a:r>
             <a:endParaRPr lang="en-US" sz="1300" dirty="0"/>
           </a:p>
@@ -4911,7 +4911,7 @@
                 <a:ea typeface="Inter" pitchFamily="34" charset="-122"/>
                 <a:cs typeface="Inter" pitchFamily="34" charset="-120"/>
               </a:rPr>
-              <a:t>$15,556</a:t>
+              <a:t>$15.6K</a:t>
             </a:r>
             <a:endParaRPr lang="en-US" sz="1300" dirty="0"/>
           </a:p>
@@ -4950,7 +4950,7 @@
                 <a:ea typeface="Inter" pitchFamily="34" charset="-122"/>
                 <a:cs typeface="Inter" pitchFamily="34" charset="-120"/>
               </a:rPr>
-              <a:t>$16,333</a:t>
+              <a:t>$16.3K</a:t>
             </a:r>
             <a:endParaRPr lang="en-US" sz="1300" dirty="0"/>
           </a:p>
@@ -5004,7 +5004,7 @@
         <p:spPr>
           <a:xfrm>
             <a:off x="8220456" y="2750703"/>
-            <a:ext cx="105077" cy="136676"/>
+            <a:ext cx="110607" cy="136676"/>
           </a:xfrm>
           <a:prstGeom prst="rect">
             <a:avLst/>
@@ -5023,8 +5023,8 @@
         </p:nvSpPr>
         <p:spPr>
           <a:xfrm>
-            <a:off x="8970264" y="2694791"/>
-            <a:ext cx="950976" cy="248502"/>
+            <a:off x="9006840" y="2694791"/>
+            <a:ext cx="914400" cy="248502"/>
           </a:xfrm>
           <a:prstGeom prst="rect">
             <a:avLst/>
@@ -5048,7 +5048,7 @@
                 <a:ea typeface="Inter" pitchFamily="34" charset="-122"/>
                 <a:cs typeface="Inter" pitchFamily="34" charset="-120"/>
               </a:rPr>
-              <a:t>$227,743</a:t>
+              <a:t>$228K</a:t>
             </a:r>
             <a:endParaRPr lang="en-US" sz="1300" dirty="0"/>
           </a:p>
@@ -5087,7 +5087,7 @@
                 <a:ea typeface="Inter" pitchFamily="34" charset="-122"/>
                 <a:cs typeface="Inter" pitchFamily="34" charset="-120"/>
               </a:rPr>
-              <a:t>$18,268</a:t>
+              <a:t>$18.3K</a:t>
             </a:r>
             <a:endParaRPr lang="en-US" sz="1300" dirty="0"/>
           </a:p>
@@ -5126,7 +5126,7 @@
                 <a:ea typeface="Inter" pitchFamily="34" charset="-122"/>
                 <a:cs typeface="Inter" pitchFamily="34" charset="-120"/>
               </a:rPr>
-              <a:t>$19,182</a:t>
+              <a:t>$19.2K</a:t>
             </a:r>
             <a:endParaRPr lang="en-US" sz="1300" dirty="0"/>
           </a:p>
@@ -5180,7 +5180,7 @@
         <p:spPr>
           <a:xfrm>
             <a:off x="8220456" y="2999205"/>
-            <a:ext cx="101658" cy="136676"/>
+            <a:ext cx="107009" cy="136676"/>
           </a:xfrm>
           <a:prstGeom prst="rect">
             <a:avLst/>
@@ -5199,8 +5199,8 @@
         </p:nvSpPr>
         <p:spPr>
           <a:xfrm>
-            <a:off x="8970264" y="2943292"/>
-            <a:ext cx="950976" cy="248502"/>
+            <a:off x="9006840" y="2943292"/>
+            <a:ext cx="914400" cy="248502"/>
           </a:xfrm>
           <a:prstGeom prst="rect">
             <a:avLst/>
@@ -5224,7 +5224,7 @@
                 <a:ea typeface="Inter" pitchFamily="34" charset="-122"/>
                 <a:cs typeface="Inter" pitchFamily="34" charset="-120"/>
               </a:rPr>
-              <a:t>$220,335</a:t>
+              <a:t>$220K</a:t>
             </a:r>
             <a:endParaRPr lang="en-US" sz="1300" dirty="0"/>
           </a:p>
@@ -5263,7 +5263,7 @@
                 <a:ea typeface="Inter" pitchFamily="34" charset="-122"/>
                 <a:cs typeface="Inter" pitchFamily="34" charset="-120"/>
               </a:rPr>
-              <a:t>$15,966</a:t>
+              <a:t>$16.0K</a:t>
             </a:r>
             <a:endParaRPr lang="en-US" sz="1300" dirty="0"/>
           </a:p>
@@ -5302,7 +5302,7 @@
                 <a:ea typeface="Inter" pitchFamily="34" charset="-122"/>
                 <a:cs typeface="Inter" pitchFamily="34" charset="-120"/>
               </a:rPr>
-              <a:t>$16,765</a:t>
+              <a:t>$16.8K</a:t>
             </a:r>
             <a:endParaRPr lang="en-US" sz="1300" dirty="0"/>
           </a:p>
@@ -5356,7 +5356,7 @@
         <p:spPr>
           <a:xfrm>
             <a:off x="8220456" y="3247707"/>
-            <a:ext cx="91723" cy="136676"/>
+            <a:ext cx="96551" cy="136676"/>
           </a:xfrm>
           <a:prstGeom prst="rect">
             <a:avLst/>
@@ -5375,8 +5375,8 @@
         </p:nvSpPr>
         <p:spPr>
           <a:xfrm>
-            <a:off x="8970264" y="3191794"/>
-            <a:ext cx="950976" cy="248502"/>
+            <a:off x="9006840" y="3191794"/>
+            <a:ext cx="914400" cy="248502"/>
           </a:xfrm>
           <a:prstGeom prst="rect">
             <a:avLst/>
@@ -5400,7 +5400,7 @@
                 <a:ea typeface="Inter" pitchFamily="34" charset="-122"/>
                 <a:cs typeface="Inter" pitchFamily="34" charset="-120"/>
               </a:rPr>
-              <a:t>$198,802</a:t>
+              <a:t>$199K</a:t>
             </a:r>
             <a:endParaRPr lang="en-US" sz="1300" dirty="0"/>
           </a:p>
@@ -5439,7 +5439,7 @@
                 <a:ea typeface="Inter" pitchFamily="34" charset="-122"/>
                 <a:cs typeface="Inter" pitchFamily="34" charset="-120"/>
               </a:rPr>
-              <a:t>$10,963</a:t>
+              <a:t>$11.0K</a:t>
             </a:r>
             <a:endParaRPr lang="en-US" sz="1300" dirty="0"/>
           </a:p>
@@ -5478,7 +5478,7 @@
                 <a:ea typeface="Inter" pitchFamily="34" charset="-122"/>
                 <a:cs typeface="Inter" pitchFamily="34" charset="-120"/>
               </a:rPr>
-              <a:t>$11,511</a:t>
+              <a:t>$11.5K</a:t>
             </a:r>
             <a:endParaRPr lang="en-US" sz="1300" dirty="0"/>
           </a:p>
@@ -5532,7 +5532,7 @@
         <p:spPr>
           <a:xfrm>
             <a:off x="8220456" y="3496208"/>
-            <a:ext cx="88990" cy="136676"/>
+            <a:ext cx="93673" cy="136676"/>
           </a:xfrm>
           <a:prstGeom prst="rect">
             <a:avLst/>
@@ -5551,8 +5551,8 @@
         </p:nvSpPr>
         <p:spPr>
           <a:xfrm>
-            <a:off x="8970264" y="3440296"/>
-            <a:ext cx="950976" cy="248502"/>
+            <a:off x="9006840" y="3440296"/>
+            <a:ext cx="914400" cy="248502"/>
           </a:xfrm>
           <a:prstGeom prst="rect">
             <a:avLst/>
@@ -5576,7 +5576,7 @@
                 <a:ea typeface="Inter" pitchFamily="34" charset="-122"/>
                 <a:cs typeface="Inter" pitchFamily="34" charset="-120"/>
               </a:rPr>
-              <a:t>$192,877</a:t>
+              <a:t>$193K</a:t>
             </a:r>
             <a:endParaRPr lang="en-US" sz="1300" dirty="0"/>
           </a:p>
@@ -5615,7 +5615,7 @@
                 <a:ea typeface="Inter" pitchFamily="34" charset="-122"/>
                 <a:cs typeface="Inter" pitchFamily="34" charset="-120"/>
               </a:rPr>
-              <a:t>$12,364</a:t>
+              <a:t>$12.4K</a:t>
             </a:r>
             <a:endParaRPr lang="en-US" sz="1300" dirty="0"/>
           </a:p>
@@ -5654,7 +5654,7 @@
                 <a:ea typeface="Inter" pitchFamily="34" charset="-122"/>
                 <a:cs typeface="Inter" pitchFamily="34" charset="-120"/>
               </a:rPr>
-              <a:t>$12,982</a:t>
+              <a:t>$13.0K</a:t>
             </a:r>
             <a:endParaRPr lang="en-US" sz="1300" dirty="0"/>
           </a:p>
@@ -5708,7 +5708,7 @@
         <p:spPr>
           <a:xfrm>
             <a:off x="8220456" y="3744710"/>
-            <a:ext cx="83056" cy="136676"/>
+            <a:ext cx="87427" cy="136676"/>
           </a:xfrm>
           <a:prstGeom prst="rect">
             <a:avLst/>
@@ -5727,8 +5727,8 @@
         </p:nvSpPr>
         <p:spPr>
           <a:xfrm>
-            <a:off x="8970264" y="3688797"/>
-            <a:ext cx="950976" cy="248502"/>
+            <a:off x="9006840" y="3688797"/>
+            <a:ext cx="914400" cy="248502"/>
           </a:xfrm>
           <a:prstGeom prst="rect">
             <a:avLst/>
@@ -5752,7 +5752,7 @@
                 <a:ea typeface="Inter" pitchFamily="34" charset="-122"/>
                 <a:cs typeface="Inter" pitchFamily="34" charset="-120"/>
               </a:rPr>
-              <a:t>$180,016</a:t>
+              <a:t>$180K</a:t>
             </a:r>
             <a:endParaRPr lang="en-US" sz="1300" dirty="0"/>
           </a:p>
@@ -5791,7 +5791,7 @@
                 <a:ea typeface="Inter" pitchFamily="34" charset="-122"/>
                 <a:cs typeface="Inter" pitchFamily="34" charset="-120"/>
               </a:rPr>
-              <a:t>$12,501</a:t>
+              <a:t>$12.5K</a:t>
             </a:r>
             <a:endParaRPr lang="en-US" sz="1300" dirty="0"/>
           </a:p>
@@ -5830,7 +5830,7 @@
                 <a:ea typeface="Inter" pitchFamily="34" charset="-122"/>
                 <a:cs typeface="Inter" pitchFamily="34" charset="-120"/>
               </a:rPr>
-              <a:t>$13,126</a:t>
+              <a:t>$13.1K</a:t>
             </a:r>
             <a:endParaRPr lang="en-US" sz="1300" dirty="0"/>
           </a:p>
@@ -5884,7 +5884,7 @@
         <p:spPr>
           <a:xfrm>
             <a:off x="8220456" y="3993212"/>
-            <a:ext cx="71851" cy="136676"/>
+            <a:ext cx="75632" cy="136676"/>
           </a:xfrm>
           <a:prstGeom prst="rect">
             <a:avLst/>
@@ -5903,8 +5903,8 @@
         </p:nvSpPr>
         <p:spPr>
           <a:xfrm>
-            <a:off x="8970264" y="3937299"/>
-            <a:ext cx="950976" cy="248502"/>
+            <a:off x="9006840" y="3937299"/>
+            <a:ext cx="914400" cy="248502"/>
           </a:xfrm>
           <a:prstGeom prst="rect">
             <a:avLst/>
@@ -5928,7 +5928,7 @@
                 <a:ea typeface="Inter" pitchFamily="34" charset="-122"/>
                 <a:cs typeface="Inter" pitchFamily="34" charset="-120"/>
               </a:rPr>
-              <a:t>$155,730</a:t>
+              <a:t>$156K</a:t>
             </a:r>
             <a:endParaRPr lang="en-US" sz="1300" dirty="0"/>
           </a:p>
@@ -5967,7 +5967,7 @@
                 <a:ea typeface="Inter" pitchFamily="34" charset="-122"/>
                 <a:cs typeface="Inter" pitchFamily="34" charset="-120"/>
               </a:rPr>
-              <a:t>$12,103</a:t>
+              <a:t>$12.1K</a:t>
             </a:r>
             <a:endParaRPr lang="en-US" sz="1300" dirty="0"/>
           </a:p>
@@ -6006,7 +6006,7 @@
                 <a:ea typeface="Inter" pitchFamily="34" charset="-122"/>
                 <a:cs typeface="Inter" pitchFamily="34" charset="-120"/>
               </a:rPr>
-              <a:t>$12,709</a:t>
+              <a:t>$12.7K</a:t>
             </a:r>
             <a:endParaRPr lang="en-US" sz="1300" dirty="0"/>
           </a:p>
@@ -6060,7 +6060,7 @@
         <p:spPr>
           <a:xfrm>
             <a:off x="8220456" y="4241713"/>
-            <a:ext cx="70289" cy="136676"/>
+            <a:ext cx="73988" cy="136676"/>
           </a:xfrm>
           <a:prstGeom prst="rect">
             <a:avLst/>
@@ -6079,8 +6079,8 @@
         </p:nvSpPr>
         <p:spPr>
           <a:xfrm>
-            <a:off x="8970264" y="4185800"/>
-            <a:ext cx="950976" cy="248502"/>
+            <a:off x="9006840" y="4185800"/>
+            <a:ext cx="914400" cy="248502"/>
           </a:xfrm>
           <a:prstGeom prst="rect">
             <a:avLst/>
@@ -6104,7 +6104,7 @@
                 <a:ea typeface="Inter" pitchFamily="34" charset="-122"/>
                 <a:cs typeface="Inter" pitchFamily="34" charset="-120"/>
               </a:rPr>
-              <a:t>$152,344</a:t>
+              <a:t>$152K</a:t>
             </a:r>
             <a:endParaRPr lang="en-US" sz="1300" dirty="0"/>
           </a:p>
@@ -6143,7 +6143,7 @@
                 <a:ea typeface="Inter" pitchFamily="34" charset="-122"/>
                 <a:cs typeface="Inter" pitchFamily="34" charset="-120"/>
               </a:rPr>
-              <a:t>$11,541</a:t>
+              <a:t>$11.5K</a:t>
             </a:r>
             <a:endParaRPr lang="en-US" sz="1300" dirty="0"/>
           </a:p>
@@ -6182,7 +6182,7 @@
                 <a:ea typeface="Inter" pitchFamily="34" charset="-122"/>
                 <a:cs typeface="Inter" pitchFamily="34" charset="-120"/>
               </a:rPr>
-              <a:t>$12,118</a:t>
+              <a:t>$12.1K</a:t>
             </a:r>
             <a:endParaRPr lang="en-US" sz="1300" dirty="0"/>
           </a:p>
@@ -6236,7 +6236,7 @@
         <p:spPr>
           <a:xfrm>
             <a:off x="8220456" y="4490215"/>
-            <a:ext cx="69822" cy="136676"/>
+            <a:ext cx="73497" cy="136676"/>
           </a:xfrm>
           <a:prstGeom prst="rect">
             <a:avLst/>
@@ -6255,8 +6255,8 @@
         </p:nvSpPr>
         <p:spPr>
           <a:xfrm>
-            <a:off x="8970264" y="4434302"/>
-            <a:ext cx="950976" cy="248502"/>
+            <a:off x="9006840" y="4434302"/>
+            <a:ext cx="914400" cy="248502"/>
           </a:xfrm>
           <a:prstGeom prst="rect">
             <a:avLst/>
@@ -6280,7 +6280,7 @@
                 <a:ea typeface="Inter" pitchFamily="34" charset="-122"/>
                 <a:cs typeface="Inter" pitchFamily="34" charset="-120"/>
               </a:rPr>
-              <a:t>$151,334</a:t>
+              <a:t>$151K</a:t>
             </a:r>
             <a:endParaRPr lang="en-US" sz="1300" dirty="0"/>
           </a:p>
@@ -6319,7 +6319,7 @@
                 <a:ea typeface="Inter" pitchFamily="34" charset="-122"/>
                 <a:cs typeface="Inter" pitchFamily="34" charset="-120"/>
               </a:rPr>
-              <a:t>$9,498</a:t>
+              <a:t>$9.5K</a:t>
             </a:r>
             <a:endParaRPr lang="en-US" sz="1300" dirty="0"/>
           </a:p>
@@ -6358,7 +6358,7 @@
                 <a:ea typeface="Inter" pitchFamily="34" charset="-122"/>
                 <a:cs typeface="Inter" pitchFamily="34" charset="-120"/>
               </a:rPr>
-              <a:t>$9,973</a:t>
+              <a:t>$10.0K</a:t>
             </a:r>
             <a:endParaRPr lang="en-US" sz="1300" dirty="0"/>
           </a:p>
@@ -6412,7 +6412,7 @@
         <p:spPr>
           <a:xfrm>
             <a:off x="8220456" y="4738717"/>
-            <a:ext cx="67909" cy="136676"/>
+            <a:ext cx="71484" cy="136676"/>
           </a:xfrm>
           <a:prstGeom prst="rect">
             <a:avLst/>
@@ -6431,8 +6431,8 @@
         </p:nvSpPr>
         <p:spPr>
           <a:xfrm>
-            <a:off x="8970264" y="4682804"/>
-            <a:ext cx="950976" cy="248502"/>
+            <a:off x="9006840" y="4682804"/>
+            <a:ext cx="914400" cy="248502"/>
           </a:xfrm>
           <a:prstGeom prst="rect">
             <a:avLst/>
@@ -6456,7 +6456,7 @@
                 <a:ea typeface="Inter" pitchFamily="34" charset="-122"/>
                 <a:cs typeface="Inter" pitchFamily="34" charset="-120"/>
               </a:rPr>
-              <a:t>$147,187</a:t>
+              <a:t>$147K</a:t>
             </a:r>
             <a:endParaRPr lang="en-US" sz="1300" dirty="0"/>
           </a:p>
@@ -6495,7 +6495,7 @@
                 <a:ea typeface="Inter" pitchFamily="34" charset="-122"/>
                 <a:cs typeface="Inter" pitchFamily="34" charset="-120"/>
               </a:rPr>
-              <a:t>$15,226</a:t>
+              <a:t>$15.2K</a:t>
             </a:r>
             <a:endParaRPr lang="en-US" sz="1300" dirty="0"/>
           </a:p>
@@ -6534,7 +6534,7 @@
                 <a:ea typeface="Inter" pitchFamily="34" charset="-122"/>
                 <a:cs typeface="Inter" pitchFamily="34" charset="-120"/>
               </a:rPr>
-              <a:t>$15,988</a:t>
+              <a:t>$16.0K</a:t>
             </a:r>
             <a:endParaRPr lang="en-US" sz="1300" dirty="0"/>
           </a:p>
@@ -6588,7 +6588,7 @@
         <p:spPr>
           <a:xfrm>
             <a:off x="8220456" y="4987218"/>
-            <a:ext cx="48967" cy="136676"/>
+            <a:ext cx="51544" cy="136676"/>
           </a:xfrm>
           <a:prstGeom prst="rect">
             <a:avLst/>
@@ -6607,8 +6607,8 @@
         </p:nvSpPr>
         <p:spPr>
           <a:xfrm>
-            <a:off x="8970264" y="4931305"/>
-            <a:ext cx="950976" cy="248502"/>
+            <a:off x="9006840" y="4931305"/>
+            <a:ext cx="914400" cy="248502"/>
           </a:xfrm>
           <a:prstGeom prst="rect">
             <a:avLst/>
@@ -6632,7 +6632,7 @@
                 <a:ea typeface="Inter" pitchFamily="34" charset="-122"/>
                 <a:cs typeface="Inter" pitchFamily="34" charset="-120"/>
               </a:rPr>
-              <a:t>$106,131</a:t>
+              <a:t>$106K</a:t>
             </a:r>
             <a:endParaRPr lang="en-US" sz="1300" dirty="0"/>
           </a:p>
@@ -6671,7 +6671,7 @@
                 <a:ea typeface="Inter" pitchFamily="34" charset="-122"/>
                 <a:cs typeface="Inter" pitchFamily="34" charset="-120"/>
               </a:rPr>
-              <a:t>$9,149</a:t>
+              <a:t>$9.1K</a:t>
             </a:r>
             <a:endParaRPr lang="en-US" sz="1300" dirty="0"/>
           </a:p>
@@ -6710,7 +6710,7 @@
                 <a:ea typeface="Inter" pitchFamily="34" charset="-122"/>
                 <a:cs typeface="Inter" pitchFamily="34" charset="-120"/>
               </a:rPr>
-              <a:t>$9,607</a:t>
+              <a:t>$9.6K</a:t>
             </a:r>
             <a:endParaRPr lang="en-US" sz="1300" dirty="0"/>
           </a:p>
@@ -6764,7 +6764,7 @@
         <p:spPr>
           <a:xfrm>
             <a:off x="8220456" y="5235720"/>
-            <a:ext cx="47223" cy="136676"/>
+            <a:ext cx="49708" cy="136676"/>
           </a:xfrm>
           <a:prstGeom prst="rect">
             <a:avLst/>
@@ -6783,8 +6783,8 @@
         </p:nvSpPr>
         <p:spPr>
           <a:xfrm>
-            <a:off x="8970264" y="5179807"/>
-            <a:ext cx="950976" cy="248502"/>
+            <a:off x="9006840" y="5179807"/>
+            <a:ext cx="914400" cy="248502"/>
           </a:xfrm>
           <a:prstGeom prst="rect">
             <a:avLst/>
@@ -6808,7 +6808,7 @@
                 <a:ea typeface="Inter" pitchFamily="34" charset="-122"/>
                 <a:cs typeface="Inter" pitchFamily="34" charset="-120"/>
               </a:rPr>
-              <a:t>$102,351</a:t>
+              <a:t>$102K</a:t>
             </a:r>
             <a:endParaRPr lang="en-US" sz="1300" dirty="0"/>
           </a:p>
@@ -6847,7 +6847,7 @@
                 <a:ea typeface="Inter" pitchFamily="34" charset="-122"/>
                 <a:cs typeface="Inter" pitchFamily="34" charset="-120"/>
               </a:rPr>
-              <a:t>$11,631</a:t>
+              <a:t>$11.6K</a:t>
             </a:r>
             <a:endParaRPr lang="en-US" sz="1300" dirty="0"/>
           </a:p>
@@ -6886,7 +6886,7 @@
                 <a:ea typeface="Inter" pitchFamily="34" charset="-122"/>
                 <a:cs typeface="Inter" pitchFamily="34" charset="-120"/>
               </a:rPr>
-              <a:t>$12,212</a:t>
+              <a:t>$12.2K</a:t>
             </a:r>
             <a:endParaRPr lang="en-US" sz="1300" dirty="0"/>
           </a:p>
@@ -6940,7 +6940,7 @@
         <p:spPr>
           <a:xfrm>
             <a:off x="8220456" y="5484222"/>
-            <a:ext cx="29775" cy="136676"/>
+            <a:ext cx="31342" cy="136676"/>
           </a:xfrm>
           <a:prstGeom prst="rect">
             <a:avLst/>
@@ -6959,8 +6959,8 @@
         </p:nvSpPr>
         <p:spPr>
           <a:xfrm>
-            <a:off x="8970264" y="5428309"/>
-            <a:ext cx="950976" cy="248502"/>
+            <a:off x="9006840" y="5428309"/>
+            <a:ext cx="914400" cy="248502"/>
           </a:xfrm>
           <a:prstGeom prst="rect">
             <a:avLst/>
@@ -6984,7 +6984,7 @@
                 <a:ea typeface="Inter" pitchFamily="34" charset="-122"/>
                 <a:cs typeface="Inter" pitchFamily="34" charset="-120"/>
               </a:rPr>
-              <a:t>$64,535</a:t>
+              <a:t>$65K</a:t>
             </a:r>
             <a:endParaRPr lang="en-US" sz="1300" dirty="0"/>
           </a:p>
@@ -7023,7 +7023,7 @@
                 <a:ea typeface="Inter" pitchFamily="34" charset="-122"/>
                 <a:cs typeface="Inter" pitchFamily="34" charset="-120"/>
               </a:rPr>
-              <a:t>$9,878</a:t>
+              <a:t>$9.9K</a:t>
             </a:r>
             <a:endParaRPr lang="en-US" sz="1300" dirty="0"/>
           </a:p>
@@ -7062,7 +7062,7 @@
                 <a:ea typeface="Inter" pitchFamily="34" charset="-122"/>
                 <a:cs typeface="Inter" pitchFamily="34" charset="-120"/>
               </a:rPr>
-              <a:t>$10,372</a:t>
+              <a:t>$10.4K</a:t>
             </a:r>
             <a:endParaRPr lang="en-US" sz="1300" dirty="0"/>
           </a:p>

--- a/day2-deck/decks/Fixed Gross per Employee 5 Pct - Review.pptx
+++ b/day2-deck/decks/Fixed Gross per Employee 5 Pct - Review.pptx
@@ -1034,7 +1034,7 @@
         </p:nvSpPr>
         <p:spPr>
           <a:xfrm>
-            <a:off x="3456432" y="1316736"/>
+            <a:off x="3502152" y="1316736"/>
             <a:ext cx="914400" cy="329184"/>
           </a:xfrm>
           <a:prstGeom prst="rect">
@@ -1073,7 +1073,7 @@
         </p:nvSpPr>
         <p:spPr>
           <a:xfrm>
-            <a:off x="4370832" y="1316736"/>
+            <a:off x="4416552" y="1316736"/>
             <a:ext cx="749808" cy="329184"/>
           </a:xfrm>
           <a:prstGeom prst="rect">
@@ -1112,7 +1112,7 @@
         </p:nvSpPr>
         <p:spPr>
           <a:xfrm>
-            <a:off x="5120640" y="1316736"/>
+            <a:off x="5166360" y="1316736"/>
             <a:ext cx="749808" cy="329184"/>
           </a:xfrm>
           <a:prstGeom prst="rect">
@@ -1151,7 +1151,7 @@
         </p:nvSpPr>
         <p:spPr>
           <a:xfrm>
-            <a:off x="9006840" y="1316736"/>
+            <a:off x="9052560" y="1316736"/>
             <a:ext cx="914400" cy="329184"/>
           </a:xfrm>
           <a:prstGeom prst="rect">
@@ -1190,7 +1190,7 @@
         </p:nvSpPr>
         <p:spPr>
           <a:xfrm>
-            <a:off x="9921240" y="1316736"/>
+            <a:off x="9966960" y="1316736"/>
             <a:ext cx="749808" cy="329184"/>
           </a:xfrm>
           <a:prstGeom prst="rect">
@@ -1229,7 +1229,7 @@
         </p:nvSpPr>
         <p:spPr>
           <a:xfrm>
-            <a:off x="10671048" y="1316736"/>
+            <a:off x="10716768" y="1316736"/>
             <a:ext cx="749808" cy="329184"/>
           </a:xfrm>
           <a:prstGeom prst="rect">
@@ -1269,7 +1269,46 @@
         <p:spPr>
           <a:xfrm>
             <a:off x="658368" y="1700784"/>
-            <a:ext cx="1938528" cy="248502"/>
+            <a:ext cx="310896" cy="248502"/>
+          </a:xfrm>
+          <a:prstGeom prst="rect">
+            <a:avLst/>
+          </a:prstGeom>
+          <a:noFill/>
+          <a:ln/>
+        </p:spPr>
+        <p:txBody>
+          <a:bodyPr wrap="square" lIns="0" tIns="0" rIns="0" bIns="0" rtlCol="0" anchor="ctr"/>
+          <a:lstStyle/>
+          <a:p>
+            <a:pPr algn="r" indent="0" marL="0">
+              <a:buNone/>
+            </a:pPr>
+            <a:r>
+              <a:rPr lang="en-US" sz="1200" dirty="0">
+                <a:solidFill>
+                  <a:srgbClr val="9AA3AD"/>
+                </a:solidFill>
+                <a:latin typeface="Inter" pitchFamily="34" charset="0"/>
+                <a:ea typeface="Inter" pitchFamily="34" charset="-122"/>
+                <a:cs typeface="Inter" pitchFamily="34" charset="-120"/>
+              </a:rPr>
+              <a:t>1</a:t>
+            </a:r>
+            <a:endParaRPr lang="en-US" sz="1200" dirty="0"/>
+          </a:p>
+        </p:txBody>
+      </p:sp>
+      <p:sp>
+        <p:nvSpPr>
+          <p:cNvPr id="13" name="Text 11"/>
+          <p:cNvSpPr txBox="1"/>
+          <p:nvPr/>
+        </p:nvSpPr>
+        <p:spPr>
+          <a:xfrm>
+            <a:off x="1014984" y="1700784"/>
+            <a:ext cx="1783080" cy="248502"/>
           </a:xfrm>
           <a:prstGeom prst="rect">
             <a:avLst/>
@@ -1301,14 +1340,14 @@
       </p:sp>
       <p:sp>
         <p:nvSpPr>
-          <p:cNvPr id="13" name="Shape 11"/>
+          <p:cNvPr id="14" name="Shape 12"/>
           <p:cNvSpPr/>
           <p:nvPr/>
         </p:nvSpPr>
         <p:spPr>
           <a:xfrm>
-            <a:off x="2670048" y="1756697"/>
-            <a:ext cx="731520" cy="136676"/>
+            <a:off x="2871216" y="1756697"/>
+            <a:ext cx="576072" cy="136676"/>
           </a:xfrm>
           <a:prstGeom prst="rect">
             <a:avLst/>
@@ -1321,13 +1360,13 @@
       </p:sp>
       <p:sp>
         <p:nvSpPr>
-          <p:cNvPr id="14" name="Text 12"/>
-          <p:cNvSpPr txBox="1"/>
-          <p:nvPr/>
-        </p:nvSpPr>
-        <p:spPr>
-          <a:xfrm>
-            <a:off x="3456432" y="1700784"/>
+          <p:cNvPr id="15" name="Text 13"/>
+          <p:cNvSpPr txBox="1"/>
+          <p:nvPr/>
+        </p:nvSpPr>
+        <p:spPr>
+          <a:xfrm>
+            <a:off x="3502152" y="1700784"/>
             <a:ext cx="914400" cy="248502"/>
           </a:xfrm>
           <a:prstGeom prst="rect">
@@ -1360,13 +1399,13 @@
       </p:sp>
       <p:sp>
         <p:nvSpPr>
-          <p:cNvPr id="15" name="Text 13"/>
-          <p:cNvSpPr txBox="1"/>
-          <p:nvPr/>
-        </p:nvSpPr>
-        <p:spPr>
-          <a:xfrm>
-            <a:off x="4370832" y="1700784"/>
+          <p:cNvPr id="16" name="Text 14"/>
+          <p:cNvSpPr txBox="1"/>
+          <p:nvPr/>
+        </p:nvSpPr>
+        <p:spPr>
+          <a:xfrm>
+            <a:off x="4416552" y="1700784"/>
             <a:ext cx="749808" cy="248502"/>
           </a:xfrm>
           <a:prstGeom prst="rect">
@@ -1399,13 +1438,13 @@
       </p:sp>
       <p:sp>
         <p:nvSpPr>
-          <p:cNvPr id="16" name="Text 14"/>
-          <p:cNvSpPr txBox="1"/>
-          <p:nvPr/>
-        </p:nvSpPr>
-        <p:spPr>
-          <a:xfrm>
-            <a:off x="5120640" y="1700784"/>
+          <p:cNvPr id="17" name="Text 15"/>
+          <p:cNvSpPr txBox="1"/>
+          <p:nvPr/>
+        </p:nvSpPr>
+        <p:spPr>
+          <a:xfrm>
+            <a:off x="5166360" y="1700784"/>
             <a:ext cx="749808" cy="248502"/>
           </a:xfrm>
           <a:prstGeom prst="rect">
@@ -1438,14 +1477,53 @@
       </p:sp>
       <p:sp>
         <p:nvSpPr>
-          <p:cNvPr id="17" name="Text 15"/>
+          <p:cNvPr id="18" name="Text 16"/>
           <p:cNvSpPr txBox="1"/>
           <p:nvPr/>
         </p:nvSpPr>
         <p:spPr>
           <a:xfrm>
             <a:off x="658368" y="1949286"/>
-            <a:ext cx="1938528" cy="248502"/>
+            <a:ext cx="310896" cy="248502"/>
+          </a:xfrm>
+          <a:prstGeom prst="rect">
+            <a:avLst/>
+          </a:prstGeom>
+          <a:noFill/>
+          <a:ln/>
+        </p:spPr>
+        <p:txBody>
+          <a:bodyPr wrap="square" lIns="0" tIns="0" rIns="0" bIns="0" rtlCol="0" anchor="ctr"/>
+          <a:lstStyle/>
+          <a:p>
+            <a:pPr algn="r" indent="0" marL="0">
+              <a:buNone/>
+            </a:pPr>
+            <a:r>
+              <a:rPr lang="en-US" sz="1200" dirty="0">
+                <a:solidFill>
+                  <a:srgbClr val="9AA3AD"/>
+                </a:solidFill>
+                <a:latin typeface="Inter" pitchFamily="34" charset="0"/>
+                <a:ea typeface="Inter" pitchFamily="34" charset="-122"/>
+                <a:cs typeface="Inter" pitchFamily="34" charset="-120"/>
+              </a:rPr>
+              <a:t>2</a:t>
+            </a:r>
+            <a:endParaRPr lang="en-US" sz="1200" dirty="0"/>
+          </a:p>
+        </p:txBody>
+      </p:sp>
+      <p:sp>
+        <p:nvSpPr>
+          <p:cNvPr id="19" name="Text 17"/>
+          <p:cNvSpPr txBox="1"/>
+          <p:nvPr/>
+        </p:nvSpPr>
+        <p:spPr>
+          <a:xfrm>
+            <a:off x="1014984" y="1949286"/>
+            <a:ext cx="1783080" cy="248502"/>
           </a:xfrm>
           <a:prstGeom prst="rect">
             <a:avLst/>
@@ -1477,14 +1555,14 @@
       </p:sp>
       <p:sp>
         <p:nvSpPr>
-          <p:cNvPr id="18" name="Shape 16"/>
+          <p:cNvPr id="20" name="Shape 18"/>
           <p:cNvSpPr/>
           <p:nvPr/>
         </p:nvSpPr>
         <p:spPr>
           <a:xfrm>
-            <a:off x="2670048" y="2005199"/>
-            <a:ext cx="535690" cy="136676"/>
+            <a:off x="2871216" y="2005199"/>
+            <a:ext cx="421856" cy="136676"/>
           </a:xfrm>
           <a:prstGeom prst="rect">
             <a:avLst/>
@@ -1497,13 +1575,13 @@
       </p:sp>
       <p:sp>
         <p:nvSpPr>
-          <p:cNvPr id="19" name="Text 17"/>
-          <p:cNvSpPr txBox="1"/>
-          <p:nvPr/>
-        </p:nvSpPr>
-        <p:spPr>
-          <a:xfrm>
-            <a:off x="3456432" y="1949286"/>
+          <p:cNvPr id="21" name="Text 19"/>
+          <p:cNvSpPr txBox="1"/>
+          <p:nvPr/>
+        </p:nvSpPr>
+        <p:spPr>
+          <a:xfrm>
+            <a:off x="3502152" y="1949286"/>
             <a:ext cx="914400" cy="248502"/>
           </a:xfrm>
           <a:prstGeom prst="rect">
@@ -1536,13 +1614,13 @@
       </p:sp>
       <p:sp>
         <p:nvSpPr>
-          <p:cNvPr id="20" name="Text 18"/>
-          <p:cNvSpPr txBox="1"/>
-          <p:nvPr/>
-        </p:nvSpPr>
-        <p:spPr>
-          <a:xfrm>
-            <a:off x="4370832" y="1949286"/>
+          <p:cNvPr id="22" name="Text 20"/>
+          <p:cNvSpPr txBox="1"/>
+          <p:nvPr/>
+        </p:nvSpPr>
+        <p:spPr>
+          <a:xfrm>
+            <a:off x="4416552" y="1949286"/>
             <a:ext cx="749808" cy="248502"/>
           </a:xfrm>
           <a:prstGeom prst="rect">
@@ -1575,13 +1653,13 @@
       </p:sp>
       <p:sp>
         <p:nvSpPr>
-          <p:cNvPr id="21" name="Text 19"/>
-          <p:cNvSpPr txBox="1"/>
-          <p:nvPr/>
-        </p:nvSpPr>
-        <p:spPr>
-          <a:xfrm>
-            <a:off x="5120640" y="1949286"/>
+          <p:cNvPr id="23" name="Text 21"/>
+          <p:cNvSpPr txBox="1"/>
+          <p:nvPr/>
+        </p:nvSpPr>
+        <p:spPr>
+          <a:xfrm>
+            <a:off x="5166360" y="1949286"/>
             <a:ext cx="749808" cy="248502"/>
           </a:xfrm>
           <a:prstGeom prst="rect">
@@ -1614,14 +1692,53 @@
       </p:sp>
       <p:sp>
         <p:nvSpPr>
-          <p:cNvPr id="22" name="Text 20"/>
+          <p:cNvPr id="24" name="Text 22"/>
           <p:cNvSpPr txBox="1"/>
           <p:nvPr/>
         </p:nvSpPr>
         <p:spPr>
           <a:xfrm>
             <a:off x="658368" y="2197787"/>
-            <a:ext cx="1938528" cy="248502"/>
+            <a:ext cx="310896" cy="248502"/>
+          </a:xfrm>
+          <a:prstGeom prst="rect">
+            <a:avLst/>
+          </a:prstGeom>
+          <a:noFill/>
+          <a:ln/>
+        </p:spPr>
+        <p:txBody>
+          <a:bodyPr wrap="square" lIns="0" tIns="0" rIns="0" bIns="0" rtlCol="0" anchor="ctr"/>
+          <a:lstStyle/>
+          <a:p>
+            <a:pPr algn="r" indent="0" marL="0">
+              <a:buNone/>
+            </a:pPr>
+            <a:r>
+              <a:rPr lang="en-US" sz="1200" dirty="0">
+                <a:solidFill>
+                  <a:srgbClr val="9AA3AD"/>
+                </a:solidFill>
+                <a:latin typeface="Inter" pitchFamily="34" charset="0"/>
+                <a:ea typeface="Inter" pitchFamily="34" charset="-122"/>
+                <a:cs typeface="Inter" pitchFamily="34" charset="-120"/>
+              </a:rPr>
+              <a:t>3</a:t>
+            </a:r>
+            <a:endParaRPr lang="en-US" sz="1200" dirty="0"/>
+          </a:p>
+        </p:txBody>
+      </p:sp>
+      <p:sp>
+        <p:nvSpPr>
+          <p:cNvPr id="25" name="Text 23"/>
+          <p:cNvSpPr txBox="1"/>
+          <p:nvPr/>
+        </p:nvSpPr>
+        <p:spPr>
+          <a:xfrm>
+            <a:off x="1014984" y="2197787"/>
+            <a:ext cx="1783080" cy="248502"/>
           </a:xfrm>
           <a:prstGeom prst="rect">
             <a:avLst/>
@@ -1653,14 +1770,14 @@
       </p:sp>
       <p:sp>
         <p:nvSpPr>
-          <p:cNvPr id="23" name="Shape 21"/>
+          <p:cNvPr id="26" name="Shape 24"/>
           <p:cNvSpPr/>
           <p:nvPr/>
         </p:nvSpPr>
         <p:spPr>
           <a:xfrm>
-            <a:off x="2670048" y="2253700"/>
-            <a:ext cx="466983" cy="136676"/>
+            <a:off x="2871216" y="2253700"/>
+            <a:ext cx="367749" cy="136676"/>
           </a:xfrm>
           <a:prstGeom prst="rect">
             <a:avLst/>
@@ -1673,13 +1790,13 @@
       </p:sp>
       <p:sp>
         <p:nvSpPr>
-          <p:cNvPr id="24" name="Text 22"/>
-          <p:cNvSpPr txBox="1"/>
-          <p:nvPr/>
-        </p:nvSpPr>
-        <p:spPr>
-          <a:xfrm>
-            <a:off x="3456432" y="2197787"/>
+          <p:cNvPr id="27" name="Text 25"/>
+          <p:cNvSpPr txBox="1"/>
+          <p:nvPr/>
+        </p:nvSpPr>
+        <p:spPr>
+          <a:xfrm>
+            <a:off x="3502152" y="2197787"/>
             <a:ext cx="914400" cy="248502"/>
           </a:xfrm>
           <a:prstGeom prst="rect">
@@ -1712,13 +1829,13 @@
       </p:sp>
       <p:sp>
         <p:nvSpPr>
-          <p:cNvPr id="25" name="Text 23"/>
-          <p:cNvSpPr txBox="1"/>
-          <p:nvPr/>
-        </p:nvSpPr>
-        <p:spPr>
-          <a:xfrm>
-            <a:off x="4370832" y="2197787"/>
+          <p:cNvPr id="28" name="Text 26"/>
+          <p:cNvSpPr txBox="1"/>
+          <p:nvPr/>
+        </p:nvSpPr>
+        <p:spPr>
+          <a:xfrm>
+            <a:off x="4416552" y="2197787"/>
             <a:ext cx="749808" cy="248502"/>
           </a:xfrm>
           <a:prstGeom prst="rect">
@@ -1751,13 +1868,13 @@
       </p:sp>
       <p:sp>
         <p:nvSpPr>
-          <p:cNvPr id="26" name="Text 24"/>
-          <p:cNvSpPr txBox="1"/>
-          <p:nvPr/>
-        </p:nvSpPr>
-        <p:spPr>
-          <a:xfrm>
-            <a:off x="5120640" y="2197787"/>
+          <p:cNvPr id="29" name="Text 27"/>
+          <p:cNvSpPr txBox="1"/>
+          <p:nvPr/>
+        </p:nvSpPr>
+        <p:spPr>
+          <a:xfrm>
+            <a:off x="5166360" y="2197787"/>
             <a:ext cx="749808" cy="248502"/>
           </a:xfrm>
           <a:prstGeom prst="rect">
@@ -1790,14 +1907,53 @@
       </p:sp>
       <p:sp>
         <p:nvSpPr>
-          <p:cNvPr id="27" name="Text 25"/>
+          <p:cNvPr id="30" name="Text 28"/>
           <p:cNvSpPr txBox="1"/>
           <p:nvPr/>
         </p:nvSpPr>
         <p:spPr>
           <a:xfrm>
             <a:off x="658368" y="2446289"/>
-            <a:ext cx="1938528" cy="248502"/>
+            <a:ext cx="310896" cy="248502"/>
+          </a:xfrm>
+          <a:prstGeom prst="rect">
+            <a:avLst/>
+          </a:prstGeom>
+          <a:noFill/>
+          <a:ln/>
+        </p:spPr>
+        <p:txBody>
+          <a:bodyPr wrap="square" lIns="0" tIns="0" rIns="0" bIns="0" rtlCol="0" anchor="ctr"/>
+          <a:lstStyle/>
+          <a:p>
+            <a:pPr algn="r" indent="0" marL="0">
+              <a:buNone/>
+            </a:pPr>
+            <a:r>
+              <a:rPr lang="en-US" sz="1200" dirty="0">
+                <a:solidFill>
+                  <a:srgbClr val="9AA3AD"/>
+                </a:solidFill>
+                <a:latin typeface="Inter" pitchFamily="34" charset="0"/>
+                <a:ea typeface="Inter" pitchFamily="34" charset="-122"/>
+                <a:cs typeface="Inter" pitchFamily="34" charset="-120"/>
+              </a:rPr>
+              <a:t>4</a:t>
+            </a:r>
+            <a:endParaRPr lang="en-US" sz="1200" dirty="0"/>
+          </a:p>
+        </p:txBody>
+      </p:sp>
+      <p:sp>
+        <p:nvSpPr>
+          <p:cNvPr id="31" name="Text 29"/>
+          <p:cNvSpPr txBox="1"/>
+          <p:nvPr/>
+        </p:nvSpPr>
+        <p:spPr>
+          <a:xfrm>
+            <a:off x="1014984" y="2446289"/>
+            <a:ext cx="1783080" cy="248502"/>
           </a:xfrm>
           <a:prstGeom prst="rect">
             <a:avLst/>
@@ -1829,14 +1985,14 @@
       </p:sp>
       <p:sp>
         <p:nvSpPr>
-          <p:cNvPr id="28" name="Shape 26"/>
+          <p:cNvPr id="32" name="Shape 30"/>
           <p:cNvSpPr/>
           <p:nvPr/>
         </p:nvSpPr>
         <p:spPr>
           <a:xfrm>
-            <a:off x="2670048" y="2502202"/>
-            <a:ext cx="399548" cy="136676"/>
+            <a:off x="2871216" y="2502202"/>
+            <a:ext cx="314644" cy="136676"/>
           </a:xfrm>
           <a:prstGeom prst="rect">
             <a:avLst/>
@@ -1849,13 +2005,13 @@
       </p:sp>
       <p:sp>
         <p:nvSpPr>
-          <p:cNvPr id="29" name="Text 27"/>
-          <p:cNvSpPr txBox="1"/>
-          <p:nvPr/>
-        </p:nvSpPr>
-        <p:spPr>
-          <a:xfrm>
-            <a:off x="3456432" y="2446289"/>
+          <p:cNvPr id="33" name="Text 31"/>
+          <p:cNvSpPr txBox="1"/>
+          <p:nvPr/>
+        </p:nvSpPr>
+        <p:spPr>
+          <a:xfrm>
+            <a:off x="3502152" y="2446289"/>
             <a:ext cx="914400" cy="248502"/>
           </a:xfrm>
           <a:prstGeom prst="rect">
@@ -1888,13 +2044,13 @@
       </p:sp>
       <p:sp>
         <p:nvSpPr>
-          <p:cNvPr id="30" name="Text 28"/>
-          <p:cNvSpPr txBox="1"/>
-          <p:nvPr/>
-        </p:nvSpPr>
-        <p:spPr>
-          <a:xfrm>
-            <a:off x="4370832" y="2446289"/>
+          <p:cNvPr id="34" name="Text 32"/>
+          <p:cNvSpPr txBox="1"/>
+          <p:nvPr/>
+        </p:nvSpPr>
+        <p:spPr>
+          <a:xfrm>
+            <a:off x="4416552" y="2446289"/>
             <a:ext cx="749808" cy="248502"/>
           </a:xfrm>
           <a:prstGeom prst="rect">
@@ -1927,13 +2083,13 @@
       </p:sp>
       <p:sp>
         <p:nvSpPr>
-          <p:cNvPr id="31" name="Text 29"/>
-          <p:cNvSpPr txBox="1"/>
-          <p:nvPr/>
-        </p:nvSpPr>
-        <p:spPr>
-          <a:xfrm>
-            <a:off x="5120640" y="2446289"/>
+          <p:cNvPr id="35" name="Text 33"/>
+          <p:cNvSpPr txBox="1"/>
+          <p:nvPr/>
+        </p:nvSpPr>
+        <p:spPr>
+          <a:xfrm>
+            <a:off x="5166360" y="2446289"/>
             <a:ext cx="749808" cy="248502"/>
           </a:xfrm>
           <a:prstGeom prst="rect">
@@ -1966,14 +2122,53 @@
       </p:sp>
       <p:sp>
         <p:nvSpPr>
-          <p:cNvPr id="32" name="Text 30"/>
+          <p:cNvPr id="36" name="Text 34"/>
           <p:cNvSpPr txBox="1"/>
           <p:nvPr/>
         </p:nvSpPr>
         <p:spPr>
           <a:xfrm>
             <a:off x="658368" y="2694791"/>
-            <a:ext cx="1938528" cy="248502"/>
+            <a:ext cx="310896" cy="248502"/>
+          </a:xfrm>
+          <a:prstGeom prst="rect">
+            <a:avLst/>
+          </a:prstGeom>
+          <a:noFill/>
+          <a:ln/>
+        </p:spPr>
+        <p:txBody>
+          <a:bodyPr wrap="square" lIns="0" tIns="0" rIns="0" bIns="0" rtlCol="0" anchor="ctr"/>
+          <a:lstStyle/>
+          <a:p>
+            <a:pPr algn="r" indent="0" marL="0">
+              <a:buNone/>
+            </a:pPr>
+            <a:r>
+              <a:rPr lang="en-US" sz="1200" dirty="0">
+                <a:solidFill>
+                  <a:srgbClr val="9AA3AD"/>
+                </a:solidFill>
+                <a:latin typeface="Inter" pitchFamily="34" charset="0"/>
+                <a:ea typeface="Inter" pitchFamily="34" charset="-122"/>
+                <a:cs typeface="Inter" pitchFamily="34" charset="-120"/>
+              </a:rPr>
+              <a:t>5</a:t>
+            </a:r>
+            <a:endParaRPr lang="en-US" sz="1200" dirty="0"/>
+          </a:p>
+        </p:txBody>
+      </p:sp>
+      <p:sp>
+        <p:nvSpPr>
+          <p:cNvPr id="37" name="Text 35"/>
+          <p:cNvSpPr txBox="1"/>
+          <p:nvPr/>
+        </p:nvSpPr>
+        <p:spPr>
+          <a:xfrm>
+            <a:off x="1014984" y="2694791"/>
+            <a:ext cx="1783080" cy="248502"/>
           </a:xfrm>
           <a:prstGeom prst="rect">
             <a:avLst/>
@@ -2005,14 +2200,14 @@
       </p:sp>
       <p:sp>
         <p:nvSpPr>
-          <p:cNvPr id="33" name="Shape 31"/>
+          <p:cNvPr id="38" name="Shape 36"/>
           <p:cNvSpPr/>
           <p:nvPr/>
         </p:nvSpPr>
         <p:spPr>
           <a:xfrm>
-            <a:off x="2670048" y="2750703"/>
-            <a:ext cx="326379" cy="136676"/>
+            <a:off x="2871216" y="2750703"/>
+            <a:ext cx="257024" cy="136676"/>
           </a:xfrm>
           <a:prstGeom prst="rect">
             <a:avLst/>
@@ -2025,13 +2220,13 @@
       </p:sp>
       <p:sp>
         <p:nvSpPr>
-          <p:cNvPr id="34" name="Text 32"/>
-          <p:cNvSpPr txBox="1"/>
-          <p:nvPr/>
-        </p:nvSpPr>
-        <p:spPr>
-          <a:xfrm>
-            <a:off x="3456432" y="2694791"/>
+          <p:cNvPr id="39" name="Text 37"/>
+          <p:cNvSpPr txBox="1"/>
+          <p:nvPr/>
+        </p:nvSpPr>
+        <p:spPr>
+          <a:xfrm>
+            <a:off x="3502152" y="2694791"/>
             <a:ext cx="914400" cy="248502"/>
           </a:xfrm>
           <a:prstGeom prst="rect">
@@ -2064,13 +2259,13 @@
       </p:sp>
       <p:sp>
         <p:nvSpPr>
-          <p:cNvPr id="35" name="Text 33"/>
-          <p:cNvSpPr txBox="1"/>
-          <p:nvPr/>
-        </p:nvSpPr>
-        <p:spPr>
-          <a:xfrm>
-            <a:off x="4370832" y="2694791"/>
+          <p:cNvPr id="40" name="Text 38"/>
+          <p:cNvSpPr txBox="1"/>
+          <p:nvPr/>
+        </p:nvSpPr>
+        <p:spPr>
+          <a:xfrm>
+            <a:off x="4416552" y="2694791"/>
             <a:ext cx="749808" cy="248502"/>
           </a:xfrm>
           <a:prstGeom prst="rect">
@@ -2103,13 +2298,13 @@
       </p:sp>
       <p:sp>
         <p:nvSpPr>
-          <p:cNvPr id="36" name="Text 34"/>
-          <p:cNvSpPr txBox="1"/>
-          <p:nvPr/>
-        </p:nvSpPr>
-        <p:spPr>
-          <a:xfrm>
-            <a:off x="5120640" y="2694791"/>
+          <p:cNvPr id="41" name="Text 39"/>
+          <p:cNvSpPr txBox="1"/>
+          <p:nvPr/>
+        </p:nvSpPr>
+        <p:spPr>
+          <a:xfrm>
+            <a:off x="5166360" y="2694791"/>
             <a:ext cx="749808" cy="248502"/>
           </a:xfrm>
           <a:prstGeom prst="rect">
@@ -2142,14 +2337,53 @@
       </p:sp>
       <p:sp>
         <p:nvSpPr>
-          <p:cNvPr id="37" name="Text 35"/>
+          <p:cNvPr id="42" name="Text 40"/>
           <p:cNvSpPr txBox="1"/>
           <p:nvPr/>
         </p:nvSpPr>
         <p:spPr>
           <a:xfrm>
             <a:off x="658368" y="2943292"/>
-            <a:ext cx="1938528" cy="248502"/>
+            <a:ext cx="310896" cy="248502"/>
+          </a:xfrm>
+          <a:prstGeom prst="rect">
+            <a:avLst/>
+          </a:prstGeom>
+          <a:noFill/>
+          <a:ln/>
+        </p:spPr>
+        <p:txBody>
+          <a:bodyPr wrap="square" lIns="0" tIns="0" rIns="0" bIns="0" rtlCol="0" anchor="ctr"/>
+          <a:lstStyle/>
+          <a:p>
+            <a:pPr algn="r" indent="0" marL="0">
+              <a:buNone/>
+            </a:pPr>
+            <a:r>
+              <a:rPr lang="en-US" sz="1200" dirty="0">
+                <a:solidFill>
+                  <a:srgbClr val="9AA3AD"/>
+                </a:solidFill>
+                <a:latin typeface="Inter" pitchFamily="34" charset="0"/>
+                <a:ea typeface="Inter" pitchFamily="34" charset="-122"/>
+                <a:cs typeface="Inter" pitchFamily="34" charset="-120"/>
+              </a:rPr>
+              <a:t>6</a:t>
+            </a:r>
+            <a:endParaRPr lang="en-US" sz="1200" dirty="0"/>
+          </a:p>
+        </p:txBody>
+      </p:sp>
+      <p:sp>
+        <p:nvSpPr>
+          <p:cNvPr id="43" name="Text 41"/>
+          <p:cNvSpPr txBox="1"/>
+          <p:nvPr/>
+        </p:nvSpPr>
+        <p:spPr>
+          <a:xfrm>
+            <a:off x="1014984" y="2943292"/>
+            <a:ext cx="1783080" cy="248502"/>
           </a:xfrm>
           <a:prstGeom prst="rect">
             <a:avLst/>
@@ -2181,14 +2415,14 @@
       </p:sp>
       <p:sp>
         <p:nvSpPr>
-          <p:cNvPr id="38" name="Shape 36"/>
+          <p:cNvPr id="44" name="Shape 42"/>
           <p:cNvSpPr/>
           <p:nvPr/>
         </p:nvSpPr>
         <p:spPr>
           <a:xfrm>
-            <a:off x="2670048" y="2999205"/>
-            <a:ext cx="310728" cy="136676"/>
+            <a:off x="2871216" y="2999205"/>
+            <a:ext cx="244698" cy="136676"/>
           </a:xfrm>
           <a:prstGeom prst="rect">
             <a:avLst/>
@@ -2201,13 +2435,13 @@
       </p:sp>
       <p:sp>
         <p:nvSpPr>
-          <p:cNvPr id="39" name="Text 37"/>
-          <p:cNvSpPr txBox="1"/>
-          <p:nvPr/>
-        </p:nvSpPr>
-        <p:spPr>
-          <a:xfrm>
-            <a:off x="3456432" y="2943292"/>
+          <p:cNvPr id="45" name="Text 43"/>
+          <p:cNvSpPr txBox="1"/>
+          <p:nvPr/>
+        </p:nvSpPr>
+        <p:spPr>
+          <a:xfrm>
+            <a:off x="3502152" y="2943292"/>
             <a:ext cx="914400" cy="248502"/>
           </a:xfrm>
           <a:prstGeom prst="rect">
@@ -2240,13 +2474,13 @@
       </p:sp>
       <p:sp>
         <p:nvSpPr>
-          <p:cNvPr id="40" name="Text 38"/>
-          <p:cNvSpPr txBox="1"/>
-          <p:nvPr/>
-        </p:nvSpPr>
-        <p:spPr>
-          <a:xfrm>
-            <a:off x="4370832" y="2943292"/>
+          <p:cNvPr id="46" name="Text 44"/>
+          <p:cNvSpPr txBox="1"/>
+          <p:nvPr/>
+        </p:nvSpPr>
+        <p:spPr>
+          <a:xfrm>
+            <a:off x="4416552" y="2943292"/>
             <a:ext cx="749808" cy="248502"/>
           </a:xfrm>
           <a:prstGeom prst="rect">
@@ -2279,13 +2513,13 @@
       </p:sp>
       <p:sp>
         <p:nvSpPr>
-          <p:cNvPr id="41" name="Text 39"/>
-          <p:cNvSpPr txBox="1"/>
-          <p:nvPr/>
-        </p:nvSpPr>
-        <p:spPr>
-          <a:xfrm>
-            <a:off x="5120640" y="2943292"/>
+          <p:cNvPr id="47" name="Text 45"/>
+          <p:cNvSpPr txBox="1"/>
+          <p:nvPr/>
+        </p:nvSpPr>
+        <p:spPr>
+          <a:xfrm>
+            <a:off x="5166360" y="2943292"/>
             <a:ext cx="749808" cy="248502"/>
           </a:xfrm>
           <a:prstGeom prst="rect">
@@ -2318,14 +2552,53 @@
       </p:sp>
       <p:sp>
         <p:nvSpPr>
-          <p:cNvPr id="42" name="Text 40"/>
+          <p:cNvPr id="48" name="Text 46"/>
           <p:cNvSpPr txBox="1"/>
           <p:nvPr/>
         </p:nvSpPr>
         <p:spPr>
           <a:xfrm>
             <a:off x="658368" y="3191794"/>
-            <a:ext cx="1938528" cy="248502"/>
+            <a:ext cx="310896" cy="248502"/>
+          </a:xfrm>
+          <a:prstGeom prst="rect">
+            <a:avLst/>
+          </a:prstGeom>
+          <a:noFill/>
+          <a:ln/>
+        </p:spPr>
+        <p:txBody>
+          <a:bodyPr wrap="square" lIns="0" tIns="0" rIns="0" bIns="0" rtlCol="0" anchor="ctr"/>
+          <a:lstStyle/>
+          <a:p>
+            <a:pPr algn="r" indent="0" marL="0">
+              <a:buNone/>
+            </a:pPr>
+            <a:r>
+              <a:rPr lang="en-US" sz="1200" dirty="0">
+                <a:solidFill>
+                  <a:srgbClr val="9AA3AD"/>
+                </a:solidFill>
+                <a:latin typeface="Inter" pitchFamily="34" charset="0"/>
+                <a:ea typeface="Inter" pitchFamily="34" charset="-122"/>
+                <a:cs typeface="Inter" pitchFamily="34" charset="-120"/>
+              </a:rPr>
+              <a:t>7</a:t>
+            </a:r>
+            <a:endParaRPr lang="en-US" sz="1200" dirty="0"/>
+          </a:p>
+        </p:txBody>
+      </p:sp>
+      <p:sp>
+        <p:nvSpPr>
+          <p:cNvPr id="49" name="Text 47"/>
+          <p:cNvSpPr txBox="1"/>
+          <p:nvPr/>
+        </p:nvSpPr>
+        <p:spPr>
+          <a:xfrm>
+            <a:off x="1014984" y="3191794"/>
+            <a:ext cx="1783080" cy="248502"/>
           </a:xfrm>
           <a:prstGeom prst="rect">
             <a:avLst/>
@@ -2357,14 +2630,14 @@
       </p:sp>
       <p:sp>
         <p:nvSpPr>
-          <p:cNvPr id="43" name="Shape 41"/>
+          <p:cNvPr id="50" name="Shape 48"/>
           <p:cNvSpPr/>
           <p:nvPr/>
         </p:nvSpPr>
         <p:spPr>
           <a:xfrm>
-            <a:off x="2670048" y="3247707"/>
-            <a:ext cx="278978" cy="136676"/>
+            <a:off x="2871216" y="3247707"/>
+            <a:ext cx="219695" cy="136676"/>
           </a:xfrm>
           <a:prstGeom prst="rect">
             <a:avLst/>
@@ -2377,13 +2650,13 @@
       </p:sp>
       <p:sp>
         <p:nvSpPr>
-          <p:cNvPr id="44" name="Text 42"/>
-          <p:cNvSpPr txBox="1"/>
-          <p:nvPr/>
-        </p:nvSpPr>
-        <p:spPr>
-          <a:xfrm>
-            <a:off x="3456432" y="3191794"/>
+          <p:cNvPr id="51" name="Text 49"/>
+          <p:cNvSpPr txBox="1"/>
+          <p:nvPr/>
+        </p:nvSpPr>
+        <p:spPr>
+          <a:xfrm>
+            <a:off x="3502152" y="3191794"/>
             <a:ext cx="914400" cy="248502"/>
           </a:xfrm>
           <a:prstGeom prst="rect">
@@ -2416,13 +2689,13 @@
       </p:sp>
       <p:sp>
         <p:nvSpPr>
-          <p:cNvPr id="45" name="Text 43"/>
-          <p:cNvSpPr txBox="1"/>
-          <p:nvPr/>
-        </p:nvSpPr>
-        <p:spPr>
-          <a:xfrm>
-            <a:off x="4370832" y="3191794"/>
+          <p:cNvPr id="52" name="Text 50"/>
+          <p:cNvSpPr txBox="1"/>
+          <p:nvPr/>
+        </p:nvSpPr>
+        <p:spPr>
+          <a:xfrm>
+            <a:off x="4416552" y="3191794"/>
             <a:ext cx="749808" cy="248502"/>
           </a:xfrm>
           <a:prstGeom prst="rect">
@@ -2455,13 +2728,13 @@
       </p:sp>
       <p:sp>
         <p:nvSpPr>
-          <p:cNvPr id="46" name="Text 44"/>
-          <p:cNvSpPr txBox="1"/>
-          <p:nvPr/>
-        </p:nvSpPr>
-        <p:spPr>
-          <a:xfrm>
-            <a:off x="5120640" y="3191794"/>
+          <p:cNvPr id="53" name="Text 51"/>
+          <p:cNvSpPr txBox="1"/>
+          <p:nvPr/>
+        </p:nvSpPr>
+        <p:spPr>
+          <a:xfrm>
+            <a:off x="5166360" y="3191794"/>
             <a:ext cx="749808" cy="248502"/>
           </a:xfrm>
           <a:prstGeom prst="rect">
@@ -2494,14 +2767,53 @@
       </p:sp>
       <p:sp>
         <p:nvSpPr>
-          <p:cNvPr id="47" name="Text 45"/>
+          <p:cNvPr id="54" name="Text 52"/>
           <p:cNvSpPr txBox="1"/>
           <p:nvPr/>
         </p:nvSpPr>
         <p:spPr>
           <a:xfrm>
             <a:off x="658368" y="3440296"/>
-            <a:ext cx="1938528" cy="248502"/>
+            <a:ext cx="310896" cy="248502"/>
+          </a:xfrm>
+          <a:prstGeom prst="rect">
+            <a:avLst/>
+          </a:prstGeom>
+          <a:noFill/>
+          <a:ln/>
+        </p:spPr>
+        <p:txBody>
+          <a:bodyPr wrap="square" lIns="0" tIns="0" rIns="0" bIns="0" rtlCol="0" anchor="ctr"/>
+          <a:lstStyle/>
+          <a:p>
+            <a:pPr algn="r" indent="0" marL="0">
+              <a:buNone/>
+            </a:pPr>
+            <a:r>
+              <a:rPr lang="en-US" sz="1200" dirty="0">
+                <a:solidFill>
+                  <a:srgbClr val="9AA3AD"/>
+                </a:solidFill>
+                <a:latin typeface="Inter" pitchFamily="34" charset="0"/>
+                <a:ea typeface="Inter" pitchFamily="34" charset="-122"/>
+                <a:cs typeface="Inter" pitchFamily="34" charset="-120"/>
+              </a:rPr>
+              <a:t>8</a:t>
+            </a:r>
+            <a:endParaRPr lang="en-US" sz="1200" dirty="0"/>
+          </a:p>
+        </p:txBody>
+      </p:sp>
+      <p:sp>
+        <p:nvSpPr>
+          <p:cNvPr id="55" name="Text 53"/>
+          <p:cNvSpPr txBox="1"/>
+          <p:nvPr/>
+        </p:nvSpPr>
+        <p:spPr>
+          <a:xfrm>
+            <a:off x="1014984" y="3440296"/>
+            <a:ext cx="1783080" cy="248502"/>
           </a:xfrm>
           <a:prstGeom prst="rect">
             <a:avLst/>
@@ -2533,14 +2845,14 @@
       </p:sp>
       <p:sp>
         <p:nvSpPr>
-          <p:cNvPr id="48" name="Shape 46"/>
+          <p:cNvPr id="56" name="Shape 54"/>
           <p:cNvSpPr/>
           <p:nvPr/>
         </p:nvSpPr>
         <p:spPr>
           <a:xfrm>
-            <a:off x="2670048" y="3496208"/>
-            <a:ext cx="213888" cy="136676"/>
+            <a:off x="2871216" y="3496208"/>
+            <a:ext cx="168437" cy="136676"/>
           </a:xfrm>
           <a:prstGeom prst="rect">
             <a:avLst/>
@@ -2553,13 +2865,13 @@
       </p:sp>
       <p:sp>
         <p:nvSpPr>
-          <p:cNvPr id="49" name="Text 47"/>
-          <p:cNvSpPr txBox="1"/>
-          <p:nvPr/>
-        </p:nvSpPr>
-        <p:spPr>
-          <a:xfrm>
-            <a:off x="3456432" y="3440296"/>
+          <p:cNvPr id="57" name="Text 55"/>
+          <p:cNvSpPr txBox="1"/>
+          <p:nvPr/>
+        </p:nvSpPr>
+        <p:spPr>
+          <a:xfrm>
+            <a:off x="3502152" y="3440296"/>
             <a:ext cx="914400" cy="248502"/>
           </a:xfrm>
           <a:prstGeom prst="rect">
@@ -2592,13 +2904,13 @@
       </p:sp>
       <p:sp>
         <p:nvSpPr>
-          <p:cNvPr id="50" name="Text 48"/>
-          <p:cNvSpPr txBox="1"/>
-          <p:nvPr/>
-        </p:nvSpPr>
-        <p:spPr>
-          <a:xfrm>
-            <a:off x="4370832" y="3440296"/>
+          <p:cNvPr id="58" name="Text 56"/>
+          <p:cNvSpPr txBox="1"/>
+          <p:nvPr/>
+        </p:nvSpPr>
+        <p:spPr>
+          <a:xfrm>
+            <a:off x="4416552" y="3440296"/>
             <a:ext cx="749808" cy="248502"/>
           </a:xfrm>
           <a:prstGeom prst="rect">
@@ -2631,13 +2943,13 @@
       </p:sp>
       <p:sp>
         <p:nvSpPr>
-          <p:cNvPr id="51" name="Text 49"/>
-          <p:cNvSpPr txBox="1"/>
-          <p:nvPr/>
-        </p:nvSpPr>
-        <p:spPr>
-          <a:xfrm>
-            <a:off x="5120640" y="3440296"/>
+          <p:cNvPr id="59" name="Text 57"/>
+          <p:cNvSpPr txBox="1"/>
+          <p:nvPr/>
+        </p:nvSpPr>
+        <p:spPr>
+          <a:xfrm>
+            <a:off x="5166360" y="3440296"/>
             <a:ext cx="749808" cy="248502"/>
           </a:xfrm>
           <a:prstGeom prst="rect">
@@ -2670,14 +2982,53 @@
       </p:sp>
       <p:sp>
         <p:nvSpPr>
-          <p:cNvPr id="52" name="Text 50"/>
+          <p:cNvPr id="60" name="Text 58"/>
           <p:cNvSpPr txBox="1"/>
           <p:nvPr/>
         </p:nvSpPr>
         <p:spPr>
           <a:xfrm>
             <a:off x="658368" y="3688797"/>
-            <a:ext cx="1938528" cy="248502"/>
+            <a:ext cx="310896" cy="248502"/>
+          </a:xfrm>
+          <a:prstGeom prst="rect">
+            <a:avLst/>
+          </a:prstGeom>
+          <a:noFill/>
+          <a:ln/>
+        </p:spPr>
+        <p:txBody>
+          <a:bodyPr wrap="square" lIns="0" tIns="0" rIns="0" bIns="0" rtlCol="0" anchor="ctr"/>
+          <a:lstStyle/>
+          <a:p>
+            <a:pPr algn="r" indent="0" marL="0">
+              <a:buNone/>
+            </a:pPr>
+            <a:r>
+              <a:rPr lang="en-US" sz="1200" dirty="0">
+                <a:solidFill>
+                  <a:srgbClr val="9AA3AD"/>
+                </a:solidFill>
+                <a:latin typeface="Inter" pitchFamily="34" charset="0"/>
+                <a:ea typeface="Inter" pitchFamily="34" charset="-122"/>
+                <a:cs typeface="Inter" pitchFamily="34" charset="-120"/>
+              </a:rPr>
+              <a:t>9</a:t>
+            </a:r>
+            <a:endParaRPr lang="en-US" sz="1200" dirty="0"/>
+          </a:p>
+        </p:txBody>
+      </p:sp>
+      <p:sp>
+        <p:nvSpPr>
+          <p:cNvPr id="61" name="Text 59"/>
+          <p:cNvSpPr txBox="1"/>
+          <p:nvPr/>
+        </p:nvSpPr>
+        <p:spPr>
+          <a:xfrm>
+            <a:off x="1014984" y="3688797"/>
+            <a:ext cx="1783080" cy="248502"/>
           </a:xfrm>
           <a:prstGeom prst="rect">
             <a:avLst/>
@@ -2709,14 +3060,14 @@
       </p:sp>
       <p:sp>
         <p:nvSpPr>
-          <p:cNvPr id="53" name="Shape 51"/>
+          <p:cNvPr id="62" name="Shape 60"/>
           <p:cNvSpPr/>
           <p:nvPr/>
         </p:nvSpPr>
         <p:spPr>
           <a:xfrm>
-            <a:off x="2670048" y="3744710"/>
-            <a:ext cx="199219" cy="136676"/>
+            <a:off x="2871216" y="3744710"/>
+            <a:ext cx="156885" cy="136676"/>
           </a:xfrm>
           <a:prstGeom prst="rect">
             <a:avLst/>
@@ -2729,13 +3080,13 @@
       </p:sp>
       <p:sp>
         <p:nvSpPr>
-          <p:cNvPr id="54" name="Text 52"/>
-          <p:cNvSpPr txBox="1"/>
-          <p:nvPr/>
-        </p:nvSpPr>
-        <p:spPr>
-          <a:xfrm>
-            <a:off x="3456432" y="3688797"/>
+          <p:cNvPr id="63" name="Text 61"/>
+          <p:cNvSpPr txBox="1"/>
+          <p:nvPr/>
+        </p:nvSpPr>
+        <p:spPr>
+          <a:xfrm>
+            <a:off x="3502152" y="3688797"/>
             <a:ext cx="914400" cy="248502"/>
           </a:xfrm>
           <a:prstGeom prst="rect">
@@ -2768,13 +3119,13 @@
       </p:sp>
       <p:sp>
         <p:nvSpPr>
-          <p:cNvPr id="55" name="Text 53"/>
-          <p:cNvSpPr txBox="1"/>
-          <p:nvPr/>
-        </p:nvSpPr>
-        <p:spPr>
-          <a:xfrm>
-            <a:off x="4370832" y="3688797"/>
+          <p:cNvPr id="64" name="Text 62"/>
+          <p:cNvSpPr txBox="1"/>
+          <p:nvPr/>
+        </p:nvSpPr>
+        <p:spPr>
+          <a:xfrm>
+            <a:off x="4416552" y="3688797"/>
             <a:ext cx="749808" cy="248502"/>
           </a:xfrm>
           <a:prstGeom prst="rect">
@@ -2807,13 +3158,13 @@
       </p:sp>
       <p:sp>
         <p:nvSpPr>
-          <p:cNvPr id="56" name="Text 54"/>
-          <p:cNvSpPr txBox="1"/>
-          <p:nvPr/>
-        </p:nvSpPr>
-        <p:spPr>
-          <a:xfrm>
-            <a:off x="5120640" y="3688797"/>
+          <p:cNvPr id="65" name="Text 63"/>
+          <p:cNvSpPr txBox="1"/>
+          <p:nvPr/>
+        </p:nvSpPr>
+        <p:spPr>
+          <a:xfrm>
+            <a:off x="5166360" y="3688797"/>
             <a:ext cx="749808" cy="248502"/>
           </a:xfrm>
           <a:prstGeom prst="rect">
@@ -2846,14 +3197,53 @@
       </p:sp>
       <p:sp>
         <p:nvSpPr>
-          <p:cNvPr id="57" name="Text 55"/>
+          <p:cNvPr id="66" name="Text 64"/>
           <p:cNvSpPr txBox="1"/>
           <p:nvPr/>
         </p:nvSpPr>
         <p:spPr>
           <a:xfrm>
             <a:off x="658368" y="3937299"/>
-            <a:ext cx="1938528" cy="248502"/>
+            <a:ext cx="310896" cy="248502"/>
+          </a:xfrm>
+          <a:prstGeom prst="rect">
+            <a:avLst/>
+          </a:prstGeom>
+          <a:noFill/>
+          <a:ln/>
+        </p:spPr>
+        <p:txBody>
+          <a:bodyPr wrap="square" lIns="0" tIns="0" rIns="0" bIns="0" rtlCol="0" anchor="ctr"/>
+          <a:lstStyle/>
+          <a:p>
+            <a:pPr algn="r" indent="0" marL="0">
+              <a:buNone/>
+            </a:pPr>
+            <a:r>
+              <a:rPr lang="en-US" sz="1200" dirty="0">
+                <a:solidFill>
+                  <a:srgbClr val="9AA3AD"/>
+                </a:solidFill>
+                <a:latin typeface="Inter" pitchFamily="34" charset="0"/>
+                <a:ea typeface="Inter" pitchFamily="34" charset="-122"/>
+                <a:cs typeface="Inter" pitchFamily="34" charset="-120"/>
+              </a:rPr>
+              <a:t>10</a:t>
+            </a:r>
+            <a:endParaRPr lang="en-US" sz="1200" dirty="0"/>
+          </a:p>
+        </p:txBody>
+      </p:sp>
+      <p:sp>
+        <p:nvSpPr>
+          <p:cNvPr id="67" name="Text 65"/>
+          <p:cNvSpPr txBox="1"/>
+          <p:nvPr/>
+        </p:nvSpPr>
+        <p:spPr>
+          <a:xfrm>
+            <a:off x="1014984" y="3937299"/>
+            <a:ext cx="1783080" cy="248502"/>
           </a:xfrm>
           <a:prstGeom prst="rect">
             <a:avLst/>
@@ -2885,14 +3275,14 @@
       </p:sp>
       <p:sp>
         <p:nvSpPr>
-          <p:cNvPr id="58" name="Shape 56"/>
+          <p:cNvPr id="68" name="Shape 66"/>
           <p:cNvSpPr/>
           <p:nvPr/>
         </p:nvSpPr>
         <p:spPr>
           <a:xfrm>
-            <a:off x="2670048" y="3993212"/>
-            <a:ext cx="192043" cy="136676"/>
+            <a:off x="2871216" y="3993212"/>
+            <a:ext cx="151234" cy="136676"/>
           </a:xfrm>
           <a:prstGeom prst="rect">
             <a:avLst/>
@@ -2905,13 +3295,13 @@
       </p:sp>
       <p:sp>
         <p:nvSpPr>
-          <p:cNvPr id="59" name="Text 57"/>
-          <p:cNvSpPr txBox="1"/>
-          <p:nvPr/>
-        </p:nvSpPr>
-        <p:spPr>
-          <a:xfrm>
-            <a:off x="3456432" y="3937299"/>
+          <p:cNvPr id="69" name="Text 67"/>
+          <p:cNvSpPr txBox="1"/>
+          <p:nvPr/>
+        </p:nvSpPr>
+        <p:spPr>
+          <a:xfrm>
+            <a:off x="3502152" y="3937299"/>
             <a:ext cx="914400" cy="248502"/>
           </a:xfrm>
           <a:prstGeom prst="rect">
@@ -2944,13 +3334,13 @@
       </p:sp>
       <p:sp>
         <p:nvSpPr>
-          <p:cNvPr id="60" name="Text 58"/>
-          <p:cNvSpPr txBox="1"/>
-          <p:nvPr/>
-        </p:nvSpPr>
-        <p:spPr>
-          <a:xfrm>
-            <a:off x="4370832" y="3937299"/>
+          <p:cNvPr id="70" name="Text 68"/>
+          <p:cNvSpPr txBox="1"/>
+          <p:nvPr/>
+        </p:nvSpPr>
+        <p:spPr>
+          <a:xfrm>
+            <a:off x="4416552" y="3937299"/>
             <a:ext cx="749808" cy="248502"/>
           </a:xfrm>
           <a:prstGeom prst="rect">
@@ -2983,13 +3373,13 @@
       </p:sp>
       <p:sp>
         <p:nvSpPr>
-          <p:cNvPr id="61" name="Text 59"/>
-          <p:cNvSpPr txBox="1"/>
-          <p:nvPr/>
-        </p:nvSpPr>
-        <p:spPr>
-          <a:xfrm>
-            <a:off x="5120640" y="3937299"/>
+          <p:cNvPr id="71" name="Text 69"/>
+          <p:cNvSpPr txBox="1"/>
+          <p:nvPr/>
+        </p:nvSpPr>
+        <p:spPr>
+          <a:xfrm>
+            <a:off x="5166360" y="3937299"/>
             <a:ext cx="749808" cy="248502"/>
           </a:xfrm>
           <a:prstGeom prst="rect">
@@ -3022,14 +3412,53 @@
       </p:sp>
       <p:sp>
         <p:nvSpPr>
-          <p:cNvPr id="62" name="Text 60"/>
+          <p:cNvPr id="72" name="Text 70"/>
           <p:cNvSpPr txBox="1"/>
           <p:nvPr/>
         </p:nvSpPr>
         <p:spPr>
           <a:xfrm>
             <a:off x="658368" y="4185800"/>
-            <a:ext cx="1938528" cy="248502"/>
+            <a:ext cx="310896" cy="248502"/>
+          </a:xfrm>
+          <a:prstGeom prst="rect">
+            <a:avLst/>
+          </a:prstGeom>
+          <a:noFill/>
+          <a:ln/>
+        </p:spPr>
+        <p:txBody>
+          <a:bodyPr wrap="square" lIns="0" tIns="0" rIns="0" bIns="0" rtlCol="0" anchor="ctr"/>
+          <a:lstStyle/>
+          <a:p>
+            <a:pPr algn="r" indent="0" marL="0">
+              <a:buNone/>
+            </a:pPr>
+            <a:r>
+              <a:rPr lang="en-US" sz="1200" dirty="0">
+                <a:solidFill>
+                  <a:srgbClr val="9AA3AD"/>
+                </a:solidFill>
+                <a:latin typeface="Inter" pitchFamily="34" charset="0"/>
+                <a:ea typeface="Inter" pitchFamily="34" charset="-122"/>
+                <a:cs typeface="Inter" pitchFamily="34" charset="-120"/>
+              </a:rPr>
+              <a:t>11</a:t>
+            </a:r>
+            <a:endParaRPr lang="en-US" sz="1200" dirty="0"/>
+          </a:p>
+        </p:txBody>
+      </p:sp>
+      <p:sp>
+        <p:nvSpPr>
+          <p:cNvPr id="73" name="Text 71"/>
+          <p:cNvSpPr txBox="1"/>
+          <p:nvPr/>
+        </p:nvSpPr>
+        <p:spPr>
+          <a:xfrm>
+            <a:off x="1014984" y="4185800"/>
+            <a:ext cx="1783080" cy="248502"/>
           </a:xfrm>
           <a:prstGeom prst="rect">
             <a:avLst/>
@@ -3061,14 +3490,14 @@
       </p:sp>
       <p:sp>
         <p:nvSpPr>
-          <p:cNvPr id="63" name="Shape 61"/>
+          <p:cNvPr id="74" name="Shape 72"/>
           <p:cNvSpPr/>
           <p:nvPr/>
         </p:nvSpPr>
         <p:spPr>
           <a:xfrm>
-            <a:off x="2670048" y="4241713"/>
-            <a:ext cx="164487" cy="136676"/>
+            <a:off x="2871216" y="4241713"/>
+            <a:ext cx="129534" cy="136676"/>
           </a:xfrm>
           <a:prstGeom prst="rect">
             <a:avLst/>
@@ -3081,13 +3510,13 @@
       </p:sp>
       <p:sp>
         <p:nvSpPr>
-          <p:cNvPr id="64" name="Text 62"/>
-          <p:cNvSpPr txBox="1"/>
-          <p:nvPr/>
-        </p:nvSpPr>
-        <p:spPr>
-          <a:xfrm>
-            <a:off x="3456432" y="4185800"/>
+          <p:cNvPr id="75" name="Text 73"/>
+          <p:cNvSpPr txBox="1"/>
+          <p:nvPr/>
+        </p:nvSpPr>
+        <p:spPr>
+          <a:xfrm>
+            <a:off x="3502152" y="4185800"/>
             <a:ext cx="914400" cy="248502"/>
           </a:xfrm>
           <a:prstGeom prst="rect">
@@ -3120,13 +3549,13 @@
       </p:sp>
       <p:sp>
         <p:nvSpPr>
-          <p:cNvPr id="65" name="Text 63"/>
-          <p:cNvSpPr txBox="1"/>
-          <p:nvPr/>
-        </p:nvSpPr>
-        <p:spPr>
-          <a:xfrm>
-            <a:off x="4370832" y="4185800"/>
+          <p:cNvPr id="76" name="Text 74"/>
+          <p:cNvSpPr txBox="1"/>
+          <p:nvPr/>
+        </p:nvSpPr>
+        <p:spPr>
+          <a:xfrm>
+            <a:off x="4416552" y="4185800"/>
             <a:ext cx="749808" cy="248502"/>
           </a:xfrm>
           <a:prstGeom prst="rect">
@@ -3159,13 +3588,13 @@
       </p:sp>
       <p:sp>
         <p:nvSpPr>
-          <p:cNvPr id="66" name="Text 64"/>
-          <p:cNvSpPr txBox="1"/>
-          <p:nvPr/>
-        </p:nvSpPr>
-        <p:spPr>
-          <a:xfrm>
-            <a:off x="5120640" y="4185800"/>
+          <p:cNvPr id="77" name="Text 75"/>
+          <p:cNvSpPr txBox="1"/>
+          <p:nvPr/>
+        </p:nvSpPr>
+        <p:spPr>
+          <a:xfrm>
+            <a:off x="5166360" y="4185800"/>
             <a:ext cx="749808" cy="248502"/>
           </a:xfrm>
           <a:prstGeom prst="rect">
@@ -3198,14 +3627,53 @@
       </p:sp>
       <p:sp>
         <p:nvSpPr>
-          <p:cNvPr id="67" name="Text 65"/>
+          <p:cNvPr id="78" name="Text 76"/>
           <p:cNvSpPr txBox="1"/>
           <p:nvPr/>
         </p:nvSpPr>
         <p:spPr>
           <a:xfrm>
             <a:off x="658368" y="4434302"/>
-            <a:ext cx="1938528" cy="248502"/>
+            <a:ext cx="310896" cy="248502"/>
+          </a:xfrm>
+          <a:prstGeom prst="rect">
+            <a:avLst/>
+          </a:prstGeom>
+          <a:noFill/>
+          <a:ln/>
+        </p:spPr>
+        <p:txBody>
+          <a:bodyPr wrap="square" lIns="0" tIns="0" rIns="0" bIns="0" rtlCol="0" anchor="ctr"/>
+          <a:lstStyle/>
+          <a:p>
+            <a:pPr algn="r" indent="0" marL="0">
+              <a:buNone/>
+            </a:pPr>
+            <a:r>
+              <a:rPr lang="en-US" sz="1200" dirty="0">
+                <a:solidFill>
+                  <a:srgbClr val="9AA3AD"/>
+                </a:solidFill>
+                <a:latin typeface="Inter" pitchFamily="34" charset="0"/>
+                <a:ea typeface="Inter" pitchFamily="34" charset="-122"/>
+                <a:cs typeface="Inter" pitchFamily="34" charset="-120"/>
+              </a:rPr>
+              <a:t>12</a:t>
+            </a:r>
+            <a:endParaRPr lang="en-US" sz="1200" dirty="0"/>
+          </a:p>
+        </p:txBody>
+      </p:sp>
+      <p:sp>
+        <p:nvSpPr>
+          <p:cNvPr id="79" name="Text 77"/>
+          <p:cNvSpPr txBox="1"/>
+          <p:nvPr/>
+        </p:nvSpPr>
+        <p:spPr>
+          <a:xfrm>
+            <a:off x="1014984" y="4434302"/>
+            <a:ext cx="1783080" cy="248502"/>
           </a:xfrm>
           <a:prstGeom prst="rect">
             <a:avLst/>
@@ -3237,14 +3705,14 @@
       </p:sp>
       <p:sp>
         <p:nvSpPr>
-          <p:cNvPr id="68" name="Shape 66"/>
+          <p:cNvPr id="80" name="Shape 78"/>
           <p:cNvSpPr/>
           <p:nvPr/>
         </p:nvSpPr>
         <p:spPr>
           <a:xfrm>
-            <a:off x="2670048" y="4490215"/>
-            <a:ext cx="155099" cy="136676"/>
+            <a:off x="2871216" y="4490215"/>
+            <a:ext cx="122140" cy="136676"/>
           </a:xfrm>
           <a:prstGeom prst="rect">
             <a:avLst/>
@@ -3257,13 +3725,13 @@
       </p:sp>
       <p:sp>
         <p:nvSpPr>
-          <p:cNvPr id="69" name="Text 67"/>
-          <p:cNvSpPr txBox="1"/>
-          <p:nvPr/>
-        </p:nvSpPr>
-        <p:spPr>
-          <a:xfrm>
-            <a:off x="3456432" y="4434302"/>
+          <p:cNvPr id="81" name="Text 79"/>
+          <p:cNvSpPr txBox="1"/>
+          <p:nvPr/>
+        </p:nvSpPr>
+        <p:spPr>
+          <a:xfrm>
+            <a:off x="3502152" y="4434302"/>
             <a:ext cx="914400" cy="248502"/>
           </a:xfrm>
           <a:prstGeom prst="rect">
@@ -3296,13 +3764,13 @@
       </p:sp>
       <p:sp>
         <p:nvSpPr>
-          <p:cNvPr id="70" name="Text 68"/>
-          <p:cNvSpPr txBox="1"/>
-          <p:nvPr/>
-        </p:nvSpPr>
-        <p:spPr>
-          <a:xfrm>
-            <a:off x="4370832" y="4434302"/>
+          <p:cNvPr id="82" name="Text 80"/>
+          <p:cNvSpPr txBox="1"/>
+          <p:nvPr/>
+        </p:nvSpPr>
+        <p:spPr>
+          <a:xfrm>
+            <a:off x="4416552" y="4434302"/>
             <a:ext cx="749808" cy="248502"/>
           </a:xfrm>
           <a:prstGeom prst="rect">
@@ -3335,13 +3803,13 @@
       </p:sp>
       <p:sp>
         <p:nvSpPr>
-          <p:cNvPr id="71" name="Text 69"/>
-          <p:cNvSpPr txBox="1"/>
-          <p:nvPr/>
-        </p:nvSpPr>
-        <p:spPr>
-          <a:xfrm>
-            <a:off x="5120640" y="4434302"/>
+          <p:cNvPr id="83" name="Text 81"/>
+          <p:cNvSpPr txBox="1"/>
+          <p:nvPr/>
+        </p:nvSpPr>
+        <p:spPr>
+          <a:xfrm>
+            <a:off x="5166360" y="4434302"/>
             <a:ext cx="749808" cy="248502"/>
           </a:xfrm>
           <a:prstGeom prst="rect">
@@ -3374,14 +3842,53 @@
       </p:sp>
       <p:sp>
         <p:nvSpPr>
-          <p:cNvPr id="72" name="Text 70"/>
+          <p:cNvPr id="84" name="Text 82"/>
           <p:cNvSpPr txBox="1"/>
           <p:nvPr/>
         </p:nvSpPr>
         <p:spPr>
           <a:xfrm>
             <a:off x="658368" y="4682804"/>
-            <a:ext cx="1938528" cy="248502"/>
+            <a:ext cx="310896" cy="248502"/>
+          </a:xfrm>
+          <a:prstGeom prst="rect">
+            <a:avLst/>
+          </a:prstGeom>
+          <a:noFill/>
+          <a:ln/>
+        </p:spPr>
+        <p:txBody>
+          <a:bodyPr wrap="square" lIns="0" tIns="0" rIns="0" bIns="0" rtlCol="0" anchor="ctr"/>
+          <a:lstStyle/>
+          <a:p>
+            <a:pPr algn="r" indent="0" marL="0">
+              <a:buNone/>
+            </a:pPr>
+            <a:r>
+              <a:rPr lang="en-US" sz="1200" dirty="0">
+                <a:solidFill>
+                  <a:srgbClr val="9AA3AD"/>
+                </a:solidFill>
+                <a:latin typeface="Inter" pitchFamily="34" charset="0"/>
+                <a:ea typeface="Inter" pitchFamily="34" charset="-122"/>
+                <a:cs typeface="Inter" pitchFamily="34" charset="-120"/>
+              </a:rPr>
+              <a:t>13</a:t>
+            </a:r>
+            <a:endParaRPr lang="en-US" sz="1200" dirty="0"/>
+          </a:p>
+        </p:txBody>
+      </p:sp>
+      <p:sp>
+        <p:nvSpPr>
+          <p:cNvPr id="85" name="Text 83"/>
+          <p:cNvSpPr txBox="1"/>
+          <p:nvPr/>
+        </p:nvSpPr>
+        <p:spPr>
+          <a:xfrm>
+            <a:off x="1014984" y="4682804"/>
+            <a:ext cx="1783080" cy="248502"/>
           </a:xfrm>
           <a:prstGeom prst="rect">
             <a:avLst/>
@@ -3413,14 +3920,14 @@
       </p:sp>
       <p:sp>
         <p:nvSpPr>
-          <p:cNvPr id="73" name="Shape 71"/>
+          <p:cNvPr id="86" name="Shape 84"/>
           <p:cNvSpPr/>
           <p:nvPr/>
         </p:nvSpPr>
         <p:spPr>
           <a:xfrm>
-            <a:off x="2670048" y="4738717"/>
-            <a:ext cx="154861" cy="136676"/>
+            <a:off x="2871216" y="4738717"/>
+            <a:ext cx="121953" cy="136676"/>
           </a:xfrm>
           <a:prstGeom prst="rect">
             <a:avLst/>
@@ -3433,13 +3940,13 @@
       </p:sp>
       <p:sp>
         <p:nvSpPr>
-          <p:cNvPr id="74" name="Text 72"/>
-          <p:cNvSpPr txBox="1"/>
-          <p:nvPr/>
-        </p:nvSpPr>
-        <p:spPr>
-          <a:xfrm>
-            <a:off x="3456432" y="4682804"/>
+          <p:cNvPr id="87" name="Text 85"/>
+          <p:cNvSpPr txBox="1"/>
+          <p:nvPr/>
+        </p:nvSpPr>
+        <p:spPr>
+          <a:xfrm>
+            <a:off x="3502152" y="4682804"/>
             <a:ext cx="914400" cy="248502"/>
           </a:xfrm>
           <a:prstGeom prst="rect">
@@ -3472,13 +3979,13 @@
       </p:sp>
       <p:sp>
         <p:nvSpPr>
-          <p:cNvPr id="75" name="Text 73"/>
-          <p:cNvSpPr txBox="1"/>
-          <p:nvPr/>
-        </p:nvSpPr>
-        <p:spPr>
-          <a:xfrm>
-            <a:off x="4370832" y="4682804"/>
+          <p:cNvPr id="88" name="Text 86"/>
+          <p:cNvSpPr txBox="1"/>
+          <p:nvPr/>
+        </p:nvSpPr>
+        <p:spPr>
+          <a:xfrm>
+            <a:off x="4416552" y="4682804"/>
             <a:ext cx="749808" cy="248502"/>
           </a:xfrm>
           <a:prstGeom prst="rect">
@@ -3511,13 +4018,13 @@
       </p:sp>
       <p:sp>
         <p:nvSpPr>
-          <p:cNvPr id="76" name="Text 74"/>
-          <p:cNvSpPr txBox="1"/>
-          <p:nvPr/>
-        </p:nvSpPr>
-        <p:spPr>
-          <a:xfrm>
-            <a:off x="5120640" y="4682804"/>
+          <p:cNvPr id="89" name="Text 87"/>
+          <p:cNvSpPr txBox="1"/>
+          <p:nvPr/>
+        </p:nvSpPr>
+        <p:spPr>
+          <a:xfrm>
+            <a:off x="5166360" y="4682804"/>
             <a:ext cx="749808" cy="248502"/>
           </a:xfrm>
           <a:prstGeom prst="rect">
@@ -3550,14 +4057,53 @@
       </p:sp>
       <p:sp>
         <p:nvSpPr>
-          <p:cNvPr id="77" name="Text 75"/>
+          <p:cNvPr id="90" name="Text 88"/>
           <p:cNvSpPr txBox="1"/>
           <p:nvPr/>
         </p:nvSpPr>
         <p:spPr>
           <a:xfrm>
             <a:off x="658368" y="4931305"/>
-            <a:ext cx="1938528" cy="248502"/>
+            <a:ext cx="310896" cy="248502"/>
+          </a:xfrm>
+          <a:prstGeom prst="rect">
+            <a:avLst/>
+          </a:prstGeom>
+          <a:noFill/>
+          <a:ln/>
+        </p:spPr>
+        <p:txBody>
+          <a:bodyPr wrap="square" lIns="0" tIns="0" rIns="0" bIns="0" rtlCol="0" anchor="ctr"/>
+          <a:lstStyle/>
+          <a:p>
+            <a:pPr algn="r" indent="0" marL="0">
+              <a:buNone/>
+            </a:pPr>
+            <a:r>
+              <a:rPr lang="en-US" sz="1200" dirty="0">
+                <a:solidFill>
+                  <a:srgbClr val="9AA3AD"/>
+                </a:solidFill>
+                <a:latin typeface="Inter" pitchFamily="34" charset="0"/>
+                <a:ea typeface="Inter" pitchFamily="34" charset="-122"/>
+                <a:cs typeface="Inter" pitchFamily="34" charset="-120"/>
+              </a:rPr>
+              <a:t>14</a:t>
+            </a:r>
+            <a:endParaRPr lang="en-US" sz="1200" dirty="0"/>
+          </a:p>
+        </p:txBody>
+      </p:sp>
+      <p:sp>
+        <p:nvSpPr>
+          <p:cNvPr id="91" name="Text 89"/>
+          <p:cNvSpPr txBox="1"/>
+          <p:nvPr/>
+        </p:nvSpPr>
+        <p:spPr>
+          <a:xfrm>
+            <a:off x="1014984" y="4931305"/>
+            <a:ext cx="1783080" cy="248502"/>
           </a:xfrm>
           <a:prstGeom prst="rect">
             <a:avLst/>
@@ -3589,14 +4135,14 @@
       </p:sp>
       <p:sp>
         <p:nvSpPr>
-          <p:cNvPr id="78" name="Shape 76"/>
+          <p:cNvPr id="92" name="Shape 90"/>
           <p:cNvSpPr/>
           <p:nvPr/>
         </p:nvSpPr>
         <p:spPr>
           <a:xfrm>
-            <a:off x="2670048" y="4987218"/>
-            <a:ext cx="146688" cy="136676"/>
+            <a:off x="2871216" y="4987218"/>
+            <a:ext cx="115516" cy="136676"/>
           </a:xfrm>
           <a:prstGeom prst="rect">
             <a:avLst/>
@@ -3609,13 +4155,13 @@
       </p:sp>
       <p:sp>
         <p:nvSpPr>
-          <p:cNvPr id="79" name="Text 77"/>
-          <p:cNvSpPr txBox="1"/>
-          <p:nvPr/>
-        </p:nvSpPr>
-        <p:spPr>
-          <a:xfrm>
-            <a:off x="3456432" y="4931305"/>
+          <p:cNvPr id="93" name="Text 91"/>
+          <p:cNvSpPr txBox="1"/>
+          <p:nvPr/>
+        </p:nvSpPr>
+        <p:spPr>
+          <a:xfrm>
+            <a:off x="3502152" y="4931305"/>
             <a:ext cx="914400" cy="248502"/>
           </a:xfrm>
           <a:prstGeom prst="rect">
@@ -3648,13 +4194,13 @@
       </p:sp>
       <p:sp>
         <p:nvSpPr>
-          <p:cNvPr id="80" name="Text 78"/>
-          <p:cNvSpPr txBox="1"/>
-          <p:nvPr/>
-        </p:nvSpPr>
-        <p:spPr>
-          <a:xfrm>
-            <a:off x="4370832" y="4931305"/>
+          <p:cNvPr id="94" name="Text 92"/>
+          <p:cNvSpPr txBox="1"/>
+          <p:nvPr/>
+        </p:nvSpPr>
+        <p:spPr>
+          <a:xfrm>
+            <a:off x="4416552" y="4931305"/>
             <a:ext cx="749808" cy="248502"/>
           </a:xfrm>
           <a:prstGeom prst="rect">
@@ -3687,13 +4233,13 @@
       </p:sp>
       <p:sp>
         <p:nvSpPr>
-          <p:cNvPr id="81" name="Text 79"/>
-          <p:cNvSpPr txBox="1"/>
-          <p:nvPr/>
-        </p:nvSpPr>
-        <p:spPr>
-          <a:xfrm>
-            <a:off x="5120640" y="4931305"/>
+          <p:cNvPr id="95" name="Text 93"/>
+          <p:cNvSpPr txBox="1"/>
+          <p:nvPr/>
+        </p:nvSpPr>
+        <p:spPr>
+          <a:xfrm>
+            <a:off x="5166360" y="4931305"/>
             <a:ext cx="749808" cy="248502"/>
           </a:xfrm>
           <a:prstGeom prst="rect">
@@ -3726,14 +4272,53 @@
       </p:sp>
       <p:sp>
         <p:nvSpPr>
-          <p:cNvPr id="82" name="Text 80"/>
+          <p:cNvPr id="96" name="Text 94"/>
           <p:cNvSpPr txBox="1"/>
           <p:nvPr/>
         </p:nvSpPr>
         <p:spPr>
           <a:xfrm>
             <a:off x="658368" y="5179807"/>
-            <a:ext cx="1938528" cy="248502"/>
+            <a:ext cx="310896" cy="248502"/>
+          </a:xfrm>
+          <a:prstGeom prst="rect">
+            <a:avLst/>
+          </a:prstGeom>
+          <a:noFill/>
+          <a:ln/>
+        </p:spPr>
+        <p:txBody>
+          <a:bodyPr wrap="square" lIns="0" tIns="0" rIns="0" bIns="0" rtlCol="0" anchor="ctr"/>
+          <a:lstStyle/>
+          <a:p>
+            <a:pPr algn="r" indent="0" marL="0">
+              <a:buNone/>
+            </a:pPr>
+            <a:r>
+              <a:rPr lang="en-US" sz="1200" dirty="0">
+                <a:solidFill>
+                  <a:srgbClr val="9AA3AD"/>
+                </a:solidFill>
+                <a:latin typeface="Inter" pitchFamily="34" charset="0"/>
+                <a:ea typeface="Inter" pitchFamily="34" charset="-122"/>
+                <a:cs typeface="Inter" pitchFamily="34" charset="-120"/>
+              </a:rPr>
+              <a:t>15</a:t>
+            </a:r>
+            <a:endParaRPr lang="en-US" sz="1200" dirty="0"/>
+          </a:p>
+        </p:txBody>
+      </p:sp>
+      <p:sp>
+        <p:nvSpPr>
+          <p:cNvPr id="97" name="Text 95"/>
+          <p:cNvSpPr txBox="1"/>
+          <p:nvPr/>
+        </p:nvSpPr>
+        <p:spPr>
+          <a:xfrm>
+            <a:off x="1014984" y="5179807"/>
+            <a:ext cx="1783080" cy="248502"/>
           </a:xfrm>
           <a:prstGeom prst="rect">
             <a:avLst/>
@@ -3765,14 +4350,14 @@
       </p:sp>
       <p:sp>
         <p:nvSpPr>
-          <p:cNvPr id="83" name="Shape 81"/>
+          <p:cNvPr id="98" name="Shape 96"/>
           <p:cNvSpPr/>
           <p:nvPr/>
         </p:nvSpPr>
         <p:spPr>
           <a:xfrm>
-            <a:off x="2670048" y="5235720"/>
-            <a:ext cx="144683" cy="136676"/>
+            <a:off x="2871216" y="5235720"/>
+            <a:ext cx="113938" cy="136676"/>
           </a:xfrm>
           <a:prstGeom prst="rect">
             <a:avLst/>
@@ -3785,13 +4370,13 @@
       </p:sp>
       <p:sp>
         <p:nvSpPr>
-          <p:cNvPr id="84" name="Text 82"/>
-          <p:cNvSpPr txBox="1"/>
-          <p:nvPr/>
-        </p:nvSpPr>
-        <p:spPr>
-          <a:xfrm>
-            <a:off x="3456432" y="5179807"/>
+          <p:cNvPr id="99" name="Text 97"/>
+          <p:cNvSpPr txBox="1"/>
+          <p:nvPr/>
+        </p:nvSpPr>
+        <p:spPr>
+          <a:xfrm>
+            <a:off x="3502152" y="5179807"/>
             <a:ext cx="914400" cy="248502"/>
           </a:xfrm>
           <a:prstGeom prst="rect">
@@ -3824,13 +4409,13 @@
       </p:sp>
       <p:sp>
         <p:nvSpPr>
-          <p:cNvPr id="85" name="Text 83"/>
-          <p:cNvSpPr txBox="1"/>
-          <p:nvPr/>
-        </p:nvSpPr>
-        <p:spPr>
-          <a:xfrm>
-            <a:off x="4370832" y="5179807"/>
+          <p:cNvPr id="100" name="Text 98"/>
+          <p:cNvSpPr txBox="1"/>
+          <p:nvPr/>
+        </p:nvSpPr>
+        <p:spPr>
+          <a:xfrm>
+            <a:off x="4416552" y="5179807"/>
             <a:ext cx="749808" cy="248502"/>
           </a:xfrm>
           <a:prstGeom prst="rect">
@@ -3863,13 +4448,13 @@
       </p:sp>
       <p:sp>
         <p:nvSpPr>
-          <p:cNvPr id="86" name="Text 84"/>
-          <p:cNvSpPr txBox="1"/>
-          <p:nvPr/>
-        </p:nvSpPr>
-        <p:spPr>
-          <a:xfrm>
-            <a:off x="5120640" y="5179807"/>
+          <p:cNvPr id="101" name="Text 99"/>
+          <p:cNvSpPr txBox="1"/>
+          <p:nvPr/>
+        </p:nvSpPr>
+        <p:spPr>
+          <a:xfrm>
+            <a:off x="5166360" y="5179807"/>
             <a:ext cx="749808" cy="248502"/>
           </a:xfrm>
           <a:prstGeom prst="rect">
@@ -3902,14 +4487,53 @@
       </p:sp>
       <p:sp>
         <p:nvSpPr>
-          <p:cNvPr id="87" name="Text 85"/>
+          <p:cNvPr id="102" name="Text 100"/>
           <p:cNvSpPr txBox="1"/>
           <p:nvPr/>
         </p:nvSpPr>
         <p:spPr>
           <a:xfrm>
             <a:off x="658368" y="5428309"/>
-            <a:ext cx="1938528" cy="248502"/>
+            <a:ext cx="310896" cy="248502"/>
+          </a:xfrm>
+          <a:prstGeom prst="rect">
+            <a:avLst/>
+          </a:prstGeom>
+          <a:noFill/>
+          <a:ln/>
+        </p:spPr>
+        <p:txBody>
+          <a:bodyPr wrap="square" lIns="0" tIns="0" rIns="0" bIns="0" rtlCol="0" anchor="ctr"/>
+          <a:lstStyle/>
+          <a:p>
+            <a:pPr algn="r" indent="0" marL="0">
+              <a:buNone/>
+            </a:pPr>
+            <a:r>
+              <a:rPr lang="en-US" sz="1200" dirty="0">
+                <a:solidFill>
+                  <a:srgbClr val="9AA3AD"/>
+                </a:solidFill>
+                <a:latin typeface="Inter" pitchFamily="34" charset="0"/>
+                <a:ea typeface="Inter" pitchFamily="34" charset="-122"/>
+                <a:cs typeface="Inter" pitchFamily="34" charset="-120"/>
+              </a:rPr>
+              <a:t>16</a:t>
+            </a:r>
+            <a:endParaRPr lang="en-US" sz="1200" dirty="0"/>
+          </a:p>
+        </p:txBody>
+      </p:sp>
+      <p:sp>
+        <p:nvSpPr>
+          <p:cNvPr id="103" name="Text 101"/>
+          <p:cNvSpPr txBox="1"/>
+          <p:nvPr/>
+        </p:nvSpPr>
+        <p:spPr>
+          <a:xfrm>
+            <a:off x="1014984" y="5428309"/>
+            <a:ext cx="1783080" cy="248502"/>
           </a:xfrm>
           <a:prstGeom prst="rect">
             <a:avLst/>
@@ -3941,14 +4565,14 @@
       </p:sp>
       <p:sp>
         <p:nvSpPr>
-          <p:cNvPr id="88" name="Shape 86"/>
+          <p:cNvPr id="104" name="Shape 102"/>
           <p:cNvSpPr/>
           <p:nvPr/>
         </p:nvSpPr>
         <p:spPr>
           <a:xfrm>
-            <a:off x="2670048" y="5484222"/>
-            <a:ext cx="144399" cy="136676"/>
+            <a:off x="2871216" y="5484222"/>
+            <a:ext cx="113714" cy="136676"/>
           </a:xfrm>
           <a:prstGeom prst="rect">
             <a:avLst/>
@@ -3961,13 +4585,13 @@
       </p:sp>
       <p:sp>
         <p:nvSpPr>
-          <p:cNvPr id="89" name="Text 87"/>
-          <p:cNvSpPr txBox="1"/>
-          <p:nvPr/>
-        </p:nvSpPr>
-        <p:spPr>
-          <a:xfrm>
-            <a:off x="3456432" y="5428309"/>
+          <p:cNvPr id="105" name="Text 103"/>
+          <p:cNvSpPr txBox="1"/>
+          <p:nvPr/>
+        </p:nvSpPr>
+        <p:spPr>
+          <a:xfrm>
+            <a:off x="3502152" y="5428309"/>
             <a:ext cx="914400" cy="248502"/>
           </a:xfrm>
           <a:prstGeom prst="rect">
@@ -4000,13 +4624,13 @@
       </p:sp>
       <p:sp>
         <p:nvSpPr>
-          <p:cNvPr id="90" name="Text 88"/>
-          <p:cNvSpPr txBox="1"/>
-          <p:nvPr/>
-        </p:nvSpPr>
-        <p:spPr>
-          <a:xfrm>
-            <a:off x="4370832" y="5428309"/>
+          <p:cNvPr id="106" name="Text 104"/>
+          <p:cNvSpPr txBox="1"/>
+          <p:nvPr/>
+        </p:nvSpPr>
+        <p:spPr>
+          <a:xfrm>
+            <a:off x="4416552" y="5428309"/>
             <a:ext cx="749808" cy="248502"/>
           </a:xfrm>
           <a:prstGeom prst="rect">
@@ -4039,13 +4663,13 @@
       </p:sp>
       <p:sp>
         <p:nvSpPr>
-          <p:cNvPr id="91" name="Text 89"/>
-          <p:cNvSpPr txBox="1"/>
-          <p:nvPr/>
-        </p:nvSpPr>
-        <p:spPr>
-          <a:xfrm>
-            <a:off x="5120640" y="5428309"/>
+          <p:cNvPr id="107" name="Text 105"/>
+          <p:cNvSpPr txBox="1"/>
+          <p:nvPr/>
+        </p:nvSpPr>
+        <p:spPr>
+          <a:xfrm>
+            <a:off x="5166360" y="5428309"/>
             <a:ext cx="749808" cy="248502"/>
           </a:xfrm>
           <a:prstGeom prst="rect">
@@ -4078,14 +4702,53 @@
       </p:sp>
       <p:sp>
         <p:nvSpPr>
-          <p:cNvPr id="92" name="Text 90"/>
+          <p:cNvPr id="108" name="Text 106"/>
           <p:cNvSpPr txBox="1"/>
           <p:nvPr/>
         </p:nvSpPr>
         <p:spPr>
           <a:xfrm>
             <a:off x="658368" y="5676810"/>
-            <a:ext cx="1938528" cy="248502"/>
+            <a:ext cx="310896" cy="248502"/>
+          </a:xfrm>
+          <a:prstGeom prst="rect">
+            <a:avLst/>
+          </a:prstGeom>
+          <a:noFill/>
+          <a:ln/>
+        </p:spPr>
+        <p:txBody>
+          <a:bodyPr wrap="square" lIns="0" tIns="0" rIns="0" bIns="0" rtlCol="0" anchor="ctr"/>
+          <a:lstStyle/>
+          <a:p>
+            <a:pPr algn="r" indent="0" marL="0">
+              <a:buNone/>
+            </a:pPr>
+            <a:r>
+              <a:rPr lang="en-US" sz="1200" dirty="0">
+                <a:solidFill>
+                  <a:srgbClr val="9AA3AD"/>
+                </a:solidFill>
+                <a:latin typeface="Inter" pitchFamily="34" charset="0"/>
+                <a:ea typeface="Inter" pitchFamily="34" charset="-122"/>
+                <a:cs typeface="Inter" pitchFamily="34" charset="-120"/>
+              </a:rPr>
+              <a:t>17</a:t>
+            </a:r>
+            <a:endParaRPr lang="en-US" sz="1200" dirty="0"/>
+          </a:p>
+        </p:txBody>
+      </p:sp>
+      <p:sp>
+        <p:nvSpPr>
+          <p:cNvPr id="109" name="Text 107"/>
+          <p:cNvSpPr txBox="1"/>
+          <p:nvPr/>
+        </p:nvSpPr>
+        <p:spPr>
+          <a:xfrm>
+            <a:off x="1014984" y="5676810"/>
+            <a:ext cx="1783080" cy="248502"/>
           </a:xfrm>
           <a:prstGeom prst="rect">
             <a:avLst/>
@@ -4117,14 +4780,14 @@
       </p:sp>
       <p:sp>
         <p:nvSpPr>
-          <p:cNvPr id="93" name="Shape 91"/>
+          <p:cNvPr id="110" name="Shape 108"/>
           <p:cNvSpPr/>
           <p:nvPr/>
         </p:nvSpPr>
         <p:spPr>
           <a:xfrm>
-            <a:off x="2670048" y="5732723"/>
-            <a:ext cx="135434" cy="136676"/>
+            <a:off x="2871216" y="5732723"/>
+            <a:ext cx="106654" cy="136676"/>
           </a:xfrm>
           <a:prstGeom prst="rect">
             <a:avLst/>
@@ -4137,13 +4800,13 @@
       </p:sp>
       <p:sp>
         <p:nvSpPr>
-          <p:cNvPr id="94" name="Text 92"/>
-          <p:cNvSpPr txBox="1"/>
-          <p:nvPr/>
-        </p:nvSpPr>
-        <p:spPr>
-          <a:xfrm>
-            <a:off x="3456432" y="5676810"/>
+          <p:cNvPr id="111" name="Text 109"/>
+          <p:cNvSpPr txBox="1"/>
+          <p:nvPr/>
+        </p:nvSpPr>
+        <p:spPr>
+          <a:xfrm>
+            <a:off x="3502152" y="5676810"/>
             <a:ext cx="914400" cy="248502"/>
           </a:xfrm>
           <a:prstGeom prst="rect">
@@ -4176,13 +4839,13 @@
       </p:sp>
       <p:sp>
         <p:nvSpPr>
-          <p:cNvPr id="95" name="Text 93"/>
-          <p:cNvSpPr txBox="1"/>
-          <p:nvPr/>
-        </p:nvSpPr>
-        <p:spPr>
-          <a:xfrm>
-            <a:off x="4370832" y="5676810"/>
+          <p:cNvPr id="112" name="Text 110"/>
+          <p:cNvSpPr txBox="1"/>
+          <p:nvPr/>
+        </p:nvSpPr>
+        <p:spPr>
+          <a:xfrm>
+            <a:off x="4416552" y="5676810"/>
             <a:ext cx="749808" cy="248502"/>
           </a:xfrm>
           <a:prstGeom prst="rect">
@@ -4215,13 +4878,13 @@
       </p:sp>
       <p:sp>
         <p:nvSpPr>
-          <p:cNvPr id="96" name="Text 94"/>
-          <p:cNvSpPr txBox="1"/>
-          <p:nvPr/>
-        </p:nvSpPr>
-        <p:spPr>
-          <a:xfrm>
-            <a:off x="5120640" y="5676810"/>
+          <p:cNvPr id="113" name="Text 111"/>
+          <p:cNvSpPr txBox="1"/>
+          <p:nvPr/>
+        </p:nvSpPr>
+        <p:spPr>
+          <a:xfrm>
+            <a:off x="5166360" y="5676810"/>
             <a:ext cx="749808" cy="248502"/>
           </a:xfrm>
           <a:prstGeom prst="rect">
@@ -4254,14 +4917,53 @@
       </p:sp>
       <p:sp>
         <p:nvSpPr>
-          <p:cNvPr id="97" name="Text 95"/>
+          <p:cNvPr id="114" name="Text 112"/>
           <p:cNvSpPr txBox="1"/>
           <p:nvPr/>
         </p:nvSpPr>
         <p:spPr>
           <a:xfrm>
             <a:off x="6208776" y="1700784"/>
-            <a:ext cx="1938528" cy="248502"/>
+            <a:ext cx="310896" cy="248502"/>
+          </a:xfrm>
+          <a:prstGeom prst="rect">
+            <a:avLst/>
+          </a:prstGeom>
+          <a:noFill/>
+          <a:ln/>
+        </p:spPr>
+        <p:txBody>
+          <a:bodyPr wrap="square" lIns="0" tIns="0" rIns="0" bIns="0" rtlCol="0" anchor="ctr"/>
+          <a:lstStyle/>
+          <a:p>
+            <a:pPr algn="r" indent="0" marL="0">
+              <a:buNone/>
+            </a:pPr>
+            <a:r>
+              <a:rPr lang="en-US" sz="1200" dirty="0">
+                <a:solidFill>
+                  <a:srgbClr val="9AA3AD"/>
+                </a:solidFill>
+                <a:latin typeface="Inter" pitchFamily="34" charset="0"/>
+                <a:ea typeface="Inter" pitchFamily="34" charset="-122"/>
+                <a:cs typeface="Inter" pitchFamily="34" charset="-120"/>
+              </a:rPr>
+              <a:t>18</a:t>
+            </a:r>
+            <a:endParaRPr lang="en-US" sz="1200" dirty="0"/>
+          </a:p>
+        </p:txBody>
+      </p:sp>
+      <p:sp>
+        <p:nvSpPr>
+          <p:cNvPr id="115" name="Text 113"/>
+          <p:cNvSpPr txBox="1"/>
+          <p:nvPr/>
+        </p:nvSpPr>
+        <p:spPr>
+          <a:xfrm>
+            <a:off x="6565392" y="1700784"/>
+            <a:ext cx="1783080" cy="248502"/>
           </a:xfrm>
           <a:prstGeom prst="rect">
             <a:avLst/>
@@ -4293,14 +4995,14 @@
       </p:sp>
       <p:sp>
         <p:nvSpPr>
-          <p:cNvPr id="98" name="Shape 96"/>
+          <p:cNvPr id="116" name="Shape 114"/>
           <p:cNvSpPr/>
           <p:nvPr/>
         </p:nvSpPr>
         <p:spPr>
           <a:xfrm>
-            <a:off x="8220456" y="1756697"/>
-            <a:ext cx="134212" cy="136676"/>
+            <a:off x="8421624" y="1756697"/>
+            <a:ext cx="105692" cy="136676"/>
           </a:xfrm>
           <a:prstGeom prst="rect">
             <a:avLst/>
@@ -4313,13 +5015,13 @@
       </p:sp>
       <p:sp>
         <p:nvSpPr>
-          <p:cNvPr id="99" name="Text 97"/>
-          <p:cNvSpPr txBox="1"/>
-          <p:nvPr/>
-        </p:nvSpPr>
-        <p:spPr>
-          <a:xfrm>
-            <a:off x="9006840" y="1700784"/>
+          <p:cNvPr id="117" name="Text 115"/>
+          <p:cNvSpPr txBox="1"/>
+          <p:nvPr/>
+        </p:nvSpPr>
+        <p:spPr>
+          <a:xfrm>
+            <a:off x="9052560" y="1700784"/>
             <a:ext cx="914400" cy="248502"/>
           </a:xfrm>
           <a:prstGeom prst="rect">
@@ -4352,13 +5054,13 @@
       </p:sp>
       <p:sp>
         <p:nvSpPr>
-          <p:cNvPr id="100" name="Text 98"/>
-          <p:cNvSpPr txBox="1"/>
-          <p:nvPr/>
-        </p:nvSpPr>
-        <p:spPr>
-          <a:xfrm>
-            <a:off x="9921240" y="1700784"/>
+          <p:cNvPr id="118" name="Text 116"/>
+          <p:cNvSpPr txBox="1"/>
+          <p:nvPr/>
+        </p:nvSpPr>
+        <p:spPr>
+          <a:xfrm>
+            <a:off x="9966960" y="1700784"/>
             <a:ext cx="749808" cy="248502"/>
           </a:xfrm>
           <a:prstGeom prst="rect">
@@ -4391,13 +5093,13 @@
       </p:sp>
       <p:sp>
         <p:nvSpPr>
-          <p:cNvPr id="101" name="Text 99"/>
-          <p:cNvSpPr txBox="1"/>
-          <p:nvPr/>
-        </p:nvSpPr>
-        <p:spPr>
-          <a:xfrm>
-            <a:off x="10671048" y="1700784"/>
+          <p:cNvPr id="119" name="Text 117"/>
+          <p:cNvSpPr txBox="1"/>
+          <p:nvPr/>
+        </p:nvSpPr>
+        <p:spPr>
+          <a:xfrm>
+            <a:off x="10716768" y="1700784"/>
             <a:ext cx="749808" cy="248502"/>
           </a:xfrm>
           <a:prstGeom prst="rect">
@@ -4430,14 +5132,53 @@
       </p:sp>
       <p:sp>
         <p:nvSpPr>
-          <p:cNvPr id="102" name="Text 100"/>
+          <p:cNvPr id="120" name="Text 118"/>
           <p:cNvSpPr txBox="1"/>
           <p:nvPr/>
         </p:nvSpPr>
         <p:spPr>
           <a:xfrm>
             <a:off x="6208776" y="1949286"/>
-            <a:ext cx="1938528" cy="248502"/>
+            <a:ext cx="310896" cy="248502"/>
+          </a:xfrm>
+          <a:prstGeom prst="rect">
+            <a:avLst/>
+          </a:prstGeom>
+          <a:noFill/>
+          <a:ln/>
+        </p:spPr>
+        <p:txBody>
+          <a:bodyPr wrap="square" lIns="0" tIns="0" rIns="0" bIns="0" rtlCol="0" anchor="ctr"/>
+          <a:lstStyle/>
+          <a:p>
+            <a:pPr algn="r" indent="0" marL="0">
+              <a:buNone/>
+            </a:pPr>
+            <a:r>
+              <a:rPr lang="en-US" sz="1200" dirty="0">
+                <a:solidFill>
+                  <a:srgbClr val="9AA3AD"/>
+                </a:solidFill>
+                <a:latin typeface="Inter" pitchFamily="34" charset="0"/>
+                <a:ea typeface="Inter" pitchFamily="34" charset="-122"/>
+                <a:cs typeface="Inter" pitchFamily="34" charset="-120"/>
+              </a:rPr>
+              <a:t>19</a:t>
+            </a:r>
+            <a:endParaRPr lang="en-US" sz="1200" dirty="0"/>
+          </a:p>
+        </p:txBody>
+      </p:sp>
+      <p:sp>
+        <p:nvSpPr>
+          <p:cNvPr id="121" name="Text 119"/>
+          <p:cNvSpPr txBox="1"/>
+          <p:nvPr/>
+        </p:nvSpPr>
+        <p:spPr>
+          <a:xfrm>
+            <a:off x="6565392" y="1949286"/>
+            <a:ext cx="1783080" cy="248502"/>
           </a:xfrm>
           <a:prstGeom prst="rect">
             <a:avLst/>
@@ -4469,14 +5210,14 @@
       </p:sp>
       <p:sp>
         <p:nvSpPr>
-          <p:cNvPr id="103" name="Shape 101"/>
+          <p:cNvPr id="122" name="Shape 120"/>
           <p:cNvSpPr/>
           <p:nvPr/>
         </p:nvSpPr>
         <p:spPr>
           <a:xfrm>
-            <a:off x="8220456" y="2005199"/>
-            <a:ext cx="126718" cy="136676"/>
+            <a:off x="8421624" y="2005199"/>
+            <a:ext cx="99790" cy="136676"/>
           </a:xfrm>
           <a:prstGeom prst="rect">
             <a:avLst/>
@@ -4489,13 +5230,13 @@
       </p:sp>
       <p:sp>
         <p:nvSpPr>
-          <p:cNvPr id="104" name="Text 102"/>
-          <p:cNvSpPr txBox="1"/>
-          <p:nvPr/>
-        </p:nvSpPr>
-        <p:spPr>
-          <a:xfrm>
-            <a:off x="9006840" y="1949286"/>
+          <p:cNvPr id="123" name="Text 121"/>
+          <p:cNvSpPr txBox="1"/>
+          <p:nvPr/>
+        </p:nvSpPr>
+        <p:spPr>
+          <a:xfrm>
+            <a:off x="9052560" y="1949286"/>
             <a:ext cx="914400" cy="248502"/>
           </a:xfrm>
           <a:prstGeom prst="rect">
@@ -4528,13 +5269,13 @@
       </p:sp>
       <p:sp>
         <p:nvSpPr>
-          <p:cNvPr id="105" name="Text 103"/>
-          <p:cNvSpPr txBox="1"/>
-          <p:nvPr/>
-        </p:nvSpPr>
-        <p:spPr>
-          <a:xfrm>
-            <a:off x="9921240" y="1949286"/>
+          <p:cNvPr id="124" name="Text 122"/>
+          <p:cNvSpPr txBox="1"/>
+          <p:nvPr/>
+        </p:nvSpPr>
+        <p:spPr>
+          <a:xfrm>
+            <a:off x="9966960" y="1949286"/>
             <a:ext cx="749808" cy="248502"/>
           </a:xfrm>
           <a:prstGeom prst="rect">
@@ -4567,13 +5308,13 @@
       </p:sp>
       <p:sp>
         <p:nvSpPr>
-          <p:cNvPr id="106" name="Text 104"/>
-          <p:cNvSpPr txBox="1"/>
-          <p:nvPr/>
-        </p:nvSpPr>
-        <p:spPr>
-          <a:xfrm>
-            <a:off x="10671048" y="1949286"/>
+          <p:cNvPr id="125" name="Text 123"/>
+          <p:cNvSpPr txBox="1"/>
+          <p:nvPr/>
+        </p:nvSpPr>
+        <p:spPr>
+          <a:xfrm>
+            <a:off x="10716768" y="1949286"/>
             <a:ext cx="749808" cy="248502"/>
           </a:xfrm>
           <a:prstGeom prst="rect">
@@ -4606,14 +5347,53 @@
       </p:sp>
       <p:sp>
         <p:nvSpPr>
-          <p:cNvPr id="107" name="Text 105"/>
+          <p:cNvPr id="126" name="Text 124"/>
           <p:cNvSpPr txBox="1"/>
           <p:nvPr/>
         </p:nvSpPr>
         <p:spPr>
           <a:xfrm>
             <a:off x="6208776" y="2197787"/>
-            <a:ext cx="1938528" cy="248502"/>
+            <a:ext cx="310896" cy="248502"/>
+          </a:xfrm>
+          <a:prstGeom prst="rect">
+            <a:avLst/>
+          </a:prstGeom>
+          <a:noFill/>
+          <a:ln/>
+        </p:spPr>
+        <p:txBody>
+          <a:bodyPr wrap="square" lIns="0" tIns="0" rIns="0" bIns="0" rtlCol="0" anchor="ctr"/>
+          <a:lstStyle/>
+          <a:p>
+            <a:pPr algn="r" indent="0" marL="0">
+              <a:buNone/>
+            </a:pPr>
+            <a:r>
+              <a:rPr lang="en-US" sz="1200" dirty="0">
+                <a:solidFill>
+                  <a:srgbClr val="9AA3AD"/>
+                </a:solidFill>
+                <a:latin typeface="Inter" pitchFamily="34" charset="0"/>
+                <a:ea typeface="Inter" pitchFamily="34" charset="-122"/>
+                <a:cs typeface="Inter" pitchFamily="34" charset="-120"/>
+              </a:rPr>
+              <a:t>20</a:t>
+            </a:r>
+            <a:endParaRPr lang="en-US" sz="1200" dirty="0"/>
+          </a:p>
+        </p:txBody>
+      </p:sp>
+      <p:sp>
+        <p:nvSpPr>
+          <p:cNvPr id="127" name="Text 125"/>
+          <p:cNvSpPr txBox="1"/>
+          <p:nvPr/>
+        </p:nvSpPr>
+        <p:spPr>
+          <a:xfrm>
+            <a:off x="6565392" y="2197787"/>
+            <a:ext cx="1783080" cy="248502"/>
           </a:xfrm>
           <a:prstGeom prst="rect">
             <a:avLst/>
@@ -4645,14 +5425,14 @@
       </p:sp>
       <p:sp>
         <p:nvSpPr>
-          <p:cNvPr id="108" name="Shape 106"/>
+          <p:cNvPr id="128" name="Shape 126"/>
           <p:cNvSpPr/>
           <p:nvPr/>
         </p:nvSpPr>
         <p:spPr>
           <a:xfrm>
-            <a:off x="8220456" y="2253700"/>
-            <a:ext cx="115043" cy="136676"/>
+            <a:off x="8421624" y="2253700"/>
+            <a:ext cx="90596" cy="136676"/>
           </a:xfrm>
           <a:prstGeom prst="rect">
             <a:avLst/>
@@ -4665,13 +5445,13 @@
       </p:sp>
       <p:sp>
         <p:nvSpPr>
-          <p:cNvPr id="109" name="Text 107"/>
-          <p:cNvSpPr txBox="1"/>
-          <p:nvPr/>
-        </p:nvSpPr>
-        <p:spPr>
-          <a:xfrm>
-            <a:off x="9006840" y="2197787"/>
+          <p:cNvPr id="129" name="Text 127"/>
+          <p:cNvSpPr txBox="1"/>
+          <p:nvPr/>
+        </p:nvSpPr>
+        <p:spPr>
+          <a:xfrm>
+            <a:off x="9052560" y="2197787"/>
             <a:ext cx="914400" cy="248502"/>
           </a:xfrm>
           <a:prstGeom prst="rect">
@@ -4704,13 +5484,13 @@
       </p:sp>
       <p:sp>
         <p:nvSpPr>
-          <p:cNvPr id="110" name="Text 108"/>
-          <p:cNvSpPr txBox="1"/>
-          <p:nvPr/>
-        </p:nvSpPr>
-        <p:spPr>
-          <a:xfrm>
-            <a:off x="9921240" y="2197787"/>
+          <p:cNvPr id="130" name="Text 128"/>
+          <p:cNvSpPr txBox="1"/>
+          <p:nvPr/>
+        </p:nvSpPr>
+        <p:spPr>
+          <a:xfrm>
+            <a:off x="9966960" y="2197787"/>
             <a:ext cx="749808" cy="248502"/>
           </a:xfrm>
           <a:prstGeom prst="rect">
@@ -4743,13 +5523,13 @@
       </p:sp>
       <p:sp>
         <p:nvSpPr>
-          <p:cNvPr id="111" name="Text 109"/>
-          <p:cNvSpPr txBox="1"/>
-          <p:nvPr/>
-        </p:nvSpPr>
-        <p:spPr>
-          <a:xfrm>
-            <a:off x="10671048" y="2197787"/>
+          <p:cNvPr id="131" name="Text 129"/>
+          <p:cNvSpPr txBox="1"/>
+          <p:nvPr/>
+        </p:nvSpPr>
+        <p:spPr>
+          <a:xfrm>
+            <a:off x="10716768" y="2197787"/>
             <a:ext cx="749808" cy="248502"/>
           </a:xfrm>
           <a:prstGeom prst="rect">
@@ -4782,14 +5562,53 @@
       </p:sp>
       <p:sp>
         <p:nvSpPr>
-          <p:cNvPr id="112" name="Text 110"/>
+          <p:cNvPr id="132" name="Text 130"/>
           <p:cNvSpPr txBox="1"/>
           <p:nvPr/>
         </p:nvSpPr>
         <p:spPr>
           <a:xfrm>
             <a:off x="6208776" y="2446289"/>
-            <a:ext cx="1938528" cy="248502"/>
+            <a:ext cx="310896" cy="248502"/>
+          </a:xfrm>
+          <a:prstGeom prst="rect">
+            <a:avLst/>
+          </a:prstGeom>
+          <a:noFill/>
+          <a:ln/>
+        </p:spPr>
+        <p:txBody>
+          <a:bodyPr wrap="square" lIns="0" tIns="0" rIns="0" bIns="0" rtlCol="0" anchor="ctr"/>
+          <a:lstStyle/>
+          <a:p>
+            <a:pPr algn="r" indent="0" marL="0">
+              <a:buNone/>
+            </a:pPr>
+            <a:r>
+              <a:rPr lang="en-US" sz="1200" dirty="0">
+                <a:solidFill>
+                  <a:srgbClr val="9AA3AD"/>
+                </a:solidFill>
+                <a:latin typeface="Inter" pitchFamily="34" charset="0"/>
+                <a:ea typeface="Inter" pitchFamily="34" charset="-122"/>
+                <a:cs typeface="Inter" pitchFamily="34" charset="-120"/>
+              </a:rPr>
+              <a:t>21</a:t>
+            </a:r>
+            <a:endParaRPr lang="en-US" sz="1200" dirty="0"/>
+          </a:p>
+        </p:txBody>
+      </p:sp>
+      <p:sp>
+        <p:nvSpPr>
+          <p:cNvPr id="133" name="Text 131"/>
+          <p:cNvSpPr txBox="1"/>
+          <p:nvPr/>
+        </p:nvSpPr>
+        <p:spPr>
+          <a:xfrm>
+            <a:off x="6565392" y="2446289"/>
+            <a:ext cx="1783080" cy="248502"/>
           </a:xfrm>
           <a:prstGeom prst="rect">
             <a:avLst/>
@@ -4821,14 +5640,14 @@
       </p:sp>
       <p:sp>
         <p:nvSpPr>
-          <p:cNvPr id="113" name="Shape 111"/>
+          <p:cNvPr id="134" name="Shape 132"/>
           <p:cNvSpPr/>
           <p:nvPr/>
         </p:nvSpPr>
         <p:spPr>
           <a:xfrm>
-            <a:off x="8220456" y="2502202"/>
-            <a:ext cx="113826" cy="136676"/>
+            <a:off x="8421624" y="2502202"/>
+            <a:ext cx="89638" cy="136676"/>
           </a:xfrm>
           <a:prstGeom prst="rect">
             <a:avLst/>
@@ -4841,13 +5660,13 @@
       </p:sp>
       <p:sp>
         <p:nvSpPr>
-          <p:cNvPr id="114" name="Text 112"/>
-          <p:cNvSpPr txBox="1"/>
-          <p:nvPr/>
-        </p:nvSpPr>
-        <p:spPr>
-          <a:xfrm>
-            <a:off x="9006840" y="2446289"/>
+          <p:cNvPr id="135" name="Text 133"/>
+          <p:cNvSpPr txBox="1"/>
+          <p:nvPr/>
+        </p:nvSpPr>
+        <p:spPr>
+          <a:xfrm>
+            <a:off x="9052560" y="2446289"/>
             <a:ext cx="914400" cy="248502"/>
           </a:xfrm>
           <a:prstGeom prst="rect">
@@ -4880,13 +5699,13 @@
       </p:sp>
       <p:sp>
         <p:nvSpPr>
-          <p:cNvPr id="115" name="Text 113"/>
-          <p:cNvSpPr txBox="1"/>
-          <p:nvPr/>
-        </p:nvSpPr>
-        <p:spPr>
-          <a:xfrm>
-            <a:off x="9921240" y="2446289"/>
+          <p:cNvPr id="136" name="Text 134"/>
+          <p:cNvSpPr txBox="1"/>
+          <p:nvPr/>
+        </p:nvSpPr>
+        <p:spPr>
+          <a:xfrm>
+            <a:off x="9966960" y="2446289"/>
             <a:ext cx="749808" cy="248502"/>
           </a:xfrm>
           <a:prstGeom prst="rect">
@@ -4919,13 +5738,13 @@
       </p:sp>
       <p:sp>
         <p:nvSpPr>
-          <p:cNvPr id="116" name="Text 114"/>
-          <p:cNvSpPr txBox="1"/>
-          <p:nvPr/>
-        </p:nvSpPr>
-        <p:spPr>
-          <a:xfrm>
-            <a:off x="10671048" y="2446289"/>
+          <p:cNvPr id="137" name="Text 135"/>
+          <p:cNvSpPr txBox="1"/>
+          <p:nvPr/>
+        </p:nvSpPr>
+        <p:spPr>
+          <a:xfrm>
+            <a:off x="10716768" y="2446289"/>
             <a:ext cx="749808" cy="248502"/>
           </a:xfrm>
           <a:prstGeom prst="rect">
@@ -4958,14 +5777,53 @@
       </p:sp>
       <p:sp>
         <p:nvSpPr>
-          <p:cNvPr id="117" name="Text 115"/>
+          <p:cNvPr id="138" name="Text 136"/>
           <p:cNvSpPr txBox="1"/>
           <p:nvPr/>
         </p:nvSpPr>
         <p:spPr>
           <a:xfrm>
             <a:off x="6208776" y="2694791"/>
-            <a:ext cx="1938528" cy="248502"/>
+            <a:ext cx="310896" cy="248502"/>
+          </a:xfrm>
+          <a:prstGeom prst="rect">
+            <a:avLst/>
+          </a:prstGeom>
+          <a:noFill/>
+          <a:ln/>
+        </p:spPr>
+        <p:txBody>
+          <a:bodyPr wrap="square" lIns="0" tIns="0" rIns="0" bIns="0" rtlCol="0" anchor="ctr"/>
+          <a:lstStyle/>
+          <a:p>
+            <a:pPr algn="r" indent="0" marL="0">
+              <a:buNone/>
+            </a:pPr>
+            <a:r>
+              <a:rPr lang="en-US" sz="1200" dirty="0">
+                <a:solidFill>
+                  <a:srgbClr val="9AA3AD"/>
+                </a:solidFill>
+                <a:latin typeface="Inter" pitchFamily="34" charset="0"/>
+                <a:ea typeface="Inter" pitchFamily="34" charset="-122"/>
+                <a:cs typeface="Inter" pitchFamily="34" charset="-120"/>
+              </a:rPr>
+              <a:t>22</a:t>
+            </a:r>
+            <a:endParaRPr lang="en-US" sz="1200" dirty="0"/>
+          </a:p>
+        </p:txBody>
+      </p:sp>
+      <p:sp>
+        <p:nvSpPr>
+          <p:cNvPr id="139" name="Text 137"/>
+          <p:cNvSpPr txBox="1"/>
+          <p:nvPr/>
+        </p:nvSpPr>
+        <p:spPr>
+          <a:xfrm>
+            <a:off x="6565392" y="2694791"/>
+            <a:ext cx="1783080" cy="248502"/>
           </a:xfrm>
           <a:prstGeom prst="rect">
             <a:avLst/>
@@ -4997,14 +5855,14 @@
       </p:sp>
       <p:sp>
         <p:nvSpPr>
-          <p:cNvPr id="118" name="Shape 116"/>
+          <p:cNvPr id="140" name="Shape 138"/>
           <p:cNvSpPr/>
           <p:nvPr/>
         </p:nvSpPr>
         <p:spPr>
           <a:xfrm>
-            <a:off x="8220456" y="2750703"/>
-            <a:ext cx="110607" cy="136676"/>
+            <a:off x="8421624" y="2750703"/>
+            <a:ext cx="87103" cy="136676"/>
           </a:xfrm>
           <a:prstGeom prst="rect">
             <a:avLst/>
@@ -5017,13 +5875,13 @@
       </p:sp>
       <p:sp>
         <p:nvSpPr>
-          <p:cNvPr id="119" name="Text 117"/>
-          <p:cNvSpPr txBox="1"/>
-          <p:nvPr/>
-        </p:nvSpPr>
-        <p:spPr>
-          <a:xfrm>
-            <a:off x="9006840" y="2694791"/>
+          <p:cNvPr id="141" name="Text 139"/>
+          <p:cNvSpPr txBox="1"/>
+          <p:nvPr/>
+        </p:nvSpPr>
+        <p:spPr>
+          <a:xfrm>
+            <a:off x="9052560" y="2694791"/>
             <a:ext cx="914400" cy="248502"/>
           </a:xfrm>
           <a:prstGeom prst="rect">
@@ -5056,13 +5914,13 @@
       </p:sp>
       <p:sp>
         <p:nvSpPr>
-          <p:cNvPr id="120" name="Text 118"/>
-          <p:cNvSpPr txBox="1"/>
-          <p:nvPr/>
-        </p:nvSpPr>
-        <p:spPr>
-          <a:xfrm>
-            <a:off x="9921240" y="2694791"/>
+          <p:cNvPr id="142" name="Text 140"/>
+          <p:cNvSpPr txBox="1"/>
+          <p:nvPr/>
+        </p:nvSpPr>
+        <p:spPr>
+          <a:xfrm>
+            <a:off x="9966960" y="2694791"/>
             <a:ext cx="749808" cy="248502"/>
           </a:xfrm>
           <a:prstGeom prst="rect">
@@ -5095,13 +5953,13 @@
       </p:sp>
       <p:sp>
         <p:nvSpPr>
-          <p:cNvPr id="121" name="Text 119"/>
-          <p:cNvSpPr txBox="1"/>
-          <p:nvPr/>
-        </p:nvSpPr>
-        <p:spPr>
-          <a:xfrm>
-            <a:off x="10671048" y="2694791"/>
+          <p:cNvPr id="143" name="Text 141"/>
+          <p:cNvSpPr txBox="1"/>
+          <p:nvPr/>
+        </p:nvSpPr>
+        <p:spPr>
+          <a:xfrm>
+            <a:off x="10716768" y="2694791"/>
             <a:ext cx="749808" cy="248502"/>
           </a:xfrm>
           <a:prstGeom prst="rect">
@@ -5134,14 +5992,53 @@
       </p:sp>
       <p:sp>
         <p:nvSpPr>
-          <p:cNvPr id="122" name="Text 120"/>
+          <p:cNvPr id="144" name="Text 142"/>
           <p:cNvSpPr txBox="1"/>
           <p:nvPr/>
         </p:nvSpPr>
         <p:spPr>
           <a:xfrm>
             <a:off x="6208776" y="2943292"/>
-            <a:ext cx="1938528" cy="248502"/>
+            <a:ext cx="310896" cy="248502"/>
+          </a:xfrm>
+          <a:prstGeom prst="rect">
+            <a:avLst/>
+          </a:prstGeom>
+          <a:noFill/>
+          <a:ln/>
+        </p:spPr>
+        <p:txBody>
+          <a:bodyPr wrap="square" lIns="0" tIns="0" rIns="0" bIns="0" rtlCol="0" anchor="ctr"/>
+          <a:lstStyle/>
+          <a:p>
+            <a:pPr algn="r" indent="0" marL="0">
+              <a:buNone/>
+            </a:pPr>
+            <a:r>
+              <a:rPr lang="en-US" sz="1200" dirty="0">
+                <a:solidFill>
+                  <a:srgbClr val="9AA3AD"/>
+                </a:solidFill>
+                <a:latin typeface="Inter" pitchFamily="34" charset="0"/>
+                <a:ea typeface="Inter" pitchFamily="34" charset="-122"/>
+                <a:cs typeface="Inter" pitchFamily="34" charset="-120"/>
+              </a:rPr>
+              <a:t>23</a:t>
+            </a:r>
+            <a:endParaRPr lang="en-US" sz="1200" dirty="0"/>
+          </a:p>
+        </p:txBody>
+      </p:sp>
+      <p:sp>
+        <p:nvSpPr>
+          <p:cNvPr id="145" name="Text 143"/>
+          <p:cNvSpPr txBox="1"/>
+          <p:nvPr/>
+        </p:nvSpPr>
+        <p:spPr>
+          <a:xfrm>
+            <a:off x="6565392" y="2943292"/>
+            <a:ext cx="1783080" cy="248502"/>
           </a:xfrm>
           <a:prstGeom prst="rect">
             <a:avLst/>
@@ -5173,14 +6070,14 @@
       </p:sp>
       <p:sp>
         <p:nvSpPr>
-          <p:cNvPr id="123" name="Shape 121"/>
+          <p:cNvPr id="146" name="Shape 144"/>
           <p:cNvSpPr/>
           <p:nvPr/>
         </p:nvSpPr>
         <p:spPr>
           <a:xfrm>
-            <a:off x="8220456" y="2999205"/>
-            <a:ext cx="107009" cy="136676"/>
+            <a:off x="8421624" y="2999205"/>
+            <a:ext cx="84269" cy="136676"/>
           </a:xfrm>
           <a:prstGeom prst="rect">
             <a:avLst/>
@@ -5193,13 +6090,13 @@
       </p:sp>
       <p:sp>
         <p:nvSpPr>
-          <p:cNvPr id="124" name="Text 122"/>
-          <p:cNvSpPr txBox="1"/>
-          <p:nvPr/>
-        </p:nvSpPr>
-        <p:spPr>
-          <a:xfrm>
-            <a:off x="9006840" y="2943292"/>
+          <p:cNvPr id="147" name="Text 145"/>
+          <p:cNvSpPr txBox="1"/>
+          <p:nvPr/>
+        </p:nvSpPr>
+        <p:spPr>
+          <a:xfrm>
+            <a:off x="9052560" y="2943292"/>
             <a:ext cx="914400" cy="248502"/>
           </a:xfrm>
           <a:prstGeom prst="rect">
@@ -5232,13 +6129,13 @@
       </p:sp>
       <p:sp>
         <p:nvSpPr>
-          <p:cNvPr id="125" name="Text 123"/>
-          <p:cNvSpPr txBox="1"/>
-          <p:nvPr/>
-        </p:nvSpPr>
-        <p:spPr>
-          <a:xfrm>
-            <a:off x="9921240" y="2943292"/>
+          <p:cNvPr id="148" name="Text 146"/>
+          <p:cNvSpPr txBox="1"/>
+          <p:nvPr/>
+        </p:nvSpPr>
+        <p:spPr>
+          <a:xfrm>
+            <a:off x="9966960" y="2943292"/>
             <a:ext cx="749808" cy="248502"/>
           </a:xfrm>
           <a:prstGeom prst="rect">
@@ -5271,13 +6168,13 @@
       </p:sp>
       <p:sp>
         <p:nvSpPr>
-          <p:cNvPr id="126" name="Text 124"/>
-          <p:cNvSpPr txBox="1"/>
-          <p:nvPr/>
-        </p:nvSpPr>
-        <p:spPr>
-          <a:xfrm>
-            <a:off x="10671048" y="2943292"/>
+          <p:cNvPr id="149" name="Text 147"/>
+          <p:cNvSpPr txBox="1"/>
+          <p:nvPr/>
+        </p:nvSpPr>
+        <p:spPr>
+          <a:xfrm>
+            <a:off x="10716768" y="2943292"/>
             <a:ext cx="749808" cy="248502"/>
           </a:xfrm>
           <a:prstGeom prst="rect">
@@ -5310,14 +6207,53 @@
       </p:sp>
       <p:sp>
         <p:nvSpPr>
-          <p:cNvPr id="127" name="Text 125"/>
+          <p:cNvPr id="150" name="Text 148"/>
           <p:cNvSpPr txBox="1"/>
           <p:nvPr/>
         </p:nvSpPr>
         <p:spPr>
           <a:xfrm>
             <a:off x="6208776" y="3191794"/>
-            <a:ext cx="1938528" cy="248502"/>
+            <a:ext cx="310896" cy="248502"/>
+          </a:xfrm>
+          <a:prstGeom prst="rect">
+            <a:avLst/>
+          </a:prstGeom>
+          <a:noFill/>
+          <a:ln/>
+        </p:spPr>
+        <p:txBody>
+          <a:bodyPr wrap="square" lIns="0" tIns="0" rIns="0" bIns="0" rtlCol="0" anchor="ctr"/>
+          <a:lstStyle/>
+          <a:p>
+            <a:pPr algn="r" indent="0" marL="0">
+              <a:buNone/>
+            </a:pPr>
+            <a:r>
+              <a:rPr lang="en-US" sz="1200" dirty="0">
+                <a:solidFill>
+                  <a:srgbClr val="9AA3AD"/>
+                </a:solidFill>
+                <a:latin typeface="Inter" pitchFamily="34" charset="0"/>
+                <a:ea typeface="Inter" pitchFamily="34" charset="-122"/>
+                <a:cs typeface="Inter" pitchFamily="34" charset="-120"/>
+              </a:rPr>
+              <a:t>24</a:t>
+            </a:r>
+            <a:endParaRPr lang="en-US" sz="1200" dirty="0"/>
+          </a:p>
+        </p:txBody>
+      </p:sp>
+      <p:sp>
+        <p:nvSpPr>
+          <p:cNvPr id="151" name="Text 149"/>
+          <p:cNvSpPr txBox="1"/>
+          <p:nvPr/>
+        </p:nvSpPr>
+        <p:spPr>
+          <a:xfrm>
+            <a:off x="6565392" y="3191794"/>
+            <a:ext cx="1783080" cy="248502"/>
           </a:xfrm>
           <a:prstGeom prst="rect">
             <a:avLst/>
@@ -5349,14 +6285,14 @@
       </p:sp>
       <p:sp>
         <p:nvSpPr>
-          <p:cNvPr id="128" name="Shape 126"/>
+          <p:cNvPr id="152" name="Shape 150"/>
           <p:cNvSpPr/>
           <p:nvPr/>
         </p:nvSpPr>
         <p:spPr>
           <a:xfrm>
-            <a:off x="8220456" y="3247707"/>
-            <a:ext cx="96551" cy="136676"/>
+            <a:off x="8421624" y="3247707"/>
+            <a:ext cx="76034" cy="136676"/>
           </a:xfrm>
           <a:prstGeom prst="rect">
             <a:avLst/>
@@ -5369,13 +6305,13 @@
       </p:sp>
       <p:sp>
         <p:nvSpPr>
-          <p:cNvPr id="129" name="Text 127"/>
-          <p:cNvSpPr txBox="1"/>
-          <p:nvPr/>
-        </p:nvSpPr>
-        <p:spPr>
-          <a:xfrm>
-            <a:off x="9006840" y="3191794"/>
+          <p:cNvPr id="153" name="Text 151"/>
+          <p:cNvSpPr txBox="1"/>
+          <p:nvPr/>
+        </p:nvSpPr>
+        <p:spPr>
+          <a:xfrm>
+            <a:off x="9052560" y="3191794"/>
             <a:ext cx="914400" cy="248502"/>
           </a:xfrm>
           <a:prstGeom prst="rect">
@@ -5408,13 +6344,13 @@
       </p:sp>
       <p:sp>
         <p:nvSpPr>
-          <p:cNvPr id="130" name="Text 128"/>
-          <p:cNvSpPr txBox="1"/>
-          <p:nvPr/>
-        </p:nvSpPr>
-        <p:spPr>
-          <a:xfrm>
-            <a:off x="9921240" y="3191794"/>
+          <p:cNvPr id="154" name="Text 152"/>
+          <p:cNvSpPr txBox="1"/>
+          <p:nvPr/>
+        </p:nvSpPr>
+        <p:spPr>
+          <a:xfrm>
+            <a:off x="9966960" y="3191794"/>
             <a:ext cx="749808" cy="248502"/>
           </a:xfrm>
           <a:prstGeom prst="rect">
@@ -5447,13 +6383,13 @@
       </p:sp>
       <p:sp>
         <p:nvSpPr>
-          <p:cNvPr id="131" name="Text 129"/>
-          <p:cNvSpPr txBox="1"/>
-          <p:nvPr/>
-        </p:nvSpPr>
-        <p:spPr>
-          <a:xfrm>
-            <a:off x="10671048" y="3191794"/>
+          <p:cNvPr id="155" name="Text 153"/>
+          <p:cNvSpPr txBox="1"/>
+          <p:nvPr/>
+        </p:nvSpPr>
+        <p:spPr>
+          <a:xfrm>
+            <a:off x="10716768" y="3191794"/>
             <a:ext cx="749808" cy="248502"/>
           </a:xfrm>
           <a:prstGeom prst="rect">
@@ -5486,14 +6422,53 @@
       </p:sp>
       <p:sp>
         <p:nvSpPr>
-          <p:cNvPr id="132" name="Text 130"/>
+          <p:cNvPr id="156" name="Text 154"/>
           <p:cNvSpPr txBox="1"/>
           <p:nvPr/>
         </p:nvSpPr>
         <p:spPr>
           <a:xfrm>
             <a:off x="6208776" y="3440296"/>
-            <a:ext cx="1938528" cy="248502"/>
+            <a:ext cx="310896" cy="248502"/>
+          </a:xfrm>
+          <a:prstGeom prst="rect">
+            <a:avLst/>
+          </a:prstGeom>
+          <a:noFill/>
+          <a:ln/>
+        </p:spPr>
+        <p:txBody>
+          <a:bodyPr wrap="square" lIns="0" tIns="0" rIns="0" bIns="0" rtlCol="0" anchor="ctr"/>
+          <a:lstStyle/>
+          <a:p>
+            <a:pPr algn="r" indent="0" marL="0">
+              <a:buNone/>
+            </a:pPr>
+            <a:r>
+              <a:rPr lang="en-US" sz="1200" dirty="0">
+                <a:solidFill>
+                  <a:srgbClr val="9AA3AD"/>
+                </a:solidFill>
+                <a:latin typeface="Inter" pitchFamily="34" charset="0"/>
+                <a:ea typeface="Inter" pitchFamily="34" charset="-122"/>
+                <a:cs typeface="Inter" pitchFamily="34" charset="-120"/>
+              </a:rPr>
+              <a:t>25</a:t>
+            </a:r>
+            <a:endParaRPr lang="en-US" sz="1200" dirty="0"/>
+          </a:p>
+        </p:txBody>
+      </p:sp>
+      <p:sp>
+        <p:nvSpPr>
+          <p:cNvPr id="157" name="Text 155"/>
+          <p:cNvSpPr txBox="1"/>
+          <p:nvPr/>
+        </p:nvSpPr>
+        <p:spPr>
+          <a:xfrm>
+            <a:off x="6565392" y="3440296"/>
+            <a:ext cx="1783080" cy="248502"/>
           </a:xfrm>
           <a:prstGeom prst="rect">
             <a:avLst/>
@@ -5525,14 +6500,14 @@
       </p:sp>
       <p:sp>
         <p:nvSpPr>
-          <p:cNvPr id="133" name="Shape 131"/>
+          <p:cNvPr id="158" name="Shape 156"/>
           <p:cNvSpPr/>
           <p:nvPr/>
         </p:nvSpPr>
         <p:spPr>
           <a:xfrm>
-            <a:off x="8220456" y="3496208"/>
-            <a:ext cx="93673" cy="136676"/>
+            <a:off x="8421624" y="3496208"/>
+            <a:ext cx="73768" cy="136676"/>
           </a:xfrm>
           <a:prstGeom prst="rect">
             <a:avLst/>
@@ -5545,13 +6520,13 @@
       </p:sp>
       <p:sp>
         <p:nvSpPr>
-          <p:cNvPr id="134" name="Text 132"/>
-          <p:cNvSpPr txBox="1"/>
-          <p:nvPr/>
-        </p:nvSpPr>
-        <p:spPr>
-          <a:xfrm>
-            <a:off x="9006840" y="3440296"/>
+          <p:cNvPr id="159" name="Text 157"/>
+          <p:cNvSpPr txBox="1"/>
+          <p:nvPr/>
+        </p:nvSpPr>
+        <p:spPr>
+          <a:xfrm>
+            <a:off x="9052560" y="3440296"/>
             <a:ext cx="914400" cy="248502"/>
           </a:xfrm>
           <a:prstGeom prst="rect">
@@ -5584,13 +6559,13 @@
       </p:sp>
       <p:sp>
         <p:nvSpPr>
-          <p:cNvPr id="135" name="Text 133"/>
-          <p:cNvSpPr txBox="1"/>
-          <p:nvPr/>
-        </p:nvSpPr>
-        <p:spPr>
-          <a:xfrm>
-            <a:off x="9921240" y="3440296"/>
+          <p:cNvPr id="160" name="Text 158"/>
+          <p:cNvSpPr txBox="1"/>
+          <p:nvPr/>
+        </p:nvSpPr>
+        <p:spPr>
+          <a:xfrm>
+            <a:off x="9966960" y="3440296"/>
             <a:ext cx="749808" cy="248502"/>
           </a:xfrm>
           <a:prstGeom prst="rect">
@@ -5623,13 +6598,13 @@
       </p:sp>
       <p:sp>
         <p:nvSpPr>
-          <p:cNvPr id="136" name="Text 134"/>
-          <p:cNvSpPr txBox="1"/>
-          <p:nvPr/>
-        </p:nvSpPr>
-        <p:spPr>
-          <a:xfrm>
-            <a:off x="10671048" y="3440296"/>
+          <p:cNvPr id="161" name="Text 159"/>
+          <p:cNvSpPr txBox="1"/>
+          <p:nvPr/>
+        </p:nvSpPr>
+        <p:spPr>
+          <a:xfrm>
+            <a:off x="10716768" y="3440296"/>
             <a:ext cx="749808" cy="248502"/>
           </a:xfrm>
           <a:prstGeom prst="rect">
@@ -5662,14 +6637,53 @@
       </p:sp>
       <p:sp>
         <p:nvSpPr>
-          <p:cNvPr id="137" name="Text 135"/>
+          <p:cNvPr id="162" name="Text 160"/>
           <p:cNvSpPr txBox="1"/>
           <p:nvPr/>
         </p:nvSpPr>
         <p:spPr>
           <a:xfrm>
             <a:off x="6208776" y="3688797"/>
-            <a:ext cx="1938528" cy="248502"/>
+            <a:ext cx="310896" cy="248502"/>
+          </a:xfrm>
+          <a:prstGeom prst="rect">
+            <a:avLst/>
+          </a:prstGeom>
+          <a:noFill/>
+          <a:ln/>
+        </p:spPr>
+        <p:txBody>
+          <a:bodyPr wrap="square" lIns="0" tIns="0" rIns="0" bIns="0" rtlCol="0" anchor="ctr"/>
+          <a:lstStyle/>
+          <a:p>
+            <a:pPr algn="r" indent="0" marL="0">
+              <a:buNone/>
+            </a:pPr>
+            <a:r>
+              <a:rPr lang="en-US" sz="1200" dirty="0">
+                <a:solidFill>
+                  <a:srgbClr val="9AA3AD"/>
+                </a:solidFill>
+                <a:latin typeface="Inter" pitchFamily="34" charset="0"/>
+                <a:ea typeface="Inter" pitchFamily="34" charset="-122"/>
+                <a:cs typeface="Inter" pitchFamily="34" charset="-120"/>
+              </a:rPr>
+              <a:t>26</a:t>
+            </a:r>
+            <a:endParaRPr lang="en-US" sz="1200" dirty="0"/>
+          </a:p>
+        </p:txBody>
+      </p:sp>
+      <p:sp>
+        <p:nvSpPr>
+          <p:cNvPr id="163" name="Text 161"/>
+          <p:cNvSpPr txBox="1"/>
+          <p:nvPr/>
+        </p:nvSpPr>
+        <p:spPr>
+          <a:xfrm>
+            <a:off x="6565392" y="3688797"/>
+            <a:ext cx="1783080" cy="248502"/>
           </a:xfrm>
           <a:prstGeom prst="rect">
             <a:avLst/>
@@ -5701,14 +6715,14 @@
       </p:sp>
       <p:sp>
         <p:nvSpPr>
-          <p:cNvPr id="138" name="Shape 136"/>
+          <p:cNvPr id="164" name="Shape 162"/>
           <p:cNvSpPr/>
           <p:nvPr/>
         </p:nvSpPr>
         <p:spPr>
           <a:xfrm>
-            <a:off x="8220456" y="3744710"/>
-            <a:ext cx="87427" cy="136676"/>
+            <a:off x="8421624" y="3744710"/>
+            <a:ext cx="68849" cy="136676"/>
           </a:xfrm>
           <a:prstGeom prst="rect">
             <a:avLst/>
@@ -5721,13 +6735,13 @@
       </p:sp>
       <p:sp>
         <p:nvSpPr>
-          <p:cNvPr id="139" name="Text 137"/>
-          <p:cNvSpPr txBox="1"/>
-          <p:nvPr/>
-        </p:nvSpPr>
-        <p:spPr>
-          <a:xfrm>
-            <a:off x="9006840" y="3688797"/>
+          <p:cNvPr id="165" name="Text 163"/>
+          <p:cNvSpPr txBox="1"/>
+          <p:nvPr/>
+        </p:nvSpPr>
+        <p:spPr>
+          <a:xfrm>
+            <a:off x="9052560" y="3688797"/>
             <a:ext cx="914400" cy="248502"/>
           </a:xfrm>
           <a:prstGeom prst="rect">
@@ -5760,13 +6774,13 @@
       </p:sp>
       <p:sp>
         <p:nvSpPr>
-          <p:cNvPr id="140" name="Text 138"/>
-          <p:cNvSpPr txBox="1"/>
-          <p:nvPr/>
-        </p:nvSpPr>
-        <p:spPr>
-          <a:xfrm>
-            <a:off x="9921240" y="3688797"/>
+          <p:cNvPr id="166" name="Text 164"/>
+          <p:cNvSpPr txBox="1"/>
+          <p:nvPr/>
+        </p:nvSpPr>
+        <p:spPr>
+          <a:xfrm>
+            <a:off x="9966960" y="3688797"/>
             <a:ext cx="749808" cy="248502"/>
           </a:xfrm>
           <a:prstGeom prst="rect">
@@ -5799,13 +6813,13 @@
       </p:sp>
       <p:sp>
         <p:nvSpPr>
-          <p:cNvPr id="141" name="Text 139"/>
-          <p:cNvSpPr txBox="1"/>
-          <p:nvPr/>
-        </p:nvSpPr>
-        <p:spPr>
-          <a:xfrm>
-            <a:off x="10671048" y="3688797"/>
+          <p:cNvPr id="167" name="Text 165"/>
+          <p:cNvSpPr txBox="1"/>
+          <p:nvPr/>
+        </p:nvSpPr>
+        <p:spPr>
+          <a:xfrm>
+            <a:off x="10716768" y="3688797"/>
             <a:ext cx="749808" cy="248502"/>
           </a:xfrm>
           <a:prstGeom prst="rect">
@@ -5838,14 +6852,53 @@
       </p:sp>
       <p:sp>
         <p:nvSpPr>
-          <p:cNvPr id="142" name="Text 140"/>
+          <p:cNvPr id="168" name="Text 166"/>
           <p:cNvSpPr txBox="1"/>
           <p:nvPr/>
         </p:nvSpPr>
         <p:spPr>
           <a:xfrm>
             <a:off x="6208776" y="3937299"/>
-            <a:ext cx="1938528" cy="248502"/>
+            <a:ext cx="310896" cy="248502"/>
+          </a:xfrm>
+          <a:prstGeom prst="rect">
+            <a:avLst/>
+          </a:prstGeom>
+          <a:noFill/>
+          <a:ln/>
+        </p:spPr>
+        <p:txBody>
+          <a:bodyPr wrap="square" lIns="0" tIns="0" rIns="0" bIns="0" rtlCol="0" anchor="ctr"/>
+          <a:lstStyle/>
+          <a:p>
+            <a:pPr algn="r" indent="0" marL="0">
+              <a:buNone/>
+            </a:pPr>
+            <a:r>
+              <a:rPr lang="en-US" sz="1200" dirty="0">
+                <a:solidFill>
+                  <a:srgbClr val="9AA3AD"/>
+                </a:solidFill>
+                <a:latin typeface="Inter" pitchFamily="34" charset="0"/>
+                <a:ea typeface="Inter" pitchFamily="34" charset="-122"/>
+                <a:cs typeface="Inter" pitchFamily="34" charset="-120"/>
+              </a:rPr>
+              <a:t>27</a:t>
+            </a:r>
+            <a:endParaRPr lang="en-US" sz="1200" dirty="0"/>
+          </a:p>
+        </p:txBody>
+      </p:sp>
+      <p:sp>
+        <p:nvSpPr>
+          <p:cNvPr id="169" name="Text 167"/>
+          <p:cNvSpPr txBox="1"/>
+          <p:nvPr/>
+        </p:nvSpPr>
+        <p:spPr>
+          <a:xfrm>
+            <a:off x="6565392" y="3937299"/>
+            <a:ext cx="1783080" cy="248502"/>
           </a:xfrm>
           <a:prstGeom prst="rect">
             <a:avLst/>
@@ -5877,14 +6930,14 @@
       </p:sp>
       <p:sp>
         <p:nvSpPr>
-          <p:cNvPr id="143" name="Shape 141"/>
+          <p:cNvPr id="170" name="Shape 168"/>
           <p:cNvSpPr/>
           <p:nvPr/>
         </p:nvSpPr>
         <p:spPr>
           <a:xfrm>
-            <a:off x="8220456" y="3993212"/>
-            <a:ext cx="75632" cy="136676"/>
+            <a:off x="8421624" y="3993212"/>
+            <a:ext cx="59561" cy="136676"/>
           </a:xfrm>
           <a:prstGeom prst="rect">
             <a:avLst/>
@@ -5897,13 +6950,13 @@
       </p:sp>
       <p:sp>
         <p:nvSpPr>
-          <p:cNvPr id="144" name="Text 142"/>
-          <p:cNvSpPr txBox="1"/>
-          <p:nvPr/>
-        </p:nvSpPr>
-        <p:spPr>
-          <a:xfrm>
-            <a:off x="9006840" y="3937299"/>
+          <p:cNvPr id="171" name="Text 169"/>
+          <p:cNvSpPr txBox="1"/>
+          <p:nvPr/>
+        </p:nvSpPr>
+        <p:spPr>
+          <a:xfrm>
+            <a:off x="9052560" y="3937299"/>
             <a:ext cx="914400" cy="248502"/>
           </a:xfrm>
           <a:prstGeom prst="rect">
@@ -5936,13 +6989,13 @@
       </p:sp>
       <p:sp>
         <p:nvSpPr>
-          <p:cNvPr id="145" name="Text 143"/>
-          <p:cNvSpPr txBox="1"/>
-          <p:nvPr/>
-        </p:nvSpPr>
-        <p:spPr>
-          <a:xfrm>
-            <a:off x="9921240" y="3937299"/>
+          <p:cNvPr id="172" name="Text 170"/>
+          <p:cNvSpPr txBox="1"/>
+          <p:nvPr/>
+        </p:nvSpPr>
+        <p:spPr>
+          <a:xfrm>
+            <a:off x="9966960" y="3937299"/>
             <a:ext cx="749808" cy="248502"/>
           </a:xfrm>
           <a:prstGeom prst="rect">
@@ -5975,13 +7028,13 @@
       </p:sp>
       <p:sp>
         <p:nvSpPr>
-          <p:cNvPr id="146" name="Text 144"/>
-          <p:cNvSpPr txBox="1"/>
-          <p:nvPr/>
-        </p:nvSpPr>
-        <p:spPr>
-          <a:xfrm>
-            <a:off x="10671048" y="3937299"/>
+          <p:cNvPr id="173" name="Text 171"/>
+          <p:cNvSpPr txBox="1"/>
+          <p:nvPr/>
+        </p:nvSpPr>
+        <p:spPr>
+          <a:xfrm>
+            <a:off x="10716768" y="3937299"/>
             <a:ext cx="749808" cy="248502"/>
           </a:xfrm>
           <a:prstGeom prst="rect">
@@ -6014,14 +7067,53 @@
       </p:sp>
       <p:sp>
         <p:nvSpPr>
-          <p:cNvPr id="147" name="Text 145"/>
+          <p:cNvPr id="174" name="Text 172"/>
           <p:cNvSpPr txBox="1"/>
           <p:nvPr/>
         </p:nvSpPr>
         <p:spPr>
           <a:xfrm>
             <a:off x="6208776" y="4185800"/>
-            <a:ext cx="1938528" cy="248502"/>
+            <a:ext cx="310896" cy="248502"/>
+          </a:xfrm>
+          <a:prstGeom prst="rect">
+            <a:avLst/>
+          </a:prstGeom>
+          <a:noFill/>
+          <a:ln/>
+        </p:spPr>
+        <p:txBody>
+          <a:bodyPr wrap="square" lIns="0" tIns="0" rIns="0" bIns="0" rtlCol="0" anchor="ctr"/>
+          <a:lstStyle/>
+          <a:p>
+            <a:pPr algn="r" indent="0" marL="0">
+              <a:buNone/>
+            </a:pPr>
+            <a:r>
+              <a:rPr lang="en-US" sz="1200" dirty="0">
+                <a:solidFill>
+                  <a:srgbClr val="9AA3AD"/>
+                </a:solidFill>
+                <a:latin typeface="Inter" pitchFamily="34" charset="0"/>
+                <a:ea typeface="Inter" pitchFamily="34" charset="-122"/>
+                <a:cs typeface="Inter" pitchFamily="34" charset="-120"/>
+              </a:rPr>
+              <a:t>28</a:t>
+            </a:r>
+            <a:endParaRPr lang="en-US" sz="1200" dirty="0"/>
+          </a:p>
+        </p:txBody>
+      </p:sp>
+      <p:sp>
+        <p:nvSpPr>
+          <p:cNvPr id="175" name="Text 173"/>
+          <p:cNvSpPr txBox="1"/>
+          <p:nvPr/>
+        </p:nvSpPr>
+        <p:spPr>
+          <a:xfrm>
+            <a:off x="6565392" y="4185800"/>
+            <a:ext cx="1783080" cy="248502"/>
           </a:xfrm>
           <a:prstGeom prst="rect">
             <a:avLst/>
@@ -6053,14 +7145,14 @@
       </p:sp>
       <p:sp>
         <p:nvSpPr>
-          <p:cNvPr id="148" name="Shape 146"/>
+          <p:cNvPr id="176" name="Shape 174"/>
           <p:cNvSpPr/>
           <p:nvPr/>
         </p:nvSpPr>
         <p:spPr>
           <a:xfrm>
-            <a:off x="8220456" y="4241713"/>
-            <a:ext cx="73988" cy="136676"/>
+            <a:off x="8421624" y="4241713"/>
+            <a:ext cx="58266" cy="136676"/>
           </a:xfrm>
           <a:prstGeom prst="rect">
             <a:avLst/>
@@ -6073,13 +7165,13 @@
       </p:sp>
       <p:sp>
         <p:nvSpPr>
-          <p:cNvPr id="149" name="Text 147"/>
-          <p:cNvSpPr txBox="1"/>
-          <p:nvPr/>
-        </p:nvSpPr>
-        <p:spPr>
-          <a:xfrm>
-            <a:off x="9006840" y="4185800"/>
+          <p:cNvPr id="177" name="Text 175"/>
+          <p:cNvSpPr txBox="1"/>
+          <p:nvPr/>
+        </p:nvSpPr>
+        <p:spPr>
+          <a:xfrm>
+            <a:off x="9052560" y="4185800"/>
             <a:ext cx="914400" cy="248502"/>
           </a:xfrm>
           <a:prstGeom prst="rect">
@@ -6112,13 +7204,13 @@
       </p:sp>
       <p:sp>
         <p:nvSpPr>
-          <p:cNvPr id="150" name="Text 148"/>
-          <p:cNvSpPr txBox="1"/>
-          <p:nvPr/>
-        </p:nvSpPr>
-        <p:spPr>
-          <a:xfrm>
-            <a:off x="9921240" y="4185800"/>
+          <p:cNvPr id="178" name="Text 176"/>
+          <p:cNvSpPr txBox="1"/>
+          <p:nvPr/>
+        </p:nvSpPr>
+        <p:spPr>
+          <a:xfrm>
+            <a:off x="9966960" y="4185800"/>
             <a:ext cx="749808" cy="248502"/>
           </a:xfrm>
           <a:prstGeom prst="rect">
@@ -6151,13 +7243,13 @@
       </p:sp>
       <p:sp>
         <p:nvSpPr>
-          <p:cNvPr id="151" name="Text 149"/>
-          <p:cNvSpPr txBox="1"/>
-          <p:nvPr/>
-        </p:nvSpPr>
-        <p:spPr>
-          <a:xfrm>
-            <a:off x="10671048" y="4185800"/>
+          <p:cNvPr id="179" name="Text 177"/>
+          <p:cNvSpPr txBox="1"/>
+          <p:nvPr/>
+        </p:nvSpPr>
+        <p:spPr>
+          <a:xfrm>
+            <a:off x="10716768" y="4185800"/>
             <a:ext cx="749808" cy="248502"/>
           </a:xfrm>
           <a:prstGeom prst="rect">
@@ -6190,14 +7282,53 @@
       </p:sp>
       <p:sp>
         <p:nvSpPr>
-          <p:cNvPr id="152" name="Text 150"/>
+          <p:cNvPr id="180" name="Text 178"/>
           <p:cNvSpPr txBox="1"/>
           <p:nvPr/>
         </p:nvSpPr>
         <p:spPr>
           <a:xfrm>
             <a:off x="6208776" y="4434302"/>
-            <a:ext cx="1938528" cy="248502"/>
+            <a:ext cx="310896" cy="248502"/>
+          </a:xfrm>
+          <a:prstGeom prst="rect">
+            <a:avLst/>
+          </a:prstGeom>
+          <a:noFill/>
+          <a:ln/>
+        </p:spPr>
+        <p:txBody>
+          <a:bodyPr wrap="square" lIns="0" tIns="0" rIns="0" bIns="0" rtlCol="0" anchor="ctr"/>
+          <a:lstStyle/>
+          <a:p>
+            <a:pPr algn="r" indent="0" marL="0">
+              <a:buNone/>
+            </a:pPr>
+            <a:r>
+              <a:rPr lang="en-US" sz="1200" dirty="0">
+                <a:solidFill>
+                  <a:srgbClr val="9AA3AD"/>
+                </a:solidFill>
+                <a:latin typeface="Inter" pitchFamily="34" charset="0"/>
+                <a:ea typeface="Inter" pitchFamily="34" charset="-122"/>
+                <a:cs typeface="Inter" pitchFamily="34" charset="-120"/>
+              </a:rPr>
+              <a:t>29</a:t>
+            </a:r>
+            <a:endParaRPr lang="en-US" sz="1200" dirty="0"/>
+          </a:p>
+        </p:txBody>
+      </p:sp>
+      <p:sp>
+        <p:nvSpPr>
+          <p:cNvPr id="181" name="Text 179"/>
+          <p:cNvSpPr txBox="1"/>
+          <p:nvPr/>
+        </p:nvSpPr>
+        <p:spPr>
+          <a:xfrm>
+            <a:off x="6565392" y="4434302"/>
+            <a:ext cx="1783080" cy="248502"/>
           </a:xfrm>
           <a:prstGeom prst="rect">
             <a:avLst/>
@@ -6229,14 +7360,14 @@
       </p:sp>
       <p:sp>
         <p:nvSpPr>
-          <p:cNvPr id="153" name="Shape 151"/>
+          <p:cNvPr id="182" name="Shape 180"/>
           <p:cNvSpPr/>
           <p:nvPr/>
         </p:nvSpPr>
         <p:spPr>
           <a:xfrm>
-            <a:off x="8220456" y="4490215"/>
-            <a:ext cx="73497" cy="136676"/>
+            <a:off x="8421624" y="4490215"/>
+            <a:ext cx="57879" cy="136676"/>
           </a:xfrm>
           <a:prstGeom prst="rect">
             <a:avLst/>
@@ -6249,13 +7380,13 @@
       </p:sp>
       <p:sp>
         <p:nvSpPr>
-          <p:cNvPr id="154" name="Text 152"/>
-          <p:cNvSpPr txBox="1"/>
-          <p:nvPr/>
-        </p:nvSpPr>
-        <p:spPr>
-          <a:xfrm>
-            <a:off x="9006840" y="4434302"/>
+          <p:cNvPr id="183" name="Text 181"/>
+          <p:cNvSpPr txBox="1"/>
+          <p:nvPr/>
+        </p:nvSpPr>
+        <p:spPr>
+          <a:xfrm>
+            <a:off x="9052560" y="4434302"/>
             <a:ext cx="914400" cy="248502"/>
           </a:xfrm>
           <a:prstGeom prst="rect">
@@ -6288,13 +7419,13 @@
       </p:sp>
       <p:sp>
         <p:nvSpPr>
-          <p:cNvPr id="155" name="Text 153"/>
-          <p:cNvSpPr txBox="1"/>
-          <p:nvPr/>
-        </p:nvSpPr>
-        <p:spPr>
-          <a:xfrm>
-            <a:off x="9921240" y="4434302"/>
+          <p:cNvPr id="184" name="Text 182"/>
+          <p:cNvSpPr txBox="1"/>
+          <p:nvPr/>
+        </p:nvSpPr>
+        <p:spPr>
+          <a:xfrm>
+            <a:off x="9966960" y="4434302"/>
             <a:ext cx="749808" cy="248502"/>
           </a:xfrm>
           <a:prstGeom prst="rect">
@@ -6327,13 +7458,13 @@
       </p:sp>
       <p:sp>
         <p:nvSpPr>
-          <p:cNvPr id="156" name="Text 154"/>
-          <p:cNvSpPr txBox="1"/>
-          <p:nvPr/>
-        </p:nvSpPr>
-        <p:spPr>
-          <a:xfrm>
-            <a:off x="10671048" y="4434302"/>
+          <p:cNvPr id="185" name="Text 183"/>
+          <p:cNvSpPr txBox="1"/>
+          <p:nvPr/>
+        </p:nvSpPr>
+        <p:spPr>
+          <a:xfrm>
+            <a:off x="10716768" y="4434302"/>
             <a:ext cx="749808" cy="248502"/>
           </a:xfrm>
           <a:prstGeom prst="rect">
@@ -6366,14 +7497,53 @@
       </p:sp>
       <p:sp>
         <p:nvSpPr>
-          <p:cNvPr id="157" name="Text 155"/>
+          <p:cNvPr id="186" name="Text 184"/>
           <p:cNvSpPr txBox="1"/>
           <p:nvPr/>
         </p:nvSpPr>
         <p:spPr>
           <a:xfrm>
             <a:off x="6208776" y="4682804"/>
-            <a:ext cx="1938528" cy="248502"/>
+            <a:ext cx="310896" cy="248502"/>
+          </a:xfrm>
+          <a:prstGeom prst="rect">
+            <a:avLst/>
+          </a:prstGeom>
+          <a:noFill/>
+          <a:ln/>
+        </p:spPr>
+        <p:txBody>
+          <a:bodyPr wrap="square" lIns="0" tIns="0" rIns="0" bIns="0" rtlCol="0" anchor="ctr"/>
+          <a:lstStyle/>
+          <a:p>
+            <a:pPr algn="r" indent="0" marL="0">
+              <a:buNone/>
+            </a:pPr>
+            <a:r>
+              <a:rPr lang="en-US" sz="1200" dirty="0">
+                <a:solidFill>
+                  <a:srgbClr val="9AA3AD"/>
+                </a:solidFill>
+                <a:latin typeface="Inter" pitchFamily="34" charset="0"/>
+                <a:ea typeface="Inter" pitchFamily="34" charset="-122"/>
+                <a:cs typeface="Inter" pitchFamily="34" charset="-120"/>
+              </a:rPr>
+              <a:t>30</a:t>
+            </a:r>
+            <a:endParaRPr lang="en-US" sz="1200" dirty="0"/>
+          </a:p>
+        </p:txBody>
+      </p:sp>
+      <p:sp>
+        <p:nvSpPr>
+          <p:cNvPr id="187" name="Text 185"/>
+          <p:cNvSpPr txBox="1"/>
+          <p:nvPr/>
+        </p:nvSpPr>
+        <p:spPr>
+          <a:xfrm>
+            <a:off x="6565392" y="4682804"/>
+            <a:ext cx="1783080" cy="248502"/>
           </a:xfrm>
           <a:prstGeom prst="rect">
             <a:avLst/>
@@ -6405,14 +7575,14 @@
       </p:sp>
       <p:sp>
         <p:nvSpPr>
-          <p:cNvPr id="158" name="Shape 156"/>
+          <p:cNvPr id="188" name="Shape 186"/>
           <p:cNvSpPr/>
           <p:nvPr/>
         </p:nvSpPr>
         <p:spPr>
           <a:xfrm>
-            <a:off x="8220456" y="4738717"/>
-            <a:ext cx="71484" cy="136676"/>
+            <a:off x="8421624" y="4738717"/>
+            <a:ext cx="56293" cy="136676"/>
           </a:xfrm>
           <a:prstGeom prst="rect">
             <a:avLst/>
@@ -6425,13 +7595,13 @@
       </p:sp>
       <p:sp>
         <p:nvSpPr>
-          <p:cNvPr id="159" name="Text 157"/>
-          <p:cNvSpPr txBox="1"/>
-          <p:nvPr/>
-        </p:nvSpPr>
-        <p:spPr>
-          <a:xfrm>
-            <a:off x="9006840" y="4682804"/>
+          <p:cNvPr id="189" name="Text 187"/>
+          <p:cNvSpPr txBox="1"/>
+          <p:nvPr/>
+        </p:nvSpPr>
+        <p:spPr>
+          <a:xfrm>
+            <a:off x="9052560" y="4682804"/>
             <a:ext cx="914400" cy="248502"/>
           </a:xfrm>
           <a:prstGeom prst="rect">
@@ -6464,13 +7634,13 @@
       </p:sp>
       <p:sp>
         <p:nvSpPr>
-          <p:cNvPr id="160" name="Text 158"/>
-          <p:cNvSpPr txBox="1"/>
-          <p:nvPr/>
-        </p:nvSpPr>
-        <p:spPr>
-          <a:xfrm>
-            <a:off x="9921240" y="4682804"/>
+          <p:cNvPr id="190" name="Text 188"/>
+          <p:cNvSpPr txBox="1"/>
+          <p:nvPr/>
+        </p:nvSpPr>
+        <p:spPr>
+          <a:xfrm>
+            <a:off x="9966960" y="4682804"/>
             <a:ext cx="749808" cy="248502"/>
           </a:xfrm>
           <a:prstGeom prst="rect">
@@ -6503,13 +7673,13 @@
       </p:sp>
       <p:sp>
         <p:nvSpPr>
-          <p:cNvPr id="161" name="Text 159"/>
-          <p:cNvSpPr txBox="1"/>
-          <p:nvPr/>
-        </p:nvSpPr>
-        <p:spPr>
-          <a:xfrm>
-            <a:off x="10671048" y="4682804"/>
+          <p:cNvPr id="191" name="Text 189"/>
+          <p:cNvSpPr txBox="1"/>
+          <p:nvPr/>
+        </p:nvSpPr>
+        <p:spPr>
+          <a:xfrm>
+            <a:off x="10716768" y="4682804"/>
             <a:ext cx="749808" cy="248502"/>
           </a:xfrm>
           <a:prstGeom prst="rect">
@@ -6542,14 +7712,53 @@
       </p:sp>
       <p:sp>
         <p:nvSpPr>
-          <p:cNvPr id="162" name="Text 160"/>
+          <p:cNvPr id="192" name="Text 190"/>
           <p:cNvSpPr txBox="1"/>
           <p:nvPr/>
         </p:nvSpPr>
         <p:spPr>
           <a:xfrm>
             <a:off x="6208776" y="4931305"/>
-            <a:ext cx="1938528" cy="248502"/>
+            <a:ext cx="310896" cy="248502"/>
+          </a:xfrm>
+          <a:prstGeom prst="rect">
+            <a:avLst/>
+          </a:prstGeom>
+          <a:noFill/>
+          <a:ln/>
+        </p:spPr>
+        <p:txBody>
+          <a:bodyPr wrap="square" lIns="0" tIns="0" rIns="0" bIns="0" rtlCol="0" anchor="ctr"/>
+          <a:lstStyle/>
+          <a:p>
+            <a:pPr algn="r" indent="0" marL="0">
+              <a:buNone/>
+            </a:pPr>
+            <a:r>
+              <a:rPr lang="en-US" sz="1200" dirty="0">
+                <a:solidFill>
+                  <a:srgbClr val="9AA3AD"/>
+                </a:solidFill>
+                <a:latin typeface="Inter" pitchFamily="34" charset="0"/>
+                <a:ea typeface="Inter" pitchFamily="34" charset="-122"/>
+                <a:cs typeface="Inter" pitchFamily="34" charset="-120"/>
+              </a:rPr>
+              <a:t>31</a:t>
+            </a:r>
+            <a:endParaRPr lang="en-US" sz="1200" dirty="0"/>
+          </a:p>
+        </p:txBody>
+      </p:sp>
+      <p:sp>
+        <p:nvSpPr>
+          <p:cNvPr id="193" name="Text 191"/>
+          <p:cNvSpPr txBox="1"/>
+          <p:nvPr/>
+        </p:nvSpPr>
+        <p:spPr>
+          <a:xfrm>
+            <a:off x="6565392" y="4931305"/>
+            <a:ext cx="1783080" cy="248502"/>
           </a:xfrm>
           <a:prstGeom prst="rect">
             <a:avLst/>
@@ -6581,14 +7790,14 @@
       </p:sp>
       <p:sp>
         <p:nvSpPr>
-          <p:cNvPr id="163" name="Shape 161"/>
+          <p:cNvPr id="194" name="Shape 192"/>
           <p:cNvSpPr/>
           <p:nvPr/>
         </p:nvSpPr>
         <p:spPr>
           <a:xfrm>
-            <a:off x="8220456" y="4987218"/>
-            <a:ext cx="51544" cy="136676"/>
+            <a:off x="8421624" y="4987218"/>
+            <a:ext cx="40591" cy="136676"/>
           </a:xfrm>
           <a:prstGeom prst="rect">
             <a:avLst/>
@@ -6601,13 +7810,13 @@
       </p:sp>
       <p:sp>
         <p:nvSpPr>
-          <p:cNvPr id="164" name="Text 162"/>
-          <p:cNvSpPr txBox="1"/>
-          <p:nvPr/>
-        </p:nvSpPr>
-        <p:spPr>
-          <a:xfrm>
-            <a:off x="9006840" y="4931305"/>
+          <p:cNvPr id="195" name="Text 193"/>
+          <p:cNvSpPr txBox="1"/>
+          <p:nvPr/>
+        </p:nvSpPr>
+        <p:spPr>
+          <a:xfrm>
+            <a:off x="9052560" y="4931305"/>
             <a:ext cx="914400" cy="248502"/>
           </a:xfrm>
           <a:prstGeom prst="rect">
@@ -6640,13 +7849,13 @@
       </p:sp>
       <p:sp>
         <p:nvSpPr>
-          <p:cNvPr id="165" name="Text 163"/>
-          <p:cNvSpPr txBox="1"/>
-          <p:nvPr/>
-        </p:nvSpPr>
-        <p:spPr>
-          <a:xfrm>
-            <a:off x="9921240" y="4931305"/>
+          <p:cNvPr id="196" name="Text 194"/>
+          <p:cNvSpPr txBox="1"/>
+          <p:nvPr/>
+        </p:nvSpPr>
+        <p:spPr>
+          <a:xfrm>
+            <a:off x="9966960" y="4931305"/>
             <a:ext cx="749808" cy="248502"/>
           </a:xfrm>
           <a:prstGeom prst="rect">
@@ -6679,13 +7888,13 @@
       </p:sp>
       <p:sp>
         <p:nvSpPr>
-          <p:cNvPr id="166" name="Text 164"/>
-          <p:cNvSpPr txBox="1"/>
-          <p:nvPr/>
-        </p:nvSpPr>
-        <p:spPr>
-          <a:xfrm>
-            <a:off x="10671048" y="4931305"/>
+          <p:cNvPr id="197" name="Text 195"/>
+          <p:cNvSpPr txBox="1"/>
+          <p:nvPr/>
+        </p:nvSpPr>
+        <p:spPr>
+          <a:xfrm>
+            <a:off x="10716768" y="4931305"/>
             <a:ext cx="749808" cy="248502"/>
           </a:xfrm>
           <a:prstGeom prst="rect">
@@ -6718,14 +7927,53 @@
       </p:sp>
       <p:sp>
         <p:nvSpPr>
-          <p:cNvPr id="167" name="Text 165"/>
+          <p:cNvPr id="198" name="Text 196"/>
           <p:cNvSpPr txBox="1"/>
           <p:nvPr/>
         </p:nvSpPr>
         <p:spPr>
           <a:xfrm>
             <a:off x="6208776" y="5179807"/>
-            <a:ext cx="1938528" cy="248502"/>
+            <a:ext cx="310896" cy="248502"/>
+          </a:xfrm>
+          <a:prstGeom prst="rect">
+            <a:avLst/>
+          </a:prstGeom>
+          <a:noFill/>
+          <a:ln/>
+        </p:spPr>
+        <p:txBody>
+          <a:bodyPr wrap="square" lIns="0" tIns="0" rIns="0" bIns="0" rtlCol="0" anchor="ctr"/>
+          <a:lstStyle/>
+          <a:p>
+            <a:pPr algn="r" indent="0" marL="0">
+              <a:buNone/>
+            </a:pPr>
+            <a:r>
+              <a:rPr lang="en-US" sz="1200" dirty="0">
+                <a:solidFill>
+                  <a:srgbClr val="9AA3AD"/>
+                </a:solidFill>
+                <a:latin typeface="Inter" pitchFamily="34" charset="0"/>
+                <a:ea typeface="Inter" pitchFamily="34" charset="-122"/>
+                <a:cs typeface="Inter" pitchFamily="34" charset="-120"/>
+              </a:rPr>
+              <a:t>32</a:t>
+            </a:r>
+            <a:endParaRPr lang="en-US" sz="1200" dirty="0"/>
+          </a:p>
+        </p:txBody>
+      </p:sp>
+      <p:sp>
+        <p:nvSpPr>
+          <p:cNvPr id="199" name="Text 197"/>
+          <p:cNvSpPr txBox="1"/>
+          <p:nvPr/>
+        </p:nvSpPr>
+        <p:spPr>
+          <a:xfrm>
+            <a:off x="6565392" y="5179807"/>
+            <a:ext cx="1783080" cy="248502"/>
           </a:xfrm>
           <a:prstGeom prst="rect">
             <a:avLst/>
@@ -6757,14 +8005,14 @@
       </p:sp>
       <p:sp>
         <p:nvSpPr>
-          <p:cNvPr id="168" name="Shape 166"/>
+          <p:cNvPr id="200" name="Shape 198"/>
           <p:cNvSpPr/>
           <p:nvPr/>
         </p:nvSpPr>
         <p:spPr>
           <a:xfrm>
-            <a:off x="8220456" y="5235720"/>
-            <a:ext cx="49708" cy="136676"/>
+            <a:off x="8421624" y="5235720"/>
+            <a:ext cx="39145" cy="136676"/>
           </a:xfrm>
           <a:prstGeom prst="rect">
             <a:avLst/>
@@ -6777,13 +8025,13 @@
       </p:sp>
       <p:sp>
         <p:nvSpPr>
-          <p:cNvPr id="169" name="Text 167"/>
-          <p:cNvSpPr txBox="1"/>
-          <p:nvPr/>
-        </p:nvSpPr>
-        <p:spPr>
-          <a:xfrm>
-            <a:off x="9006840" y="5179807"/>
+          <p:cNvPr id="201" name="Text 199"/>
+          <p:cNvSpPr txBox="1"/>
+          <p:nvPr/>
+        </p:nvSpPr>
+        <p:spPr>
+          <a:xfrm>
+            <a:off x="9052560" y="5179807"/>
             <a:ext cx="914400" cy="248502"/>
           </a:xfrm>
           <a:prstGeom prst="rect">
@@ -6816,13 +8064,13 @@
       </p:sp>
       <p:sp>
         <p:nvSpPr>
-          <p:cNvPr id="170" name="Text 168"/>
-          <p:cNvSpPr txBox="1"/>
-          <p:nvPr/>
-        </p:nvSpPr>
-        <p:spPr>
-          <a:xfrm>
-            <a:off x="9921240" y="5179807"/>
+          <p:cNvPr id="202" name="Text 200"/>
+          <p:cNvSpPr txBox="1"/>
+          <p:nvPr/>
+        </p:nvSpPr>
+        <p:spPr>
+          <a:xfrm>
+            <a:off x="9966960" y="5179807"/>
             <a:ext cx="749808" cy="248502"/>
           </a:xfrm>
           <a:prstGeom prst="rect">
@@ -6855,13 +8103,13 @@
       </p:sp>
       <p:sp>
         <p:nvSpPr>
-          <p:cNvPr id="171" name="Text 169"/>
-          <p:cNvSpPr txBox="1"/>
-          <p:nvPr/>
-        </p:nvSpPr>
-        <p:spPr>
-          <a:xfrm>
-            <a:off x="10671048" y="5179807"/>
+          <p:cNvPr id="203" name="Text 201"/>
+          <p:cNvSpPr txBox="1"/>
+          <p:nvPr/>
+        </p:nvSpPr>
+        <p:spPr>
+          <a:xfrm>
+            <a:off x="10716768" y="5179807"/>
             <a:ext cx="749808" cy="248502"/>
           </a:xfrm>
           <a:prstGeom prst="rect">
@@ -6894,14 +8142,53 @@
       </p:sp>
       <p:sp>
         <p:nvSpPr>
-          <p:cNvPr id="172" name="Text 170"/>
+          <p:cNvPr id="204" name="Text 202"/>
           <p:cNvSpPr txBox="1"/>
           <p:nvPr/>
         </p:nvSpPr>
         <p:spPr>
           <a:xfrm>
             <a:off x="6208776" y="5428309"/>
-            <a:ext cx="1938528" cy="248502"/>
+            <a:ext cx="310896" cy="248502"/>
+          </a:xfrm>
+          <a:prstGeom prst="rect">
+            <a:avLst/>
+          </a:prstGeom>
+          <a:noFill/>
+          <a:ln/>
+        </p:spPr>
+        <p:txBody>
+          <a:bodyPr wrap="square" lIns="0" tIns="0" rIns="0" bIns="0" rtlCol="0" anchor="ctr"/>
+          <a:lstStyle/>
+          <a:p>
+            <a:pPr algn="r" indent="0" marL="0">
+              <a:buNone/>
+            </a:pPr>
+            <a:r>
+              <a:rPr lang="en-US" sz="1200" dirty="0">
+                <a:solidFill>
+                  <a:srgbClr val="9AA3AD"/>
+                </a:solidFill>
+                <a:latin typeface="Inter" pitchFamily="34" charset="0"/>
+                <a:ea typeface="Inter" pitchFamily="34" charset="-122"/>
+                <a:cs typeface="Inter" pitchFamily="34" charset="-120"/>
+              </a:rPr>
+              <a:t>33</a:t>
+            </a:r>
+            <a:endParaRPr lang="en-US" sz="1200" dirty="0"/>
+          </a:p>
+        </p:txBody>
+      </p:sp>
+      <p:sp>
+        <p:nvSpPr>
+          <p:cNvPr id="205" name="Text 203"/>
+          <p:cNvSpPr txBox="1"/>
+          <p:nvPr/>
+        </p:nvSpPr>
+        <p:spPr>
+          <a:xfrm>
+            <a:off x="6565392" y="5428309"/>
+            <a:ext cx="1783080" cy="248502"/>
           </a:xfrm>
           <a:prstGeom prst="rect">
             <a:avLst/>
@@ -6933,14 +8220,14 @@
       </p:sp>
       <p:sp>
         <p:nvSpPr>
-          <p:cNvPr id="173" name="Shape 171"/>
+          <p:cNvPr id="206" name="Shape 204"/>
           <p:cNvSpPr/>
           <p:nvPr/>
         </p:nvSpPr>
         <p:spPr>
           <a:xfrm>
-            <a:off x="8220456" y="5484222"/>
-            <a:ext cx="31342" cy="136676"/>
+            <a:off x="8421624" y="5484222"/>
+            <a:ext cx="24682" cy="136676"/>
           </a:xfrm>
           <a:prstGeom prst="rect">
             <a:avLst/>
@@ -6953,13 +8240,13 @@
       </p:sp>
       <p:sp>
         <p:nvSpPr>
-          <p:cNvPr id="174" name="Text 172"/>
-          <p:cNvSpPr txBox="1"/>
-          <p:nvPr/>
-        </p:nvSpPr>
-        <p:spPr>
-          <a:xfrm>
-            <a:off x="9006840" y="5428309"/>
+          <p:cNvPr id="207" name="Text 205"/>
+          <p:cNvSpPr txBox="1"/>
+          <p:nvPr/>
+        </p:nvSpPr>
+        <p:spPr>
+          <a:xfrm>
+            <a:off x="9052560" y="5428309"/>
             <a:ext cx="914400" cy="248502"/>
           </a:xfrm>
           <a:prstGeom prst="rect">
@@ -6992,13 +8279,13 @@
       </p:sp>
       <p:sp>
         <p:nvSpPr>
-          <p:cNvPr id="175" name="Text 173"/>
-          <p:cNvSpPr txBox="1"/>
-          <p:nvPr/>
-        </p:nvSpPr>
-        <p:spPr>
-          <a:xfrm>
-            <a:off x="9921240" y="5428309"/>
+          <p:cNvPr id="208" name="Text 206"/>
+          <p:cNvSpPr txBox="1"/>
+          <p:nvPr/>
+        </p:nvSpPr>
+        <p:spPr>
+          <a:xfrm>
+            <a:off x="9966960" y="5428309"/>
             <a:ext cx="749808" cy="248502"/>
           </a:xfrm>
           <a:prstGeom prst="rect">
@@ -7031,13 +8318,13 @@
       </p:sp>
       <p:sp>
         <p:nvSpPr>
-          <p:cNvPr id="176" name="Text 174"/>
-          <p:cNvSpPr txBox="1"/>
-          <p:nvPr/>
-        </p:nvSpPr>
-        <p:spPr>
-          <a:xfrm>
-            <a:off x="10671048" y="5428309"/>
+          <p:cNvPr id="209" name="Text 207"/>
+          <p:cNvSpPr txBox="1"/>
+          <p:nvPr/>
+        </p:nvSpPr>
+        <p:spPr>
+          <a:xfrm>
+            <a:off x="10716768" y="5428309"/>
             <a:ext cx="749808" cy="248502"/>
           </a:xfrm>
           <a:prstGeom prst="rect">
@@ -7070,7 +8357,27 @@
       </p:sp>
       <p:sp>
         <p:nvSpPr>
-          <p:cNvPr id="177" name="Shape 175"/>
+          <p:cNvPr id="210" name="Shape 208"/>
+          <p:cNvSpPr/>
+          <p:nvPr/>
+        </p:nvSpPr>
+        <p:spPr>
+          <a:xfrm>
+            <a:off x="6085332" y="1700784"/>
+            <a:ext cx="10973" cy="4224528"/>
+          </a:xfrm>
+          <a:prstGeom prst="rect">
+            <a:avLst/>
+          </a:prstGeom>
+          <a:solidFill>
+            <a:srgbClr val="D9D9D9"/>
+          </a:solidFill>
+          <a:ln/>
+        </p:spPr>
+      </p:sp>
+      <p:sp>
+        <p:nvSpPr>
+          <p:cNvPr id="211" name="Shape 209"/>
           <p:cNvSpPr/>
           <p:nvPr/>
         </p:nvSpPr>
@@ -7090,7 +8397,7 @@
       </p:sp>
       <p:sp>
         <p:nvSpPr>
-          <p:cNvPr id="178" name="Text 176"/>
+          <p:cNvPr id="212" name="Text 210"/>
           <p:cNvSpPr txBox="1"/>
           <p:nvPr/>
         </p:nvSpPr>

--- a/day2-deck/decks/Fixed Gross per Employee 5 Pct - Review.pptx
+++ b/day2-deck/decks/Fixed Gross per Employee 5 Pct - Review.pptx
@@ -1324,7 +1324,7 @@
               <a:buNone/>
             </a:pPr>
             <a:r>
-              <a:rPr lang="en-US" sz="1300" dirty="0">
+              <a:rPr lang="en-US" sz="1200" dirty="0">
                 <a:solidFill>
                   <a:srgbClr val="1A1A1A"/>
                 </a:solidFill>
@@ -1334,7 +1334,7 @@
               </a:rPr>
               <a:t>TOYOTA HENDERSON</a:t>
             </a:r>
-            <a:endParaRPr lang="en-US" sz="1300" dirty="0"/>
+            <a:endParaRPr lang="en-US" sz="1200" dirty="0"/>
           </a:p>
         </p:txBody>
       </p:sp>
@@ -1539,7 +1539,7 @@
               <a:buNone/>
             </a:pPr>
             <a:r>
-              <a:rPr lang="en-US" sz="1300" dirty="0">
+              <a:rPr lang="en-US" sz="1200" dirty="0">
                 <a:solidFill>
                   <a:srgbClr val="1A1A1A"/>
                 </a:solidFill>
@@ -1549,7 +1549,7 @@
               </a:rPr>
               <a:t>CHEVY LV</a:t>
             </a:r>
-            <a:endParaRPr lang="en-US" sz="1300" dirty="0"/>
+            <a:endParaRPr lang="en-US" sz="1200" dirty="0"/>
           </a:p>
         </p:txBody>
       </p:sp>
@@ -1754,7 +1754,7 @@
               <a:buNone/>
             </a:pPr>
             <a:r>
-              <a:rPr lang="en-US" sz="1300" dirty="0">
+              <a:rPr lang="en-US" sz="1200" dirty="0">
                 <a:solidFill>
                   <a:srgbClr val="1A1A1A"/>
                 </a:solidFill>
@@ -1764,7 +1764,7 @@
               </a:rPr>
               <a:t>HONDA HENDERSON</a:t>
             </a:r>
-            <a:endParaRPr lang="en-US" sz="1300" dirty="0"/>
+            <a:endParaRPr lang="en-US" sz="1200" dirty="0"/>
           </a:p>
         </p:txBody>
       </p:sp>
@@ -1969,7 +1969,7 @@
               <a:buNone/>
             </a:pPr>
             <a:r>
-              <a:rPr lang="en-US" sz="1300" dirty="0">
+              <a:rPr lang="en-US" sz="1200" dirty="0">
                 <a:solidFill>
                   <a:srgbClr val="1A1A1A"/>
                 </a:solidFill>
@@ -1979,7 +1979,7 @@
               </a:rPr>
               <a:t>AUDI HENDERSON</a:t>
             </a:r>
-            <a:endParaRPr lang="en-US" sz="1300" dirty="0"/>
+            <a:endParaRPr lang="en-US" sz="1200" dirty="0"/>
           </a:p>
         </p:txBody>
       </p:sp>
@@ -2184,7 +2184,7 @@
               <a:buNone/>
             </a:pPr>
             <a:r>
-              <a:rPr lang="en-US" sz="1300" dirty="0">
+              <a:rPr lang="en-US" sz="1200" dirty="0">
                 <a:solidFill>
                   <a:srgbClr val="1A1A1A"/>
                 </a:solidFill>
@@ -2194,7 +2194,7 @@
               </a:rPr>
               <a:t>SUBARU LV</a:t>
             </a:r>
-            <a:endParaRPr lang="en-US" sz="1300" dirty="0"/>
+            <a:endParaRPr lang="en-US" sz="1200" dirty="0"/>
           </a:p>
         </p:txBody>
       </p:sp>
@@ -2399,7 +2399,7 @@
               <a:buNone/>
             </a:pPr>
             <a:r>
-              <a:rPr lang="en-US" sz="1300" dirty="0">
+              <a:rPr lang="en-US" sz="1200" dirty="0">
                 <a:solidFill>
                   <a:srgbClr val="1A1A1A"/>
                 </a:solidFill>
@@ -2409,7 +2409,7 @@
               </a:rPr>
               <a:t>CADILLAC</a:t>
             </a:r>
-            <a:endParaRPr lang="en-US" sz="1300" dirty="0"/>
+            <a:endParaRPr lang="en-US" sz="1200" dirty="0"/>
           </a:p>
         </p:txBody>
       </p:sp>
@@ -2614,7 +2614,7 @@
               <a:buNone/>
             </a:pPr>
             <a:r>
-              <a:rPr lang="en-US" sz="1300" dirty="0">
+              <a:rPr lang="en-US" sz="1200" dirty="0">
                 <a:solidFill>
                   <a:srgbClr val="1A1A1A"/>
                 </a:solidFill>
@@ -2624,7 +2624,7 @@
               </a:rPr>
               <a:t>HONDA NORTH</a:t>
             </a:r>
-            <a:endParaRPr lang="en-US" sz="1300" dirty="0"/>
+            <a:endParaRPr lang="en-US" sz="1200" dirty="0"/>
           </a:p>
         </p:txBody>
       </p:sp>
@@ -2829,7 +2829,7 @@
               <a:buNone/>
             </a:pPr>
             <a:r>
-              <a:rPr lang="en-US" sz="1300" dirty="0">
+              <a:rPr lang="en-US" sz="1200" dirty="0">
                 <a:solidFill>
                   <a:srgbClr val="1A1A1A"/>
                 </a:solidFill>
@@ -2839,7 +2839,7 @@
               </a:rPr>
               <a:t>LR LV</a:t>
             </a:r>
-            <a:endParaRPr lang="en-US" sz="1300" dirty="0"/>
+            <a:endParaRPr lang="en-US" sz="1200" dirty="0"/>
           </a:p>
         </p:txBody>
       </p:sp>
@@ -3044,7 +3044,7 @@
               <a:buNone/>
             </a:pPr>
             <a:r>
-              <a:rPr lang="en-US" sz="1300" dirty="0">
+              <a:rPr lang="en-US" sz="1200" dirty="0">
                 <a:solidFill>
                   <a:srgbClr val="1A1A1A"/>
                 </a:solidFill>
@@ -3054,7 +3054,7 @@
               </a:rPr>
               <a:t>KIA LV</a:t>
             </a:r>
-            <a:endParaRPr lang="en-US" sz="1300" dirty="0"/>
+            <a:endParaRPr lang="en-US" sz="1200" dirty="0"/>
           </a:p>
         </p:txBody>
       </p:sp>
@@ -3259,7 +3259,7 @@
               <a:buNone/>
             </a:pPr>
             <a:r>
-              <a:rPr lang="en-US" sz="1300" dirty="0">
+              <a:rPr lang="en-US" sz="1200" dirty="0">
                 <a:solidFill>
                   <a:srgbClr val="1A1A1A"/>
                 </a:solidFill>
@@ -3269,7 +3269,7 @@
               </a:rPr>
               <a:t>TOYOTA SPOKANE</a:t>
             </a:r>
-            <a:endParaRPr lang="en-US" sz="1300" dirty="0"/>
+            <a:endParaRPr lang="en-US" sz="1200" dirty="0"/>
           </a:p>
         </p:txBody>
       </p:sp>
@@ -3474,7 +3474,7 @@
               <a:buNone/>
             </a:pPr>
             <a:r>
-              <a:rPr lang="en-US" sz="1300" dirty="0">
+              <a:rPr lang="en-US" sz="1200" dirty="0">
                 <a:solidFill>
                   <a:srgbClr val="1A1A1A"/>
                 </a:solidFill>
@@ -3484,7 +3484,7 @@
               </a:rPr>
               <a:t>TOYOTA PRESCOTT</a:t>
             </a:r>
-            <a:endParaRPr lang="en-US" sz="1300" dirty="0"/>
+            <a:endParaRPr lang="en-US" sz="1200" dirty="0"/>
           </a:p>
         </p:txBody>
       </p:sp>
@@ -3689,7 +3689,7 @@
               <a:buNone/>
             </a:pPr>
             <a:r>
-              <a:rPr lang="en-US" sz="1300" dirty="0">
+              <a:rPr lang="en-US" sz="1200" dirty="0">
                 <a:solidFill>
                   <a:srgbClr val="1A1A1A"/>
                 </a:solidFill>
@@ -3699,7 +3699,7 @@
               </a:rPr>
               <a:t>VW HENDERSON</a:t>
             </a:r>
-            <a:endParaRPr lang="en-US" sz="1300" dirty="0"/>
+            <a:endParaRPr lang="en-US" sz="1200" dirty="0"/>
           </a:p>
         </p:txBody>
       </p:sp>
@@ -3904,7 +3904,7 @@
               <a:buNone/>
             </a:pPr>
             <a:r>
-              <a:rPr lang="en-US" sz="1300" dirty="0">
+              <a:rPr lang="en-US" sz="1200" dirty="0">
                 <a:solidFill>
                   <a:srgbClr val="1A1A1A"/>
                 </a:solidFill>
@@ -3914,7 +3914,7 @@
               </a:rPr>
               <a:t>NISSAN</a:t>
             </a:r>
-            <a:endParaRPr lang="en-US" sz="1300" dirty="0"/>
+            <a:endParaRPr lang="en-US" sz="1200" dirty="0"/>
           </a:p>
         </p:txBody>
       </p:sp>
@@ -4119,7 +4119,7 @@
               <a:buNone/>
             </a:pPr>
             <a:r>
-              <a:rPr lang="en-US" sz="1300" dirty="0">
+              <a:rPr lang="en-US" sz="1200" dirty="0">
                 <a:solidFill>
                   <a:srgbClr val="1A1A1A"/>
                 </a:solidFill>
@@ -4129,7 +4129,7 @@
               </a:rPr>
               <a:t>CHEVY GMC BULLHEAD</a:t>
             </a:r>
-            <a:endParaRPr lang="en-US" sz="1300" dirty="0"/>
+            <a:endParaRPr lang="en-US" sz="1200" dirty="0"/>
           </a:p>
         </p:txBody>
       </p:sp>
@@ -4334,7 +4334,7 @@
               <a:buNone/>
             </a:pPr>
             <a:r>
-              <a:rPr lang="en-US" sz="1300" dirty="0">
+              <a:rPr lang="en-US" sz="1200" dirty="0">
                 <a:solidFill>
                   <a:srgbClr val="1A1A1A"/>
                 </a:solidFill>
@@ -4344,7 +4344,7 @@
               </a:rPr>
               <a:t>TOYOTA FLAGSTAFF</a:t>
             </a:r>
-            <a:endParaRPr lang="en-US" sz="1300" dirty="0"/>
+            <a:endParaRPr lang="en-US" sz="1200" dirty="0"/>
           </a:p>
         </p:txBody>
       </p:sp>
@@ -4549,7 +4549,7 @@
               <a:buNone/>
             </a:pPr>
             <a:r>
-              <a:rPr lang="en-US" sz="1300" dirty="0">
+              <a:rPr lang="en-US" sz="1200" dirty="0">
                 <a:solidFill>
                   <a:srgbClr val="1A1A1A"/>
                 </a:solidFill>
@@ -4559,7 +4559,7 @@
               </a:rPr>
               <a:t>AUDI RENO</a:t>
             </a:r>
-            <a:endParaRPr lang="en-US" sz="1300" dirty="0"/>
+            <a:endParaRPr lang="en-US" sz="1200" dirty="0"/>
           </a:p>
         </p:txBody>
       </p:sp>
@@ -4764,7 +4764,7 @@
               <a:buNone/>
             </a:pPr>
             <a:r>
-              <a:rPr lang="en-US" sz="1300" dirty="0">
+              <a:rPr lang="en-US" sz="1200" dirty="0">
                 <a:solidFill>
                   <a:srgbClr val="1A1A1A"/>
                 </a:solidFill>
@@ -4774,7 +4774,7 @@
               </a:rPr>
               <a:t>HONDA SPOKANE</a:t>
             </a:r>
-            <a:endParaRPr lang="en-US" sz="1300" dirty="0"/>
+            <a:endParaRPr lang="en-US" sz="1200" dirty="0"/>
           </a:p>
         </p:txBody>
       </p:sp>
@@ -4979,7 +4979,7 @@
               <a:buNone/>
             </a:pPr>
             <a:r>
-              <a:rPr lang="en-US" sz="1300" dirty="0">
+              <a:rPr lang="en-US" sz="1200" dirty="0">
                 <a:solidFill>
                   <a:srgbClr val="1A1A1A"/>
                 </a:solidFill>
@@ -4989,7 +4989,7 @@
               </a:rPr>
               <a:t>LEXUS</a:t>
             </a:r>
-            <a:endParaRPr lang="en-US" sz="1300" dirty="0"/>
+            <a:endParaRPr lang="en-US" sz="1200" dirty="0"/>
           </a:p>
         </p:txBody>
       </p:sp>
@@ -5194,7 +5194,7 @@
               <a:buNone/>
             </a:pPr>
             <a:r>
-              <a:rPr lang="en-US" sz="1300" dirty="0">
+              <a:rPr lang="en-US" sz="1200" dirty="0">
                 <a:solidFill>
                   <a:srgbClr val="1A1A1A"/>
                 </a:solidFill>
@@ -5204,7 +5204,7 @@
               </a:rPr>
               <a:t>VOLVO</a:t>
             </a:r>
-            <a:endParaRPr lang="en-US" sz="1300" dirty="0"/>
+            <a:endParaRPr lang="en-US" sz="1200" dirty="0"/>
           </a:p>
         </p:txBody>
       </p:sp>
@@ -5409,7 +5409,7 @@
               <a:buNone/>
             </a:pPr>
             <a:r>
-              <a:rPr lang="en-US" sz="1300" dirty="0">
+              <a:rPr lang="en-US" sz="1200" dirty="0">
                 <a:solidFill>
                   <a:srgbClr val="1A1A1A"/>
                 </a:solidFill>
@@ -5419,7 +5419,7 @@
               </a:rPr>
               <a:t>CDJR POST FALLS</a:t>
             </a:r>
-            <a:endParaRPr lang="en-US" sz="1300" dirty="0"/>
+            <a:endParaRPr lang="en-US" sz="1200" dirty="0"/>
           </a:p>
         </p:txBody>
       </p:sp>
@@ -5624,7 +5624,7 @@
               <a:buNone/>
             </a:pPr>
             <a:r>
-              <a:rPr lang="en-US" sz="1300" dirty="0">
+              <a:rPr lang="en-US" sz="1200" dirty="0">
                 <a:solidFill>
                   <a:srgbClr val="1A1A1A"/>
                 </a:solidFill>
@@ -5634,7 +5634,7 @@
               </a:rPr>
               <a:t>SUBARU ST GEORGE</a:t>
             </a:r>
-            <a:endParaRPr lang="en-US" sz="1300" dirty="0"/>
+            <a:endParaRPr lang="en-US" sz="1200" dirty="0"/>
           </a:p>
         </p:txBody>
       </p:sp>
@@ -5839,7 +5839,7 @@
               <a:buNone/>
             </a:pPr>
             <a:r>
-              <a:rPr lang="en-US" sz="1300" dirty="0">
+              <a:rPr lang="en-US" sz="1200" dirty="0">
                 <a:solidFill>
                   <a:srgbClr val="1A1A1A"/>
                 </a:solidFill>
@@ -5849,7 +5849,7 @@
               </a:rPr>
               <a:t>LR HENDERSON</a:t>
             </a:r>
-            <a:endParaRPr lang="en-US" sz="1300" dirty="0"/>
+            <a:endParaRPr lang="en-US" sz="1200" dirty="0"/>
           </a:p>
         </p:txBody>
       </p:sp>
@@ -6054,7 +6054,7 @@
               <a:buNone/>
             </a:pPr>
             <a:r>
-              <a:rPr lang="en-US" sz="1300" dirty="0">
+              <a:rPr lang="en-US" sz="1200" dirty="0">
                 <a:solidFill>
                   <a:srgbClr val="1A1A1A"/>
                 </a:solidFill>
@@ -6064,7 +6064,7 @@
               </a:rPr>
               <a:t>MAZDA</a:t>
             </a:r>
-            <a:endParaRPr lang="en-US" sz="1300" dirty="0"/>
+            <a:endParaRPr lang="en-US" sz="1200" dirty="0"/>
           </a:p>
         </p:txBody>
       </p:sp>
@@ -6269,7 +6269,7 @@
               <a:buNone/>
             </a:pPr>
             <a:r>
-              <a:rPr lang="en-US" sz="1300" dirty="0">
+              <a:rPr lang="en-US" sz="1200" dirty="0">
                 <a:solidFill>
                   <a:srgbClr val="1A1A1A"/>
                 </a:solidFill>
@@ -6279,7 +6279,7 @@
               </a:rPr>
               <a:t>LINCOLN</a:t>
             </a:r>
-            <a:endParaRPr lang="en-US" sz="1300" dirty="0"/>
+            <a:endParaRPr lang="en-US" sz="1200" dirty="0"/>
           </a:p>
         </p:txBody>
       </p:sp>
@@ -6484,7 +6484,7 @@
               <a:buNone/>
             </a:pPr>
             <a:r>
-              <a:rPr lang="en-US" sz="1300" dirty="0">
+              <a:rPr lang="en-US" sz="1200" dirty="0">
                 <a:solidFill>
                   <a:srgbClr val="1A1A1A"/>
                 </a:solidFill>
@@ -6494,7 +6494,7 @@
               </a:rPr>
               <a:t>ACURA</a:t>
             </a:r>
-            <a:endParaRPr lang="en-US" sz="1300" dirty="0"/>
+            <a:endParaRPr lang="en-US" sz="1200" dirty="0"/>
           </a:p>
         </p:txBody>
       </p:sp>
@@ -6699,7 +6699,7 @@
               <a:buNone/>
             </a:pPr>
             <a:r>
-              <a:rPr lang="en-US" sz="1300" dirty="0">
+              <a:rPr lang="en-US" sz="1200" dirty="0">
                 <a:solidFill>
                   <a:srgbClr val="1A1A1A"/>
                 </a:solidFill>
@@ -6709,7 +6709,7 @@
               </a:rPr>
               <a:t>SUBARU PRESCOTT</a:t>
             </a:r>
-            <a:endParaRPr lang="en-US" sz="1300" dirty="0"/>
+            <a:endParaRPr lang="en-US" sz="1200" dirty="0"/>
           </a:p>
         </p:txBody>
       </p:sp>
@@ -6914,7 +6914,7 @@
               <a:buNone/>
             </a:pPr>
             <a:r>
-              <a:rPr lang="en-US" sz="1300" dirty="0">
+              <a:rPr lang="en-US" sz="1200" dirty="0">
                 <a:solidFill>
                   <a:srgbClr val="1A1A1A"/>
                 </a:solidFill>
@@ -6924,7 +6924,7 @@
               </a:rPr>
               <a:t>KIA ST GEORGE</a:t>
             </a:r>
-            <a:endParaRPr lang="en-US" sz="1300" dirty="0"/>
+            <a:endParaRPr lang="en-US" sz="1200" dirty="0"/>
           </a:p>
         </p:txBody>
       </p:sp>
@@ -7129,7 +7129,7 @@
               <a:buNone/>
             </a:pPr>
             <a:r>
-              <a:rPr lang="en-US" sz="1300" dirty="0">
+              <a:rPr lang="en-US" sz="1200" dirty="0">
                 <a:solidFill>
                   <a:srgbClr val="1A1A1A"/>
                 </a:solidFill>
@@ -7139,7 +7139,7 @@
               </a:rPr>
               <a:t>HYUNDAI ST GEORGE</a:t>
             </a:r>
-            <a:endParaRPr lang="en-US" sz="1300" dirty="0"/>
+            <a:endParaRPr lang="en-US" sz="1200" dirty="0"/>
           </a:p>
         </p:txBody>
       </p:sp>
@@ -7344,7 +7344,7 @@
               <a:buNone/>
             </a:pPr>
             <a:r>
-              <a:rPr lang="en-US" sz="1300" dirty="0">
+              <a:rPr lang="en-US" sz="1200" dirty="0">
                 <a:solidFill>
                   <a:srgbClr val="1A1A1A"/>
                 </a:solidFill>
@@ -7354,7 +7354,7 @@
               </a:rPr>
               <a:t>GMC PRESCOTT</a:t>
             </a:r>
-            <a:endParaRPr lang="en-US" sz="1300" dirty="0"/>
+            <a:endParaRPr lang="en-US" sz="1200" dirty="0"/>
           </a:p>
         </p:txBody>
       </p:sp>
@@ -7559,7 +7559,7 @@
               <a:buNone/>
             </a:pPr>
             <a:r>
-              <a:rPr lang="en-US" sz="1300" dirty="0">
+              <a:rPr lang="en-US" sz="1200" dirty="0">
                 <a:solidFill>
                   <a:srgbClr val="1A1A1A"/>
                 </a:solidFill>
@@ -7569,7 +7569,7 @@
               </a:rPr>
               <a:t>LR RENO</a:t>
             </a:r>
-            <a:endParaRPr lang="en-US" sz="1300" dirty="0"/>
+            <a:endParaRPr lang="en-US" sz="1200" dirty="0"/>
           </a:p>
         </p:txBody>
       </p:sp>
@@ -7774,7 +7774,7 @@
               <a:buNone/>
             </a:pPr>
             <a:r>
-              <a:rPr lang="en-US" sz="1300" dirty="0">
+              <a:rPr lang="en-US" sz="1200" dirty="0">
                 <a:solidFill>
                   <a:srgbClr val="1A1A1A"/>
                 </a:solidFill>
@@ -7784,7 +7784,7 @@
               </a:rPr>
               <a:t>HONDA FLAGSTAFF</a:t>
             </a:r>
-            <a:endParaRPr lang="en-US" sz="1300" dirty="0"/>
+            <a:endParaRPr lang="en-US" sz="1200" dirty="0"/>
           </a:p>
         </p:txBody>
       </p:sp>
@@ -7989,7 +7989,7 @@
               <a:buNone/>
             </a:pPr>
             <a:r>
-              <a:rPr lang="en-US" sz="1300" dirty="0">
+              <a:rPr lang="en-US" sz="1200" dirty="0">
                 <a:solidFill>
                   <a:srgbClr val="1A1A1A"/>
                 </a:solidFill>
@@ -7999,7 +7999,7 @@
               </a:rPr>
               <a:t>HYUNDAI PRESCOTT</a:t>
             </a:r>
-            <a:endParaRPr lang="en-US" sz="1300" dirty="0"/>
+            <a:endParaRPr lang="en-US" sz="1200" dirty="0"/>
           </a:p>
         </p:txBody>
       </p:sp>
@@ -8204,7 +8204,7 @@
               <a:buNone/>
             </a:pPr>
             <a:r>
-              <a:rPr lang="en-US" sz="1300" dirty="0">
+              <a:rPr lang="en-US" sz="1200" dirty="0">
                 <a:solidFill>
                   <a:srgbClr val="1A1A1A"/>
                 </a:solidFill>
@@ -8214,7 +8214,7 @@
               </a:rPr>
               <a:t>VW ST GEORGE</a:t>
             </a:r>
-            <a:endParaRPr lang="en-US" sz="1300" dirty="0"/>
+            <a:endParaRPr lang="en-US" sz="1200" dirty="0"/>
           </a:p>
         </p:txBody>
       </p:sp>
